--- a/sunumlar/6-sinif-unite3-algoritmalar-DETAYLI.pptx
+++ b/sunumlar/6-sinif-unite3-algoritmalar-DETAYLI.pptx
@@ -112,6 +112,1344 @@
     </a:lvl9pPr>
   </p:defaultTextStyle>
 </p:presentation>
+</file>
+
+<file path=ppt/notesMasters/notesMaster1.xml><?xml version="1.0" encoding="utf-8"?>
+<p:notesMaster xmlns:a="http://schemas.openxmlformats.org/drawingml/2006/main" xmlns:p="http://schemas.openxmlformats.org/presentationml/2006/main" xmlns:r="http://schemas.openxmlformats.org/officeDocument/2006/relationships">
+  <p:cSld>
+    <p:bg>
+      <p:bgRef idx="1001">
+        <a:schemeClr val="bg1"/>
+      </p:bgRef>
+    </p:bg>
+    <p:spTree>
+      <p:nvGrpSpPr>
+        <p:cNvPr id="1" name=""/>
+        <p:cNvGrpSpPr/>
+        <p:nvPr/>
+      </p:nvGrpSpPr>
+      <p:grpSpPr>
+        <a:xfrm>
+          <a:off x="0" y="0"/>
+          <a:ext cx="0" cy="0"/>
+          <a:chOff x="0" y="0"/>
+          <a:chExt cx="0" cy="0"/>
+        </a:xfrm>
+      </p:grpSpPr>
+      <p:sp>
+        <p:nvSpPr>
+          <p:cNvPr id="2" name="Header Placeholder 1"/>
+          <p:cNvSpPr>
+            <a:spLocks noGrp="1"/>
+          </p:cNvSpPr>
+          <p:nvPr>
+            <p:ph type="hdr" sz="quarter"/>
+          </p:nvPr>
+        </p:nvSpPr>
+        <p:spPr>
+          <a:xfrm>
+            <a:off x="0" y="0"/>
+            <a:ext cx="2971800" cy="457200"/>
+          </a:xfrm>
+          <a:prstGeom prst="rect">
+            <a:avLst/>
+          </a:prstGeom>
+        </p:spPr>
+        <p:txBody>
+          <a:bodyPr vert="horz" lIns="91440" tIns="45720" rIns="91440" bIns="45720" rtlCol="0"/>
+          <a:lstStyle>
+            <a:lvl1pPr algn="l">
+              <a:defRPr sz="1200"/>
+            </a:lvl1pPr>
+          </a:lstStyle>
+          <a:p>
+            <a:endParaRPr lang="en-US"/>
+          </a:p>
+        </p:txBody>
+      </p:sp>
+      <p:sp>
+        <p:nvSpPr>
+          <p:cNvPr id="3" name="Date Placeholder 2"/>
+          <p:cNvSpPr>
+            <a:spLocks noGrp="1"/>
+          </p:cNvSpPr>
+          <p:nvPr>
+            <p:ph type="dt" idx="1"/>
+          </p:nvPr>
+        </p:nvSpPr>
+        <p:spPr>
+          <a:xfrm>
+            <a:off x="3884613" y="0"/>
+            <a:ext cx="2971800" cy="457200"/>
+          </a:xfrm>
+          <a:prstGeom prst="rect">
+            <a:avLst/>
+          </a:prstGeom>
+        </p:spPr>
+        <p:txBody>
+          <a:bodyPr vert="horz" lIns="91440" tIns="45720" rIns="91440" bIns="45720" rtlCol="0"/>
+          <a:lstStyle>
+            <a:lvl1pPr algn="r">
+              <a:defRPr sz="1200"/>
+            </a:lvl1pPr>
+          </a:lstStyle>
+          <a:p>
+            <a:fld id="{0F89C1C7-3DCD-1040-A9CF-14679D8B5DDD}" type="datetimeFigureOut">
+              <a:rPr lang="en-US" smtClean="0"/>
+              <a:t>10/17/16</a:t>
+            </a:fld>
+            <a:endParaRPr lang="en-US"/>
+          </a:p>
+        </p:txBody>
+      </p:sp>
+      <p:sp>
+        <p:nvSpPr>
+          <p:cNvPr id="4" name="Slide Image Placeholder 3"/>
+          <p:cNvSpPr>
+            <a:spLocks noGrp="1" noRot="1" noChangeAspect="1"/>
+          </p:cNvSpPr>
+          <p:nvPr>
+            <p:ph type="sldImg" idx="2"/>
+          </p:nvPr>
+        </p:nvSpPr>
+        <p:spPr>
+          <a:xfrm>
+            <a:off x="1143000" y="685800"/>
+            <a:ext cx="4572000" cy="3429000"/>
+          </a:xfrm>
+          <a:prstGeom prst="rect">
+            <a:avLst/>
+          </a:prstGeom>
+          <a:noFill/>
+          <a:ln w="12700">
+            <a:solidFill>
+              <a:prstClr val="black"/>
+            </a:solidFill>
+          </a:ln>
+        </p:spPr>
+        <p:txBody>
+          <a:bodyPr vert="horz" lIns="91440" tIns="45720" rIns="91440" bIns="45720" rtlCol="0" anchor="ctr"/>
+          <a:lstStyle/>
+          <a:p>
+            <a:endParaRPr lang="en-US"/>
+          </a:p>
+        </p:txBody>
+      </p:sp>
+      <p:sp>
+        <p:nvSpPr>
+          <p:cNvPr id="5" name="Notes Placeholder 4"/>
+          <p:cNvSpPr>
+            <a:spLocks noGrp="1"/>
+          </p:cNvSpPr>
+          <p:nvPr>
+            <p:ph type="body" sz="quarter" idx="3"/>
+          </p:nvPr>
+        </p:nvSpPr>
+        <p:spPr>
+          <a:xfrm>
+            <a:off x="685800" y="4343400"/>
+            <a:ext cx="5486400" cy="4114800"/>
+          </a:xfrm>
+          <a:prstGeom prst="rect">
+            <a:avLst/>
+          </a:prstGeom>
+        </p:spPr>
+        <p:txBody>
+          <a:bodyPr vert="horz" lIns="91440" tIns="45720" rIns="91440" bIns="45720" rtlCol="0"/>
+          <a:lstStyle/>
+          <a:p>
+            <a:pPr lvl="0"/>
+            <a:r>
+              <a:rPr lang="en-US" smtClean="0"/>
+              <a:t>Click to edit Master text styles</a:t>
+            </a:r>
+          </a:p>
+          <a:p>
+            <a:pPr lvl="1"/>
+            <a:r>
+              <a:rPr lang="en-US" smtClean="0"/>
+              <a:t>Second level</a:t>
+            </a:r>
+          </a:p>
+          <a:p>
+            <a:pPr lvl="2"/>
+            <a:r>
+              <a:rPr lang="en-US" smtClean="0"/>
+              <a:t>Third level</a:t>
+            </a:r>
+          </a:p>
+          <a:p>
+            <a:pPr lvl="3"/>
+            <a:r>
+              <a:rPr lang="en-US" smtClean="0"/>
+              <a:t>Fourth level</a:t>
+            </a:r>
+          </a:p>
+          <a:p>
+            <a:pPr lvl="4"/>
+            <a:r>
+              <a:rPr lang="en-US" smtClean="0"/>
+              <a:t>Fifth level</a:t>
+            </a:r>
+            <a:endParaRPr lang="en-US"/>
+          </a:p>
+        </p:txBody>
+      </p:sp>
+      <p:sp>
+        <p:nvSpPr>
+          <p:cNvPr id="6" name="Footer Placeholder 5"/>
+          <p:cNvSpPr>
+            <a:spLocks noGrp="1"/>
+          </p:cNvSpPr>
+          <p:nvPr>
+            <p:ph type="ftr" sz="quarter" idx="4"/>
+          </p:nvPr>
+        </p:nvSpPr>
+        <p:spPr>
+          <a:xfrm>
+            <a:off x="0" y="8685213"/>
+            <a:ext cx="2971800" cy="457200"/>
+          </a:xfrm>
+          <a:prstGeom prst="rect">
+            <a:avLst/>
+          </a:prstGeom>
+        </p:spPr>
+        <p:txBody>
+          <a:bodyPr vert="horz" lIns="91440" tIns="45720" rIns="91440" bIns="45720" rtlCol="0" anchor="b"/>
+          <a:lstStyle>
+            <a:lvl1pPr algn="l">
+              <a:defRPr sz="1200"/>
+            </a:lvl1pPr>
+          </a:lstStyle>
+          <a:p>
+            <a:endParaRPr lang="en-US"/>
+          </a:p>
+        </p:txBody>
+      </p:sp>
+      <p:sp>
+        <p:nvSpPr>
+          <p:cNvPr id="7" name="Slide Number Placeholder 6"/>
+          <p:cNvSpPr>
+            <a:spLocks noGrp="1"/>
+          </p:cNvSpPr>
+          <p:nvPr>
+            <p:ph type="sldNum" sz="quarter" idx="5"/>
+          </p:nvPr>
+        </p:nvSpPr>
+        <p:spPr>
+          <a:xfrm>
+            <a:off x="3884613" y="8685213"/>
+            <a:ext cx="2971800" cy="457200"/>
+          </a:xfrm>
+          <a:prstGeom prst="rect">
+            <a:avLst/>
+          </a:prstGeom>
+        </p:spPr>
+        <p:txBody>
+          <a:bodyPr vert="horz" lIns="91440" tIns="45720" rIns="91440" bIns="45720" rtlCol="0" anchor="b"/>
+          <a:lstStyle>
+            <a:lvl1pPr algn="r">
+              <a:defRPr sz="1200"/>
+            </a:lvl1pPr>
+          </a:lstStyle>
+          <a:p>
+            <a:fld id="{BB5E49A5-4136-284D-997B-48E1D791AD67}" type="slidenum">
+              <a:rPr lang="en-US" smtClean="0"/>
+              <a:t>‹#›</a:t>
+            </a:fld>
+            <a:endParaRPr lang="en-US"/>
+          </a:p>
+        </p:txBody>
+      </p:sp>
+    </p:spTree>
+    <p:extLst>
+      <p:ext uri="{BB962C8B-B14F-4D97-AF65-F5344CB8AC3E}">
+        <p14:creationId xmlns:p14="http://schemas.microsoft.com/office/powerpoint/2010/main" val="2623252185"/>
+      </p:ext>
+    </p:extLst>
+  </p:cSld>
+  <p:clrMap bg1="lt1" tx1="dk1" bg2="lt2" tx2="dk2" accent1="accent1" accent2="accent2" accent3="accent3" accent4="accent4" accent5="accent5" accent6="accent6" hlink="hlink" folHlink="folHlink"/>
+  <p:notesStyle>
+    <a:lvl1pPr marL="0" algn="l" defTabSz="457200" rtl="0" eaLnBrk="1" latinLnBrk="0" hangingPunct="1">
+      <a:defRPr sz="1200" kern="1200">
+        <a:solidFill>
+          <a:schemeClr val="tx1"/>
+        </a:solidFill>
+        <a:latin typeface="+mn-lt"/>
+        <a:ea typeface="+mn-ea"/>
+        <a:cs typeface="+mn-cs"/>
+      </a:defRPr>
+    </a:lvl1pPr>
+    <a:lvl2pPr marL="457200" algn="l" defTabSz="457200" rtl="0" eaLnBrk="1" latinLnBrk="0" hangingPunct="1">
+      <a:defRPr sz="1200" kern="1200">
+        <a:solidFill>
+          <a:schemeClr val="tx1"/>
+        </a:solidFill>
+        <a:latin typeface="+mn-lt"/>
+        <a:ea typeface="+mn-ea"/>
+        <a:cs typeface="+mn-cs"/>
+      </a:defRPr>
+    </a:lvl2pPr>
+    <a:lvl3pPr marL="914400" algn="l" defTabSz="457200" rtl="0" eaLnBrk="1" latinLnBrk="0" hangingPunct="1">
+      <a:defRPr sz="1200" kern="1200">
+        <a:solidFill>
+          <a:schemeClr val="tx1"/>
+        </a:solidFill>
+        <a:latin typeface="+mn-lt"/>
+        <a:ea typeface="+mn-ea"/>
+        <a:cs typeface="+mn-cs"/>
+      </a:defRPr>
+    </a:lvl3pPr>
+    <a:lvl4pPr marL="1371600" algn="l" defTabSz="457200" rtl="0" eaLnBrk="1" latinLnBrk="0" hangingPunct="1">
+      <a:defRPr sz="1200" kern="1200">
+        <a:solidFill>
+          <a:schemeClr val="tx1"/>
+        </a:solidFill>
+        <a:latin typeface="+mn-lt"/>
+        <a:ea typeface="+mn-ea"/>
+        <a:cs typeface="+mn-cs"/>
+      </a:defRPr>
+    </a:lvl4pPr>
+    <a:lvl5pPr marL="1828800" algn="l" defTabSz="457200" rtl="0" eaLnBrk="1" latinLnBrk="0" hangingPunct="1">
+      <a:defRPr sz="1200" kern="1200">
+        <a:solidFill>
+          <a:schemeClr val="tx1"/>
+        </a:solidFill>
+        <a:latin typeface="+mn-lt"/>
+        <a:ea typeface="+mn-ea"/>
+        <a:cs typeface="+mn-cs"/>
+      </a:defRPr>
+    </a:lvl5pPr>
+    <a:lvl6pPr marL="2286000" algn="l" defTabSz="457200" rtl="0" eaLnBrk="1" latinLnBrk="0" hangingPunct="1">
+      <a:defRPr sz="1200" kern="1200">
+        <a:solidFill>
+          <a:schemeClr val="tx1"/>
+        </a:solidFill>
+        <a:latin typeface="+mn-lt"/>
+        <a:ea typeface="+mn-ea"/>
+        <a:cs typeface="+mn-cs"/>
+      </a:defRPr>
+    </a:lvl6pPr>
+    <a:lvl7pPr marL="2743200" algn="l" defTabSz="457200" rtl="0" eaLnBrk="1" latinLnBrk="0" hangingPunct="1">
+      <a:defRPr sz="1200" kern="1200">
+        <a:solidFill>
+          <a:schemeClr val="tx1"/>
+        </a:solidFill>
+        <a:latin typeface="+mn-lt"/>
+        <a:ea typeface="+mn-ea"/>
+        <a:cs typeface="+mn-cs"/>
+      </a:defRPr>
+    </a:lvl7pPr>
+    <a:lvl8pPr marL="3200400" algn="l" defTabSz="457200" rtl="0" eaLnBrk="1" latinLnBrk="0" hangingPunct="1">
+      <a:defRPr sz="1200" kern="1200">
+        <a:solidFill>
+          <a:schemeClr val="tx1"/>
+        </a:solidFill>
+        <a:latin typeface="+mn-lt"/>
+        <a:ea typeface="+mn-ea"/>
+        <a:cs typeface="+mn-cs"/>
+      </a:defRPr>
+    </a:lvl8pPr>
+    <a:lvl9pPr marL="3657600" algn="l" defTabSz="457200" rtl="0" eaLnBrk="1" latinLnBrk="0" hangingPunct="1">
+      <a:defRPr sz="1200" kern="1200">
+        <a:solidFill>
+          <a:schemeClr val="tx1"/>
+        </a:solidFill>
+        <a:latin typeface="+mn-lt"/>
+        <a:ea typeface="+mn-ea"/>
+        <a:cs typeface="+mn-cs"/>
+      </a:defRPr>
+    </a:lvl9pPr>
+  </p:notesStyle>
+</p:notesMaster>
+</file>
+
+<file path=ppt/notesSlides/notesSlide1.xml><?xml version="1.0" encoding="utf-8"?>
+<p:notes xmlns:a="http://schemas.openxmlformats.org/drawingml/2006/main" xmlns:p="http://schemas.openxmlformats.org/presentationml/2006/main" xmlns:r="http://schemas.openxmlformats.org/officeDocument/2006/relationships">
+  <p:cSld>
+    <p:spTree>
+      <p:nvGrpSpPr>
+        <p:cNvPr id="1" name=""/>
+        <p:cNvGrpSpPr/>
+        <p:nvPr/>
+      </p:nvGrpSpPr>
+      <p:grpSpPr>
+        <a:xfrm>
+          <a:off x="0" y="0"/>
+          <a:ext cx="0" cy="0"/>
+          <a:chOff x="0" y="0"/>
+          <a:chExt cx="0" cy="0"/>
+        </a:xfrm>
+      </p:grpSpPr>
+      <p:sp>
+        <p:nvSpPr>
+          <p:cNvPr id="2" name="Slide Image Placeholder 1"/>
+          <p:cNvSpPr>
+            <a:spLocks noGrp="1"/>
+          </p:cNvSpPr>
+          <p:nvPr>
+            <p:ph type="sldImg" idx="2"/>
+          </p:nvPr>
+        </p:nvSpPr>
+        <p:spPr/>
+      </p:sp>
+      <p:sp>
+        <p:nvSpPr>
+          <p:cNvPr id="3" name="Notes Placeholder 2"/>
+          <p:cNvSpPr>
+            <a:spLocks noGrp="1"/>
+          </p:cNvSpPr>
+          <p:nvPr>
+            <p:ph type="body" idx="3" sz="quarter"/>
+          </p:nvPr>
+        </p:nvSpPr>
+        <p:spPr/>
+        <p:txBody>
+          <a:bodyPr/>
+          <a:lstStyle/>
+          <a:p>
+            <a:r>
+              <a:t>🎨 GÖRSELLEŞTİRME ÖNERİLERİ:</a:t>
+            </a:r>
+          </a:p>
+          <a:p/>
+          <a:p>
+            <a:r>
+              <a:t>📸 Görsel: Akış şeması örnekleri</a:t>
+            </a:r>
+          </a:p>
+          <a:p>
+            <a:r>
+              <a:t>🎬 Video: Algoritma nedir? Günlük hayattan örnekler</a:t>
+            </a:r>
+          </a:p>
+          <a:p>
+            <a:r>
+              <a:t>💡 İnfografik: Akış şeması sembolleri</a:t>
+            </a:r>
+          </a:p>
+          <a:p>
+            <a:r>
+              <a:t>📸 Görsel: Koşullu yapılar akış diyagramı</a:t>
+            </a:r>
+          </a:p>
+          <a:p>
+            <a:r>
+              <a:t>🎬 Video: Koşullu ifadeler Scratch'te</a:t>
+            </a:r>
+          </a:p>
+        </p:txBody>
+      </p:sp>
+      <p:sp>
+        <p:nvSpPr>
+          <p:cNvPr id="4" name="Slide Number Placeholder 3"/>
+          <p:cNvSpPr>
+            <a:spLocks noGrp="1"/>
+          </p:cNvSpPr>
+          <p:nvPr>
+            <p:ph type="sldNum" idx="5" sz="quarter"/>
+          </p:nvPr>
+        </p:nvSpPr>
+        <p:spPr/>
+      </p:sp>
+    </p:spTree>
+  </p:cSld>
+  <p:clrMapOvr>
+    <a:masterClrMapping/>
+  </p:clrMapOvr>
+</p:notes>
+</file>
+
+<file path=ppt/notesSlides/notesSlide2.xml><?xml version="1.0" encoding="utf-8"?>
+<p:notes xmlns:a="http://schemas.openxmlformats.org/drawingml/2006/main" xmlns:p="http://schemas.openxmlformats.org/presentationml/2006/main" xmlns:r="http://schemas.openxmlformats.org/officeDocument/2006/relationships">
+  <p:cSld>
+    <p:spTree>
+      <p:nvGrpSpPr>
+        <p:cNvPr id="1" name=""/>
+        <p:cNvGrpSpPr/>
+        <p:nvPr/>
+      </p:nvGrpSpPr>
+      <p:grpSpPr>
+        <a:xfrm>
+          <a:off x="0" y="0"/>
+          <a:ext cx="0" cy="0"/>
+          <a:chOff x="0" y="0"/>
+          <a:chExt cx="0" cy="0"/>
+        </a:xfrm>
+      </p:grpSpPr>
+      <p:sp>
+        <p:nvSpPr>
+          <p:cNvPr id="2" name="Slide Image Placeholder 1"/>
+          <p:cNvSpPr>
+            <a:spLocks noGrp="1"/>
+          </p:cNvSpPr>
+          <p:nvPr>
+            <p:ph type="sldImg" idx="2"/>
+          </p:nvPr>
+        </p:nvSpPr>
+        <p:spPr/>
+      </p:sp>
+      <p:sp>
+        <p:nvSpPr>
+          <p:cNvPr id="3" name="Notes Placeholder 2"/>
+          <p:cNvSpPr>
+            <a:spLocks noGrp="1"/>
+          </p:cNvSpPr>
+          <p:nvPr>
+            <p:ph type="body" idx="3" sz="quarter"/>
+          </p:nvPr>
+        </p:nvSpPr>
+        <p:spPr/>
+        <p:txBody>
+          <a:bodyPr/>
+          <a:lstStyle/>
+          <a:p>
+            <a:r>
+              <a:t>🎨 GÖRSELLEŞTİRME ÖNERİLERİ:</a:t>
+            </a:r>
+          </a:p>
+          <a:p/>
+          <a:p>
+            <a:r>
+              <a:t>📸 Görsel: CPU, RAM ve anakart fotoğrafları</a:t>
+            </a:r>
+          </a:p>
+          <a:p>
+            <a:r>
+              <a:t>🎬 Video: Bilgisayar donanımı tanıtım videosu (1-2 dk)</a:t>
+            </a:r>
+          </a:p>
+          <a:p>
+            <a:r>
+              <a:t>💡 İnfografik: Bilgisayar bileşenleri şeması</a:t>
+            </a:r>
+          </a:p>
+          <a:p>
+            <a:r>
+              <a:t>📸 Görsel: Akış şeması örnekleri</a:t>
+            </a:r>
+          </a:p>
+          <a:p>
+            <a:r>
+              <a:t>🎬 Video: Algoritma nedir? Günlük hayattan örnekler</a:t>
+            </a:r>
+          </a:p>
+          <a:p>
+            <a:r>
+              <a:t>💡 İnfografik: Akış şeması sembolleri</a:t>
+            </a:r>
+          </a:p>
+          <a:p>
+            <a:r>
+              <a:t>📸 Görsel: Döngü mantığı şeması</a:t>
+            </a:r>
+          </a:p>
+          <a:p>
+            <a:r>
+              <a:t>🎬 Video: Döngüler Scratch'te nasıl kullanılır?</a:t>
+            </a:r>
+          </a:p>
+          <a:p>
+            <a:r>
+              <a:t>📸 Görsel: Koşullu yapılar akış diyagramı</a:t>
+            </a:r>
+          </a:p>
+          <a:p>
+            <a:r>
+              <a:t>🎬 Video: Koşullu ifadeler Scratch'te</a:t>
+            </a:r>
+          </a:p>
+          <a:p>
+            <a:r>
+              <a:t>📸 Görsel: Temel tasarım prensipleri</a:t>
+            </a:r>
+          </a:p>
+          <a:p>
+            <a:r>
+              <a:t>🎬 Video: Dijital tasarıma giriş</a:t>
+            </a:r>
+          </a:p>
+          <a:p>
+            <a:r>
+              <a:t>💡 İnfografik: Renk teorisi ve uyumu</a:t>
+            </a:r>
+          </a:p>
+        </p:txBody>
+      </p:sp>
+      <p:sp>
+        <p:nvSpPr>
+          <p:cNvPr id="4" name="Slide Number Placeholder 3"/>
+          <p:cNvSpPr>
+            <a:spLocks noGrp="1"/>
+          </p:cNvSpPr>
+          <p:nvPr>
+            <p:ph type="sldNum" idx="5" sz="quarter"/>
+          </p:nvPr>
+        </p:nvSpPr>
+        <p:spPr/>
+      </p:sp>
+    </p:spTree>
+  </p:cSld>
+  <p:clrMapOvr>
+    <a:masterClrMapping/>
+  </p:clrMapOvr>
+</p:notes>
+</file>
+
+<file path=ppt/notesSlides/notesSlide3.xml><?xml version="1.0" encoding="utf-8"?>
+<p:notes xmlns:a="http://schemas.openxmlformats.org/drawingml/2006/main" xmlns:p="http://schemas.openxmlformats.org/presentationml/2006/main" xmlns:r="http://schemas.openxmlformats.org/officeDocument/2006/relationships">
+  <p:cSld>
+    <p:spTree>
+      <p:nvGrpSpPr>
+        <p:cNvPr id="1" name=""/>
+        <p:cNvGrpSpPr/>
+        <p:nvPr/>
+      </p:nvGrpSpPr>
+      <p:grpSpPr>
+        <a:xfrm>
+          <a:off x="0" y="0"/>
+          <a:ext cx="0" cy="0"/>
+          <a:chOff x="0" y="0"/>
+          <a:chExt cx="0" cy="0"/>
+        </a:xfrm>
+      </p:grpSpPr>
+      <p:sp>
+        <p:nvSpPr>
+          <p:cNvPr id="2" name="Slide Image Placeholder 1"/>
+          <p:cNvSpPr>
+            <a:spLocks noGrp="1"/>
+          </p:cNvSpPr>
+          <p:nvPr>
+            <p:ph type="sldImg" idx="2"/>
+          </p:nvPr>
+        </p:nvSpPr>
+        <p:spPr/>
+      </p:sp>
+      <p:sp>
+        <p:nvSpPr>
+          <p:cNvPr id="3" name="Notes Placeholder 2"/>
+          <p:cNvSpPr>
+            <a:spLocks noGrp="1"/>
+          </p:cNvSpPr>
+          <p:nvPr>
+            <p:ph type="body" idx="3" sz="quarter"/>
+          </p:nvPr>
+        </p:nvSpPr>
+        <p:spPr/>
+        <p:txBody>
+          <a:bodyPr/>
+          <a:lstStyle/>
+          <a:p>
+            <a:r>
+              <a:t>🎨 GÖRSELLEŞTİRME ÖNERİLERİ:</a:t>
+            </a:r>
+          </a:p>
+          <a:p/>
+          <a:p>
+            <a:r>
+              <a:t>📸 Görsel: CPU, RAM ve anakart fotoğrafları</a:t>
+            </a:r>
+          </a:p>
+          <a:p>
+            <a:r>
+              <a:t>🎬 Video: Bilgisayar donanımı tanıtım videosu (1-2 dk)</a:t>
+            </a:r>
+          </a:p>
+          <a:p>
+            <a:r>
+              <a:t>💡 İnfografik: Bilgisayar bileşenleri şeması</a:t>
+            </a:r>
+          </a:p>
+          <a:p>
+            <a:r>
+              <a:t>📸 Görsel: LAN ve WAN ağ topolojileri şeması</a:t>
+            </a:r>
+          </a:p>
+          <a:p>
+            <a:r>
+              <a:t>🎬 Video: İnternet nasıl çalışır? Animasyonlu anlatım</a:t>
+            </a:r>
+          </a:p>
+          <a:p>
+            <a:r>
+              <a:t>💡 İnfografik: Ev ağı kurulumu diyagramı</a:t>
+            </a:r>
+          </a:p>
+          <a:p>
+            <a:r>
+              <a:t>📸 Görsel: Scratch arayüzü ekran görüntüsü</a:t>
+            </a:r>
+          </a:p>
+          <a:p>
+            <a:r>
+              <a:t>🎬 Video: Scratch ile basit oyun yapımı (3-5 dk)</a:t>
+            </a:r>
+          </a:p>
+          <a:p>
+            <a:r>
+              <a:t>💡 Ekran kaydı: Adım adım Scratch projesi</a:t>
+            </a:r>
+          </a:p>
+          <a:p>
+            <a:r>
+              <a:t>📸 Görsel: Akış şeması örnekleri</a:t>
+            </a:r>
+          </a:p>
+          <a:p>
+            <a:r>
+              <a:t>🎬 Video: Algoritma nedir? Günlük hayattan örnekler</a:t>
+            </a:r>
+          </a:p>
+          <a:p>
+            <a:r>
+              <a:t>💡 İnfografik: Akış şeması sembolleri</a:t>
+            </a:r>
+          </a:p>
+          <a:p>
+            <a:r>
+              <a:t>📸 Görsel: Koşullu yapılar akış diyagramı</a:t>
+            </a:r>
+          </a:p>
+          <a:p>
+            <a:r>
+              <a:t>🎬 Video: Koşullu ifadeler Scratch'te</a:t>
+            </a:r>
+          </a:p>
+        </p:txBody>
+      </p:sp>
+      <p:sp>
+        <p:nvSpPr>
+          <p:cNvPr id="4" name="Slide Number Placeholder 3"/>
+          <p:cNvSpPr>
+            <a:spLocks noGrp="1"/>
+          </p:cNvSpPr>
+          <p:nvPr>
+            <p:ph type="sldNum" idx="5" sz="quarter"/>
+          </p:nvPr>
+        </p:nvSpPr>
+        <p:spPr/>
+      </p:sp>
+    </p:spTree>
+  </p:cSld>
+  <p:clrMapOvr>
+    <a:masterClrMapping/>
+  </p:clrMapOvr>
+</p:notes>
+</file>
+
+<file path=ppt/notesSlides/notesSlide4.xml><?xml version="1.0" encoding="utf-8"?>
+<p:notes xmlns:a="http://schemas.openxmlformats.org/drawingml/2006/main" xmlns:p="http://schemas.openxmlformats.org/presentationml/2006/main" xmlns:r="http://schemas.openxmlformats.org/officeDocument/2006/relationships">
+  <p:cSld>
+    <p:spTree>
+      <p:nvGrpSpPr>
+        <p:cNvPr id="1" name=""/>
+        <p:cNvGrpSpPr/>
+        <p:nvPr/>
+      </p:nvGrpSpPr>
+      <p:grpSpPr>
+        <a:xfrm>
+          <a:off x="0" y="0"/>
+          <a:ext cx="0" cy="0"/>
+          <a:chOff x="0" y="0"/>
+          <a:chExt cx="0" cy="0"/>
+        </a:xfrm>
+      </p:grpSpPr>
+      <p:sp>
+        <p:nvSpPr>
+          <p:cNvPr id="2" name="Slide Image Placeholder 1"/>
+          <p:cNvSpPr>
+            <a:spLocks noGrp="1"/>
+          </p:cNvSpPr>
+          <p:nvPr>
+            <p:ph type="sldImg" idx="2"/>
+          </p:nvPr>
+        </p:nvSpPr>
+        <p:spPr/>
+      </p:sp>
+      <p:sp>
+        <p:nvSpPr>
+          <p:cNvPr id="3" name="Notes Placeholder 2"/>
+          <p:cNvSpPr>
+            <a:spLocks noGrp="1"/>
+          </p:cNvSpPr>
+          <p:nvPr>
+            <p:ph type="body" idx="3" sz="quarter"/>
+          </p:nvPr>
+        </p:nvSpPr>
+        <p:spPr/>
+        <p:txBody>
+          <a:bodyPr/>
+          <a:lstStyle/>
+          <a:p>
+            <a:r>
+              <a:t>🎨 GÖRSELLEŞTİRME ÖNERİLERİ:</a:t>
+            </a:r>
+          </a:p>
+          <a:p/>
+          <a:p>
+            <a:r>
+              <a:t>📸 Görsel: CPU, RAM ve anakart fotoğrafları</a:t>
+            </a:r>
+          </a:p>
+          <a:p>
+            <a:r>
+              <a:t>🎬 Video: Bilgisayar donanımı tanıtım videosu (1-2 dk)</a:t>
+            </a:r>
+          </a:p>
+          <a:p>
+            <a:r>
+              <a:t>💡 İnfografik: Bilgisayar bileşenleri şeması</a:t>
+            </a:r>
+          </a:p>
+          <a:p>
+            <a:r>
+              <a:t>📸 Görsel: LAN ve WAN ağ topolojileri şeması</a:t>
+            </a:r>
+          </a:p>
+          <a:p>
+            <a:r>
+              <a:t>🎬 Video: İnternet nasıl çalışır? Animasyonlu anlatım</a:t>
+            </a:r>
+          </a:p>
+          <a:p>
+            <a:r>
+              <a:t>💡 İnfografik: Ev ağı kurulumu diyagramı</a:t>
+            </a:r>
+          </a:p>
+          <a:p>
+            <a:r>
+              <a:t>📸 Görsel: Scratch arayüzü ekran görüntüsü</a:t>
+            </a:r>
+          </a:p>
+          <a:p>
+            <a:r>
+              <a:t>🎬 Video: Scratch ile basit oyun yapımı (3-5 dk)</a:t>
+            </a:r>
+          </a:p>
+          <a:p>
+            <a:r>
+              <a:t>💡 Ekran kaydı: Adım adım Scratch projesi</a:t>
+            </a:r>
+          </a:p>
+          <a:p>
+            <a:r>
+              <a:t>📸 Görsel: Akış şeması örnekleri</a:t>
+            </a:r>
+          </a:p>
+          <a:p>
+            <a:r>
+              <a:t>🎬 Video: Algoritma nedir? Günlük hayattan örnekler</a:t>
+            </a:r>
+          </a:p>
+          <a:p>
+            <a:r>
+              <a:t>💡 İnfografik: Akış şeması sembolleri</a:t>
+            </a:r>
+          </a:p>
+          <a:p>
+            <a:r>
+              <a:t>📸 Görsel: Koşullu yapılar akış diyagramı</a:t>
+            </a:r>
+          </a:p>
+          <a:p>
+            <a:r>
+              <a:t>🎬 Video: Koşullu ifadeler Scratch'te</a:t>
+            </a:r>
+          </a:p>
+        </p:txBody>
+      </p:sp>
+      <p:sp>
+        <p:nvSpPr>
+          <p:cNvPr id="4" name="Slide Number Placeholder 3"/>
+          <p:cNvSpPr>
+            <a:spLocks noGrp="1"/>
+          </p:cNvSpPr>
+          <p:nvPr>
+            <p:ph type="sldNum" idx="5" sz="quarter"/>
+          </p:nvPr>
+        </p:nvSpPr>
+        <p:spPr/>
+      </p:sp>
+    </p:spTree>
+  </p:cSld>
+  <p:clrMapOvr>
+    <a:masterClrMapping/>
+  </p:clrMapOvr>
+</p:notes>
+</file>
+
+<file path=ppt/notesSlides/notesSlide5.xml><?xml version="1.0" encoding="utf-8"?>
+<p:notes xmlns:a="http://schemas.openxmlformats.org/drawingml/2006/main" xmlns:p="http://schemas.openxmlformats.org/presentationml/2006/main" xmlns:r="http://schemas.openxmlformats.org/officeDocument/2006/relationships">
+  <p:cSld>
+    <p:spTree>
+      <p:nvGrpSpPr>
+        <p:cNvPr id="1" name=""/>
+        <p:cNvGrpSpPr/>
+        <p:nvPr/>
+      </p:nvGrpSpPr>
+      <p:grpSpPr>
+        <a:xfrm>
+          <a:off x="0" y="0"/>
+          <a:ext cx="0" cy="0"/>
+          <a:chOff x="0" y="0"/>
+          <a:chExt cx="0" cy="0"/>
+        </a:xfrm>
+      </p:grpSpPr>
+      <p:sp>
+        <p:nvSpPr>
+          <p:cNvPr id="2" name="Slide Image Placeholder 1"/>
+          <p:cNvSpPr>
+            <a:spLocks noGrp="1"/>
+          </p:cNvSpPr>
+          <p:nvPr>
+            <p:ph type="sldImg" idx="2"/>
+          </p:nvPr>
+        </p:nvSpPr>
+        <p:spPr/>
+      </p:sp>
+      <p:sp>
+        <p:nvSpPr>
+          <p:cNvPr id="3" name="Notes Placeholder 2"/>
+          <p:cNvSpPr>
+            <a:spLocks noGrp="1"/>
+          </p:cNvSpPr>
+          <p:nvPr>
+            <p:ph type="body" idx="3" sz="quarter"/>
+          </p:nvPr>
+        </p:nvSpPr>
+        <p:spPr/>
+        <p:txBody>
+          <a:bodyPr/>
+          <a:lstStyle/>
+          <a:p>
+            <a:r>
+              <a:t>🎨 GÖRSELLEŞTİRME ÖNERİLERİ:</a:t>
+            </a:r>
+          </a:p>
+          <a:p/>
+          <a:p>
+            <a:r>
+              <a:t>📸 Görsel: LAN ve WAN ağ topolojileri şeması</a:t>
+            </a:r>
+          </a:p>
+          <a:p>
+            <a:r>
+              <a:t>🎬 Video: İnternet nasıl çalışır? Animasyonlu anlatım</a:t>
+            </a:r>
+          </a:p>
+          <a:p>
+            <a:r>
+              <a:t>💡 İnfografik: Ev ağı kurulumu diyagramı</a:t>
+            </a:r>
+          </a:p>
+          <a:p>
+            <a:r>
+              <a:t>📸 Görsel: Koşullu yapılar akış diyagramı</a:t>
+            </a:r>
+          </a:p>
+          <a:p>
+            <a:r>
+              <a:t>🎬 Video: Koşullu ifadeler Scratch'te</a:t>
+            </a:r>
+          </a:p>
+        </p:txBody>
+      </p:sp>
+      <p:sp>
+        <p:nvSpPr>
+          <p:cNvPr id="4" name="Slide Number Placeholder 3"/>
+          <p:cNvSpPr>
+            <a:spLocks noGrp="1"/>
+          </p:cNvSpPr>
+          <p:nvPr>
+            <p:ph type="sldNum" idx="5" sz="quarter"/>
+          </p:nvPr>
+        </p:nvSpPr>
+        <p:spPr/>
+      </p:sp>
+    </p:spTree>
+  </p:cSld>
+  <p:clrMapOvr>
+    <a:masterClrMapping/>
+  </p:clrMapOvr>
+</p:notes>
+</file>
+
+<file path=ppt/notesSlides/notesSlide6.xml><?xml version="1.0" encoding="utf-8"?>
+<p:notes xmlns:a="http://schemas.openxmlformats.org/drawingml/2006/main" xmlns:p="http://schemas.openxmlformats.org/presentationml/2006/main" xmlns:r="http://schemas.openxmlformats.org/officeDocument/2006/relationships">
+  <p:cSld>
+    <p:spTree>
+      <p:nvGrpSpPr>
+        <p:cNvPr id="1" name=""/>
+        <p:cNvGrpSpPr/>
+        <p:nvPr/>
+      </p:nvGrpSpPr>
+      <p:grpSpPr>
+        <a:xfrm>
+          <a:off x="0" y="0"/>
+          <a:ext cx="0" cy="0"/>
+          <a:chOff x="0" y="0"/>
+          <a:chExt cx="0" cy="0"/>
+        </a:xfrm>
+      </p:grpSpPr>
+      <p:sp>
+        <p:nvSpPr>
+          <p:cNvPr id="2" name="Slide Image Placeholder 1"/>
+          <p:cNvSpPr>
+            <a:spLocks noGrp="1"/>
+          </p:cNvSpPr>
+          <p:nvPr>
+            <p:ph type="sldImg" idx="2"/>
+          </p:nvPr>
+        </p:nvSpPr>
+        <p:spPr/>
+      </p:sp>
+      <p:sp>
+        <p:nvSpPr>
+          <p:cNvPr id="3" name="Notes Placeholder 2"/>
+          <p:cNvSpPr>
+            <a:spLocks noGrp="1"/>
+          </p:cNvSpPr>
+          <p:nvPr>
+            <p:ph type="body" idx="3" sz="quarter"/>
+          </p:nvPr>
+        </p:nvSpPr>
+        <p:spPr/>
+        <p:txBody>
+          <a:bodyPr/>
+          <a:lstStyle/>
+          <a:p>
+            <a:r>
+              <a:t>🎨 GÖRSELLEŞTİRME ÖNERİLERİ:</a:t>
+            </a:r>
+          </a:p>
+          <a:p/>
+          <a:p>
+            <a:r>
+              <a:t>📸 Görsel: LAN ve WAN ağ topolojileri şeması</a:t>
+            </a:r>
+          </a:p>
+          <a:p>
+            <a:r>
+              <a:t>🎬 Video: İnternet nasıl çalışır? Animasyonlu anlatım</a:t>
+            </a:r>
+          </a:p>
+          <a:p>
+            <a:r>
+              <a:t>💡 İnfografik: Ev ağı kurulumu diyagramı</a:t>
+            </a:r>
+          </a:p>
+          <a:p>
+            <a:r>
+              <a:t>📸 Görsel: Döngü mantığı şeması</a:t>
+            </a:r>
+          </a:p>
+          <a:p>
+            <a:r>
+              <a:t>🎬 Video: Döngüler Scratch'te nasıl kullanılır?</a:t>
+            </a:r>
+          </a:p>
+          <a:p>
+            <a:r>
+              <a:t>📸 Görsel: Koşullu yapılar akış diyagramı</a:t>
+            </a:r>
+          </a:p>
+          <a:p>
+            <a:r>
+              <a:t>🎬 Video: Koşullu ifadeler Scratch'te</a:t>
+            </a:r>
+          </a:p>
+        </p:txBody>
+      </p:sp>
+      <p:sp>
+        <p:nvSpPr>
+          <p:cNvPr id="4" name="Slide Number Placeholder 3"/>
+          <p:cNvSpPr>
+            <a:spLocks noGrp="1"/>
+          </p:cNvSpPr>
+          <p:nvPr>
+            <p:ph type="sldNum" idx="5" sz="quarter"/>
+          </p:nvPr>
+        </p:nvSpPr>
+        <p:spPr/>
+      </p:sp>
+    </p:spTree>
+  </p:cSld>
+  <p:clrMapOvr>
+    <a:masterClrMapping/>
+  </p:clrMapOvr>
+</p:notes>
+</file>
+
+<file path=ppt/notesSlides/notesSlide7.xml><?xml version="1.0" encoding="utf-8"?>
+<p:notes xmlns:a="http://schemas.openxmlformats.org/drawingml/2006/main" xmlns:p="http://schemas.openxmlformats.org/presentationml/2006/main" xmlns:r="http://schemas.openxmlformats.org/officeDocument/2006/relationships">
+  <p:cSld>
+    <p:spTree>
+      <p:nvGrpSpPr>
+        <p:cNvPr id="1" name=""/>
+        <p:cNvGrpSpPr/>
+        <p:nvPr/>
+      </p:nvGrpSpPr>
+      <p:grpSpPr>
+        <a:xfrm>
+          <a:off x="0" y="0"/>
+          <a:ext cx="0" cy="0"/>
+          <a:chOff x="0" y="0"/>
+          <a:chExt cx="0" cy="0"/>
+        </a:xfrm>
+      </p:grpSpPr>
+      <p:sp>
+        <p:nvSpPr>
+          <p:cNvPr id="2" name="Slide Image Placeholder 1"/>
+          <p:cNvSpPr>
+            <a:spLocks noGrp="1"/>
+          </p:cNvSpPr>
+          <p:nvPr>
+            <p:ph type="sldImg" idx="2"/>
+          </p:nvPr>
+        </p:nvSpPr>
+        <p:spPr/>
+      </p:sp>
+      <p:sp>
+        <p:nvSpPr>
+          <p:cNvPr id="3" name="Notes Placeholder 2"/>
+          <p:cNvSpPr>
+            <a:spLocks noGrp="1"/>
+          </p:cNvSpPr>
+          <p:nvPr>
+            <p:ph type="body" idx="3" sz="quarter"/>
+          </p:nvPr>
+        </p:nvSpPr>
+        <p:spPr/>
+        <p:txBody>
+          <a:bodyPr/>
+          <a:lstStyle/>
+          <a:p>
+            <a:r>
+              <a:t>🎨 GÖRSELLEŞTİRME ÖNERİLERİ:</a:t>
+            </a:r>
+          </a:p>
+          <a:p/>
+          <a:p>
+            <a:r>
+              <a:t>📸 Görsel: CPU, RAM ve anakart fotoğrafları</a:t>
+            </a:r>
+          </a:p>
+          <a:p>
+            <a:r>
+              <a:t>🎬 Video: Bilgisayar donanımı tanıtım videosu (1-2 dk)</a:t>
+            </a:r>
+          </a:p>
+          <a:p>
+            <a:r>
+              <a:t>💡 İnfografik: Bilgisayar bileşenleri şeması</a:t>
+            </a:r>
+          </a:p>
+          <a:p>
+            <a:r>
+              <a:t>📸 Görsel: LAN ve WAN ağ topolojileri şeması</a:t>
+            </a:r>
+          </a:p>
+          <a:p>
+            <a:r>
+              <a:t>🎬 Video: İnternet nasıl çalışır? Animasyonlu anlatım</a:t>
+            </a:r>
+          </a:p>
+          <a:p>
+            <a:r>
+              <a:t>💡 İnfografik: Ev ağı kurulumu diyagramı</a:t>
+            </a:r>
+          </a:p>
+          <a:p>
+            <a:r>
+              <a:t>📸 Görsel: Scratch arayüzü ekran görüntüsü</a:t>
+            </a:r>
+          </a:p>
+          <a:p>
+            <a:r>
+              <a:t>🎬 Video: Scratch ile basit oyun yapımı (3-5 dk)</a:t>
+            </a:r>
+          </a:p>
+          <a:p>
+            <a:r>
+              <a:t>💡 Ekran kaydı: Adım adım Scratch projesi</a:t>
+            </a:r>
+          </a:p>
+          <a:p>
+            <a:r>
+              <a:t>📸 Görsel: Akış şeması örnekleri</a:t>
+            </a:r>
+          </a:p>
+          <a:p>
+            <a:r>
+              <a:t>🎬 Video: Algoritma nedir? Günlük hayattan örnekler</a:t>
+            </a:r>
+          </a:p>
+          <a:p>
+            <a:r>
+              <a:t>💡 İnfografik: Akış şeması sembolleri</a:t>
+            </a:r>
+          </a:p>
+        </p:txBody>
+      </p:sp>
+      <p:sp>
+        <p:nvSpPr>
+          <p:cNvPr id="4" name="Slide Number Placeholder 3"/>
+          <p:cNvSpPr>
+            <a:spLocks noGrp="1"/>
+          </p:cNvSpPr>
+          <p:nvPr>
+            <p:ph type="sldNum" idx="5" sz="quarter"/>
+          </p:nvPr>
+        </p:nvSpPr>
+        <p:spPr/>
+      </p:sp>
+    </p:spTree>
+  </p:cSld>
+  <p:clrMapOvr>
+    <a:masterClrMapping/>
+  </p:clrMapOvr>
+</p:notes>
+</file>
+
+<file path=ppt/notesSlides/notesSlide8.xml><?xml version="1.0" encoding="utf-8"?>
+<p:notes xmlns:a="http://schemas.openxmlformats.org/drawingml/2006/main" xmlns:p="http://schemas.openxmlformats.org/presentationml/2006/main" xmlns:r="http://schemas.openxmlformats.org/officeDocument/2006/relationships">
+  <p:cSld>
+    <p:spTree>
+      <p:nvGrpSpPr>
+        <p:cNvPr id="1" name=""/>
+        <p:cNvGrpSpPr/>
+        <p:nvPr/>
+      </p:nvGrpSpPr>
+      <p:grpSpPr>
+        <a:xfrm>
+          <a:off x="0" y="0"/>
+          <a:ext cx="0" cy="0"/>
+          <a:chOff x="0" y="0"/>
+          <a:chExt cx="0" cy="0"/>
+        </a:xfrm>
+      </p:grpSpPr>
+      <p:sp>
+        <p:nvSpPr>
+          <p:cNvPr id="2" name="Slide Image Placeholder 1"/>
+          <p:cNvSpPr>
+            <a:spLocks noGrp="1"/>
+          </p:cNvSpPr>
+          <p:nvPr>
+            <p:ph type="sldImg" idx="2"/>
+          </p:nvPr>
+        </p:nvSpPr>
+        <p:spPr/>
+      </p:sp>
+      <p:sp>
+        <p:nvSpPr>
+          <p:cNvPr id="3" name="Notes Placeholder 2"/>
+          <p:cNvSpPr>
+            <a:spLocks noGrp="1"/>
+          </p:cNvSpPr>
+          <p:nvPr>
+            <p:ph type="body" idx="3" sz="quarter"/>
+          </p:nvPr>
+        </p:nvSpPr>
+        <p:spPr/>
+        <p:txBody>
+          <a:bodyPr/>
+          <a:lstStyle/>
+          <a:p>
+            <a:r>
+              <a:t>🎨 GÖRSELLEŞTİRME ÖNERİLERİ:</a:t>
+            </a:r>
+          </a:p>
+          <a:p/>
+          <a:p>
+            <a:r>
+              <a:t>📸 Görsel: CPU, RAM ve anakart fotoğrafları</a:t>
+            </a:r>
+          </a:p>
+          <a:p>
+            <a:r>
+              <a:t>🎬 Video: Bilgisayar donanımı tanıtım videosu (1-2 dk)</a:t>
+            </a:r>
+          </a:p>
+          <a:p>
+            <a:r>
+              <a:t>💡 İnfografik: Bilgisayar bileşenleri şeması</a:t>
+            </a:r>
+          </a:p>
+          <a:p>
+            <a:r>
+              <a:t>📸 Görsel: LAN ve WAN ağ topolojileri şeması</a:t>
+            </a:r>
+          </a:p>
+          <a:p>
+            <a:r>
+              <a:t>🎬 Video: İnternet nasıl çalışır? Animasyonlu anlatım</a:t>
+            </a:r>
+          </a:p>
+          <a:p>
+            <a:r>
+              <a:t>💡 İnfografik: Ev ağı kurulumu diyagramı</a:t>
+            </a:r>
+          </a:p>
+          <a:p>
+            <a:r>
+              <a:t>📸 Görsel: Akış şeması örnekleri</a:t>
+            </a:r>
+          </a:p>
+          <a:p>
+            <a:r>
+              <a:t>🎬 Video: Algoritma nedir? Günlük hayattan örnekler</a:t>
+            </a:r>
+          </a:p>
+          <a:p>
+            <a:r>
+              <a:t>💡 İnfografik: Akış şeması sembolleri</a:t>
+            </a:r>
+          </a:p>
+          <a:p>
+            <a:r>
+              <a:t>📸 Görsel: Döngü mantığı şeması</a:t>
+            </a:r>
+          </a:p>
+          <a:p>
+            <a:r>
+              <a:t>🎬 Video: Döngüler Scratch'te nasıl kullanılır?</a:t>
+            </a:r>
+          </a:p>
+          <a:p>
+            <a:r>
+              <a:t>📸 Görsel: Temel tasarım prensipleri</a:t>
+            </a:r>
+          </a:p>
+          <a:p>
+            <a:r>
+              <a:t>🎬 Video: Dijital tasarıma giriş</a:t>
+            </a:r>
+          </a:p>
+          <a:p>
+            <a:r>
+              <a:t>💡 İnfografik: Renk teorisi ve uyumu</a:t>
+            </a:r>
+          </a:p>
+        </p:txBody>
+      </p:sp>
+      <p:sp>
+        <p:nvSpPr>
+          <p:cNvPr id="4" name="Slide Number Placeholder 3"/>
+          <p:cNvSpPr>
+            <a:spLocks noGrp="1"/>
+          </p:cNvSpPr>
+          <p:nvPr>
+            <p:ph type="sldNum" idx="5" sz="quarter"/>
+          </p:nvPr>
+        </p:nvSpPr>
+        <p:spPr/>
+      </p:sp>
+    </p:spTree>
+  </p:cSld>
+  <p:clrMapOvr>
+    <a:masterClrMapping/>
+  </p:clrMapOvr>
+</p:notes>
 </file>
 
 <file path=ppt/slideLayouts/slideLayout1.xml><?xml version="1.0" encoding="utf-8"?>
@@ -4762,6 +6100,7 @@
               <a:defRPr sz="1900"/>
             </a:pPr>
             <a:r>
+              <a:rPr sz="1600"/>
               <a:t>Problemi nasıl çözeriz?</a:t>
             </a:r>
           </a:p>
@@ -4781,6 +6120,7 @@
               <a:defRPr sz="1900"/>
             </a:pPr>
             <a:r>
+              <a:rPr sz="1600"/>
               <a:t>✅ Problem Çözme Adımları:</a:t>
             </a:r>
           </a:p>
@@ -4800,6 +6140,7 @@
               <a:defRPr sz="1900"/>
             </a:pPr>
             <a:r>
+              <a:rPr sz="1600"/>
               <a:t>1️⃣ Problemi Anla:</a:t>
             </a:r>
           </a:p>
@@ -4811,6 +6152,7 @@
               <a:defRPr sz="1700"/>
             </a:pPr>
             <a:r>
+              <a:rPr sz="1600"/>
               <a:t>    • Ne isteniyor?</a:t>
             </a:r>
           </a:p>
@@ -4822,6 +6164,7 @@
               <a:defRPr sz="1700"/>
             </a:pPr>
             <a:r>
+              <a:rPr sz="1600"/>
               <a:t>    • Girdi nedir?</a:t>
             </a:r>
           </a:p>
@@ -4833,6 +6176,7 @@
               <a:defRPr sz="1700"/>
             </a:pPr>
             <a:r>
+              <a:rPr sz="1600"/>
               <a:t>    • Çıktı nedir?</a:t>
             </a:r>
           </a:p>
@@ -4852,6 +6196,7 @@
               <a:defRPr sz="1900"/>
             </a:pPr>
             <a:r>
+              <a:rPr sz="1600"/>
               <a:t>2️⃣ Plan Yap:</a:t>
             </a:r>
           </a:p>
@@ -4863,6 +6208,7 @@
               <a:defRPr sz="1700"/>
             </a:pPr>
             <a:r>
+              <a:rPr sz="1600"/>
               <a:t>    • Algoritma tasarla</a:t>
             </a:r>
           </a:p>
@@ -4874,6 +6220,7 @@
               <a:defRPr sz="1700"/>
             </a:pPr>
             <a:r>
+              <a:rPr sz="1600"/>
               <a:t>    • Akış diyagramı çiz</a:t>
             </a:r>
           </a:p>
@@ -4893,6 +6240,7 @@
               <a:defRPr sz="1900"/>
             </a:pPr>
             <a:r>
+              <a:rPr sz="1600"/>
               <a:t>3️⃣ Uygula:</a:t>
             </a:r>
           </a:p>
@@ -4904,6 +6252,7 @@
               <a:defRPr sz="1700"/>
             </a:pPr>
             <a:r>
+              <a:rPr sz="1600"/>
               <a:t>    • Kodu yaz / adımları takip et</a:t>
             </a:r>
           </a:p>
@@ -4923,6 +6272,7 @@
               <a:defRPr sz="1900"/>
             </a:pPr>
             <a:r>
+              <a:rPr sz="1600"/>
               <a:t>4️⃣ Test Et:</a:t>
             </a:r>
           </a:p>
@@ -4934,6 +6284,7 @@
               <a:defRPr sz="1700"/>
             </a:pPr>
             <a:r>
+              <a:rPr sz="1600"/>
               <a:t>    • Doğru çalışıyor mu?</a:t>
             </a:r>
           </a:p>
@@ -4945,6 +6296,7 @@
               <a:defRPr sz="1700"/>
             </a:pPr>
             <a:r>
+              <a:rPr sz="1600"/>
               <a:t>    • Farklı değerler dene</a:t>
             </a:r>
           </a:p>
@@ -4964,6 +6316,7 @@
               <a:defRPr sz="1900"/>
             </a:pPr>
             <a:r>
+              <a:rPr sz="1600"/>
               <a:t>5️⃣ İyileştir:</a:t>
             </a:r>
           </a:p>
@@ -4975,6 +6328,7 @@
               <a:defRPr sz="1700"/>
             </a:pPr>
             <a:r>
+              <a:rPr sz="1600"/>
               <a:t>    • Daha hızlı yapılabilir mi?</a:t>
             </a:r>
           </a:p>
@@ -4986,6 +6340,7 @@
               <a:defRPr sz="1700"/>
             </a:pPr>
             <a:r>
+              <a:rPr sz="1600"/>
               <a:t>    • Daha basit olabilir mi?</a:t>
             </a:r>
           </a:p>
@@ -5005,6 +6360,7 @@
               <a:defRPr sz="1900"/>
             </a:pPr>
             <a:r>
+              <a:rPr sz="1600"/>
               <a:t>💡 Bu adımlar her problem için geçerli!</a:t>
             </a:r>
           </a:p>
@@ -5568,4 +6924,324 @@
   </a:objectDefaults>
   <a:extraClrSchemeLst/>
 </a:theme>
+</file>
+
+<file path=ppt/theme/theme2.xml><?xml version="1.0" encoding="utf-8"?>
+<a:theme xmlns:a="http://schemas.openxmlformats.org/drawingml/2006/main" name="Office Theme">
+  <a:themeElements>
+    <a:clrScheme name="Office">
+      <a:dk1>
+        <a:sysClr val="windowText" lastClr="000000"/>
+      </a:dk1>
+      <a:lt1>
+        <a:sysClr val="window" lastClr="FFFFFF"/>
+      </a:lt1>
+      <a:dk2>
+        <a:srgbClr val="1F497D"/>
+      </a:dk2>
+      <a:lt2>
+        <a:srgbClr val="EEECE1"/>
+      </a:lt2>
+      <a:accent1>
+        <a:srgbClr val="4F81BD"/>
+      </a:accent1>
+      <a:accent2>
+        <a:srgbClr val="C0504D"/>
+      </a:accent2>
+      <a:accent3>
+        <a:srgbClr val="9BBB59"/>
+      </a:accent3>
+      <a:accent4>
+        <a:srgbClr val="8064A2"/>
+      </a:accent4>
+      <a:accent5>
+        <a:srgbClr val="4BACC6"/>
+      </a:accent5>
+      <a:accent6>
+        <a:srgbClr val="F79646"/>
+      </a:accent6>
+      <a:hlink>
+        <a:srgbClr val="0000FF"/>
+      </a:hlink>
+      <a:folHlink>
+        <a:srgbClr val="800080"/>
+      </a:folHlink>
+    </a:clrScheme>
+    <a:fontScheme name="Office">
+      <a:majorFont>
+        <a:latin typeface="Calibri"/>
+        <a:ea typeface=""/>
+        <a:cs typeface=""/>
+        <a:font script="Jpan" typeface="ＭＳ Ｐゴシック"/>
+        <a:font script="Hang" typeface="맑은 고딕"/>
+        <a:font script="Hans" typeface="宋体"/>
+        <a:font script="Hant" typeface="新細明體"/>
+        <a:font script="Arab" typeface="Times New Roman"/>
+        <a:font script="Hebr" typeface="Times New Roman"/>
+        <a:font script="Thai" typeface="Angsana New"/>
+        <a:font script="Ethi" typeface="Nyala"/>
+        <a:font script="Beng" typeface="Vrinda"/>
+        <a:font script="Gujr" typeface="Shruti"/>
+        <a:font script="Khmr" typeface="MoolBoran"/>
+        <a:font script="Knda" typeface="Tunga"/>
+        <a:font script="Guru" typeface="Raavi"/>
+        <a:font script="Cans" typeface="Euphemia"/>
+        <a:font script="Cher" typeface="Plantagenet Cherokee"/>
+        <a:font script="Yiii" typeface="Microsoft Yi Baiti"/>
+        <a:font script="Tibt" typeface="Microsoft Himalaya"/>
+        <a:font script="Thaa" typeface="MV Boli"/>
+        <a:font script="Deva" typeface="Mangal"/>
+        <a:font script="Telu" typeface="Gautami"/>
+        <a:font script="Taml" typeface="Latha"/>
+        <a:font script="Syrc" typeface="Estrangelo Edessa"/>
+        <a:font script="Orya" typeface="Kalinga"/>
+        <a:font script="Mlym" typeface="Kartika"/>
+        <a:font script="Laoo" typeface="DokChampa"/>
+        <a:font script="Sinh" typeface="Iskoola Pota"/>
+        <a:font script="Mong" typeface="Mongolian Baiti"/>
+        <a:font script="Viet" typeface="Times New Roman"/>
+        <a:font script="Uigh" typeface="Microsoft Uighur"/>
+        <a:font script="Geor" typeface="Sylfaen"/>
+      </a:majorFont>
+      <a:minorFont>
+        <a:latin typeface="Calibri"/>
+        <a:ea typeface=""/>
+        <a:cs typeface=""/>
+        <a:font script="Jpan" typeface="ＭＳ Ｐゴシック"/>
+        <a:font script="Hang" typeface="맑은 고딕"/>
+        <a:font script="Hans" typeface="宋体"/>
+        <a:font script="Hant" typeface="新細明體"/>
+        <a:font script="Arab" typeface="Arial"/>
+        <a:font script="Hebr" typeface="Arial"/>
+        <a:font script="Thai" typeface="Cordia New"/>
+        <a:font script="Ethi" typeface="Nyala"/>
+        <a:font script="Beng" typeface="Vrinda"/>
+        <a:font script="Gujr" typeface="Shruti"/>
+        <a:font script="Khmr" typeface="DaunPenh"/>
+        <a:font script="Knda" typeface="Tunga"/>
+        <a:font script="Guru" typeface="Raavi"/>
+        <a:font script="Cans" typeface="Euphemia"/>
+        <a:font script="Cher" typeface="Plantagenet Cherokee"/>
+        <a:font script="Yiii" typeface="Microsoft Yi Baiti"/>
+        <a:font script="Tibt" typeface="Microsoft Himalaya"/>
+        <a:font script="Thaa" typeface="MV Boli"/>
+        <a:font script="Deva" typeface="Mangal"/>
+        <a:font script="Telu" typeface="Gautami"/>
+        <a:font script="Taml" typeface="Latha"/>
+        <a:font script="Syrc" typeface="Estrangelo Edessa"/>
+        <a:font script="Orya" typeface="Kalinga"/>
+        <a:font script="Mlym" typeface="Kartika"/>
+        <a:font script="Laoo" typeface="DokChampa"/>
+        <a:font script="Sinh" typeface="Iskoola Pota"/>
+        <a:font script="Mong" typeface="Mongolian Baiti"/>
+        <a:font script="Viet" typeface="Arial"/>
+        <a:font script="Uigh" typeface="Microsoft Uighur"/>
+        <a:font script="Geor" typeface="Sylfaen"/>
+      </a:minorFont>
+    </a:fontScheme>
+    <a:fmtScheme name="Office">
+      <a:fillStyleLst>
+        <a:solidFill>
+          <a:schemeClr val="phClr"/>
+        </a:solidFill>
+        <a:gradFill rotWithShape="1">
+          <a:gsLst>
+            <a:gs pos="0">
+              <a:schemeClr val="phClr">
+                <a:tint val="50000"/>
+                <a:satMod val="300000"/>
+              </a:schemeClr>
+            </a:gs>
+            <a:gs pos="35000">
+              <a:schemeClr val="phClr">
+                <a:tint val="37000"/>
+                <a:satMod val="300000"/>
+              </a:schemeClr>
+            </a:gs>
+            <a:gs pos="100000">
+              <a:schemeClr val="phClr">
+                <a:tint val="15000"/>
+                <a:satMod val="350000"/>
+              </a:schemeClr>
+            </a:gs>
+          </a:gsLst>
+          <a:lin ang="16200000" scaled="1"/>
+        </a:gradFill>
+        <a:gradFill rotWithShape="1">
+          <a:gsLst>
+            <a:gs pos="0">
+              <a:schemeClr val="phClr">
+                <a:tint val="100000"/>
+                <a:shade val="100000"/>
+                <a:satMod val="130000"/>
+              </a:schemeClr>
+            </a:gs>
+            <a:gs pos="100000">
+              <a:schemeClr val="phClr">
+                <a:tint val="50000"/>
+                <a:shade val="100000"/>
+                <a:satMod val="350000"/>
+              </a:schemeClr>
+            </a:gs>
+          </a:gsLst>
+          <a:lin ang="16200000" scaled="0"/>
+        </a:gradFill>
+      </a:fillStyleLst>
+      <a:lnStyleLst>
+        <a:ln w="9525" cap="flat" cmpd="sng" algn="ctr">
+          <a:solidFill>
+            <a:schemeClr val="phClr">
+              <a:shade val="95000"/>
+              <a:satMod val="105000"/>
+            </a:schemeClr>
+          </a:solidFill>
+          <a:prstDash val="solid"/>
+        </a:ln>
+        <a:ln w="25400" cap="flat" cmpd="sng" algn="ctr">
+          <a:solidFill>
+            <a:schemeClr val="phClr"/>
+          </a:solidFill>
+          <a:prstDash val="solid"/>
+        </a:ln>
+        <a:ln w="38100" cap="flat" cmpd="sng" algn="ctr">
+          <a:solidFill>
+            <a:schemeClr val="phClr"/>
+          </a:solidFill>
+          <a:prstDash val="solid"/>
+        </a:ln>
+      </a:lnStyleLst>
+      <a:effectStyleLst>
+        <a:effectStyle>
+          <a:effectLst>
+            <a:outerShdw blurRad="40000" dist="20000" dir="5400000" rotWithShape="0">
+              <a:srgbClr val="000000">
+                <a:alpha val="38000"/>
+              </a:srgbClr>
+            </a:outerShdw>
+          </a:effectLst>
+        </a:effectStyle>
+        <a:effectStyle>
+          <a:effectLst>
+            <a:outerShdw blurRad="40000" dist="23000" dir="5400000" rotWithShape="0">
+              <a:srgbClr val="000000">
+                <a:alpha val="35000"/>
+              </a:srgbClr>
+            </a:outerShdw>
+          </a:effectLst>
+        </a:effectStyle>
+        <a:effectStyle>
+          <a:effectLst>
+            <a:outerShdw blurRad="40000" dist="23000" dir="5400000" rotWithShape="0">
+              <a:srgbClr val="000000">
+                <a:alpha val="35000"/>
+              </a:srgbClr>
+            </a:outerShdw>
+          </a:effectLst>
+          <a:scene3d>
+            <a:camera prst="orthographicFront">
+              <a:rot lat="0" lon="0" rev="0"/>
+            </a:camera>
+            <a:lightRig rig="threePt" dir="t">
+              <a:rot lat="0" lon="0" rev="1200000"/>
+            </a:lightRig>
+          </a:scene3d>
+          <a:sp3d>
+            <a:bevelT w="63500" h="25400"/>
+          </a:sp3d>
+        </a:effectStyle>
+      </a:effectStyleLst>
+      <a:bgFillStyleLst>
+        <a:solidFill>
+          <a:schemeClr val="phClr"/>
+        </a:solidFill>
+        <a:gradFill rotWithShape="1">
+          <a:gsLst>
+            <a:gs pos="0">
+              <a:schemeClr val="phClr">
+                <a:tint val="40000"/>
+                <a:satMod val="350000"/>
+              </a:schemeClr>
+            </a:gs>
+            <a:gs pos="40000">
+              <a:schemeClr val="phClr">
+                <a:tint val="45000"/>
+                <a:shade val="99000"/>
+                <a:satMod val="350000"/>
+              </a:schemeClr>
+            </a:gs>
+            <a:gs pos="100000">
+              <a:schemeClr val="phClr">
+                <a:shade val="20000"/>
+                <a:satMod val="255000"/>
+              </a:schemeClr>
+            </a:gs>
+          </a:gsLst>
+          <a:path path="circle">
+            <a:fillToRect l="50000" t="-80000" r="50000" b="180000"/>
+          </a:path>
+        </a:gradFill>
+        <a:gradFill rotWithShape="1">
+          <a:gsLst>
+            <a:gs pos="0">
+              <a:schemeClr val="phClr">
+                <a:tint val="80000"/>
+                <a:satMod val="300000"/>
+              </a:schemeClr>
+            </a:gs>
+            <a:gs pos="100000">
+              <a:schemeClr val="phClr">
+                <a:shade val="30000"/>
+                <a:satMod val="200000"/>
+              </a:schemeClr>
+            </a:gs>
+          </a:gsLst>
+          <a:path path="circle">
+            <a:fillToRect l="50000" t="50000" r="50000" b="50000"/>
+          </a:path>
+        </a:gradFill>
+      </a:bgFillStyleLst>
+    </a:fmtScheme>
+  </a:themeElements>
+  <a:objectDefaults>
+    <a:spDef>
+      <a:spPr/>
+      <a:bodyPr/>
+      <a:lstStyle/>
+      <a:style>
+        <a:lnRef idx="1">
+          <a:schemeClr val="accent1"/>
+        </a:lnRef>
+        <a:fillRef idx="3">
+          <a:schemeClr val="accent1"/>
+        </a:fillRef>
+        <a:effectRef idx="2">
+          <a:schemeClr val="accent1"/>
+        </a:effectRef>
+        <a:fontRef idx="minor">
+          <a:schemeClr val="lt1"/>
+        </a:fontRef>
+      </a:style>
+    </a:spDef>
+    <a:lnDef>
+      <a:spPr/>
+      <a:bodyPr/>
+      <a:lstStyle/>
+      <a:style>
+        <a:lnRef idx="2">
+          <a:schemeClr val="accent1"/>
+        </a:lnRef>
+        <a:fillRef idx="0">
+          <a:schemeClr val="accent1"/>
+        </a:fillRef>
+        <a:effectRef idx="1">
+          <a:schemeClr val="accent1"/>
+        </a:effectRef>
+        <a:fontRef idx="minor">
+          <a:schemeClr val="tx1"/>
+        </a:fontRef>
+      </a:style>
+    </a:lnDef>
+  </a:objectDefaults>
+  <a:extraClrSchemeLst/>
+</a:theme>
 </file>
--- a/sunumlar/6-sinif-unite3-algoritmalar-DETAYLI.pptx
+++ b/sunumlar/6-sinif-unite3-algoritmalar-DETAYLI.pptx
@@ -4458,7 +4458,7 @@
           <a:noFill/>
         </p:spPr>
         <p:txBody>
-          <a:bodyPr wrap="none">
+          <a:bodyPr wrap="square">
             <a:spAutoFit/>
           </a:bodyPr>
           <a:lstStyle/>
@@ -4493,7 +4493,7 @@
           <a:noFill/>
         </p:spPr>
         <p:txBody>
-          <a:bodyPr wrap="none">
+          <a:bodyPr wrap="square">
             <a:spAutoFit/>
           </a:bodyPr>
           <a:lstStyle/>
@@ -4541,7 +4541,7 @@
         </p:nvSpPr>
         <p:spPr/>
         <p:txBody>
-          <a:bodyPr/>
+          <a:bodyPr wrap="square"/>
           <a:lstStyle/>
           <a:p>
             <a:pPr>
@@ -4595,163 +4595,230 @@
             <a:spAutoFit/>
           </a:bodyPr>
           <a:lstStyle/>
-          <a:p/>
-          <a:p>
-            <a:pPr>
-              <a:spcAft>
-                <a:spcPts val="1000"/>
-              </a:spcAft>
-              <a:defRPr sz="1900"/>
-            </a:pPr>
-            <a:r>
+          <a:p>
+            <a:pPr>
+              <a:lnSpc>
+                <a:spcPct val="90000"/>
+              </a:lnSpc>
+              <a:spcAft>
+                <a:spcPts val="300"/>
+              </a:spcAft>
+            </a:pPr>
+          </a:p>
+          <a:p>
+            <a:pPr>
+              <a:lnSpc>
+                <a:spcPct val="90000"/>
+              </a:lnSpc>
+              <a:spcAft>
+                <a:spcPts val="300"/>
+              </a:spcAft>
+              <a:defRPr sz="1900"/>
+            </a:pPr>
+            <a:r>
+              <a:rPr sz="1500"/>
               <a:t>Bu ünitede neler öğreneceğiz?</a:t>
             </a:r>
           </a:p>
           <a:p>
             <a:pPr>
-              <a:spcAft>
-                <a:spcPts val="1000"/>
-              </a:spcAft>
-              <a:defRPr sz="1900"/>
-            </a:pPr>
-          </a:p>
-          <a:p>
-            <a:pPr>
-              <a:spcAft>
-                <a:spcPts val="1000"/>
-              </a:spcAft>
-              <a:defRPr sz="1900"/>
-            </a:pPr>
-            <a:r>
+              <a:lnSpc>
+                <a:spcPct val="90000"/>
+              </a:lnSpc>
+              <a:spcAft>
+                <a:spcPts val="300"/>
+              </a:spcAft>
+              <a:defRPr sz="1900"/>
+            </a:pPr>
+          </a:p>
+          <a:p>
+            <a:pPr>
+              <a:lnSpc>
+                <a:spcPct val="90000"/>
+              </a:lnSpc>
+              <a:spcAft>
+                <a:spcPts val="300"/>
+              </a:spcAft>
+              <a:defRPr sz="1900"/>
+            </a:pPr>
+            <a:r>
+              <a:rPr sz="1500"/>
               <a:t>✅ 1. Algoritma Nedir?</a:t>
             </a:r>
           </a:p>
           <a:p>
             <a:pPr>
-              <a:spcAft>
-                <a:spcPts val="1000"/>
-              </a:spcAft>
-              <a:defRPr sz="1900"/>
-            </a:pPr>
-            <a:r>
+              <a:lnSpc>
+                <a:spcPct val="90000"/>
+              </a:lnSpc>
+              <a:spcAft>
+                <a:spcPts val="300"/>
+              </a:spcAft>
+              <a:defRPr sz="1900"/>
+            </a:pPr>
+            <a:r>
+              <a:rPr sz="1500"/>
               <a:t>✅ 2. Algoritma Örnekleri</a:t>
             </a:r>
           </a:p>
           <a:p>
             <a:pPr>
-              <a:spcAft>
-                <a:spcPts val="1000"/>
-              </a:spcAft>
-              <a:defRPr sz="1900"/>
-            </a:pPr>
-            <a:r>
+              <a:lnSpc>
+                <a:spcPct val="90000"/>
+              </a:lnSpc>
+              <a:spcAft>
+                <a:spcPts val="300"/>
+              </a:spcAft>
+              <a:defRPr sz="1900"/>
+            </a:pPr>
+            <a:r>
+              <a:rPr sz="1500"/>
               <a:t>✅ 3. Akış Diyagramları</a:t>
             </a:r>
           </a:p>
           <a:p>
             <a:pPr>
-              <a:spcAft>
-                <a:spcPts val="1000"/>
-              </a:spcAft>
-              <a:defRPr sz="1900"/>
-            </a:pPr>
-            <a:r>
+              <a:lnSpc>
+                <a:spcPct val="90000"/>
+              </a:lnSpc>
+              <a:spcAft>
+                <a:spcPts val="300"/>
+              </a:spcAft>
+              <a:defRPr sz="1900"/>
+            </a:pPr>
+            <a:r>
+              <a:rPr sz="1500"/>
               <a:t>✅ 4. Akış Diyagramı Sembolleri</a:t>
             </a:r>
           </a:p>
           <a:p>
             <a:pPr>
-              <a:spcAft>
-                <a:spcPts val="1000"/>
-              </a:spcAft>
-              <a:defRPr sz="1900"/>
-            </a:pPr>
-            <a:r>
+              <a:lnSpc>
+                <a:spcPct val="90000"/>
+              </a:lnSpc>
+              <a:spcAft>
+                <a:spcPts val="300"/>
+              </a:spcAft>
+              <a:defRPr sz="1900"/>
+            </a:pPr>
+            <a:r>
+              <a:rPr sz="1500"/>
               <a:t>✅ 5. Sıralı Algoritmalar</a:t>
             </a:r>
           </a:p>
           <a:p>
             <a:pPr>
-              <a:spcAft>
-                <a:spcPts val="1000"/>
-              </a:spcAft>
-              <a:defRPr sz="1900"/>
-            </a:pPr>
-            <a:r>
+              <a:lnSpc>
+                <a:spcPct val="90000"/>
+              </a:lnSpc>
+              <a:spcAft>
+                <a:spcPts val="300"/>
+              </a:spcAft>
+              <a:defRPr sz="1900"/>
+            </a:pPr>
+            <a:r>
+              <a:rPr sz="1500"/>
               <a:t>✅ 6. Seçimli Algoritmalar (If-Else)</a:t>
             </a:r>
           </a:p>
           <a:p>
             <a:pPr>
-              <a:spcAft>
-                <a:spcPts val="1000"/>
-              </a:spcAft>
-              <a:defRPr sz="1900"/>
-            </a:pPr>
-            <a:r>
+              <a:lnSpc>
+                <a:spcPct val="90000"/>
+              </a:lnSpc>
+              <a:spcAft>
+                <a:spcPts val="300"/>
+              </a:spcAft>
+              <a:defRPr sz="1900"/>
+            </a:pPr>
+            <a:r>
+              <a:rPr sz="1500"/>
               <a:t>✅ 7. Döngülü Algoritmalar</a:t>
             </a:r>
           </a:p>
           <a:p>
             <a:pPr>
-              <a:spcAft>
-                <a:spcPts val="1000"/>
-              </a:spcAft>
-              <a:defRPr sz="1900"/>
-            </a:pPr>
-            <a:r>
+              <a:lnSpc>
+                <a:spcPct val="90000"/>
+              </a:lnSpc>
+              <a:spcAft>
+                <a:spcPts val="300"/>
+              </a:spcAft>
+              <a:defRPr sz="1900"/>
+            </a:pPr>
+            <a:r>
+              <a:rPr sz="1500"/>
               <a:t>✅ 8. Problem Çözme Basamakları</a:t>
             </a:r>
           </a:p>
           <a:p>
             <a:pPr>
-              <a:spcAft>
-                <a:spcPts val="1000"/>
-              </a:spcAft>
-              <a:defRPr sz="1900"/>
-            </a:pPr>
-            <a:r>
+              <a:lnSpc>
+                <a:spcPct val="90000"/>
+              </a:lnSpc>
+              <a:spcAft>
+                <a:spcPts val="300"/>
+              </a:spcAft>
+              <a:defRPr sz="1900"/>
+            </a:pPr>
+            <a:r>
+              <a:rPr sz="1500"/>
               <a:t>✅ 9. Algoritma Tasarımı</a:t>
             </a:r>
           </a:p>
           <a:p>
             <a:pPr>
-              <a:spcAft>
-                <a:spcPts val="1000"/>
-              </a:spcAft>
-              <a:defRPr sz="1900"/>
-            </a:pPr>
-            <a:r>
+              <a:lnSpc>
+                <a:spcPct val="90000"/>
+              </a:lnSpc>
+              <a:spcAft>
+                <a:spcPts val="300"/>
+              </a:spcAft>
+              <a:defRPr sz="1900"/>
+            </a:pPr>
+            <a:r>
+              <a:rPr sz="1500"/>
               <a:t>✅ 10. Algoritma Analizi</a:t>
             </a:r>
           </a:p>
           <a:p>
             <a:pPr>
-              <a:spcAft>
-                <a:spcPts val="1000"/>
-              </a:spcAft>
-              <a:defRPr sz="1900"/>
-            </a:pPr>
-          </a:p>
-          <a:p>
-            <a:pPr>
-              <a:spcAft>
-                <a:spcPts val="1000"/>
-              </a:spcAft>
-              <a:defRPr sz="1900"/>
-            </a:pPr>
-            <a:r>
+              <a:lnSpc>
+                <a:spcPct val="90000"/>
+              </a:lnSpc>
+              <a:spcAft>
+                <a:spcPts val="300"/>
+              </a:spcAft>
+              <a:defRPr sz="1900"/>
+            </a:pPr>
+          </a:p>
+          <a:p>
+            <a:pPr>
+              <a:lnSpc>
+                <a:spcPct val="90000"/>
+              </a:lnSpc>
+              <a:spcAft>
+                <a:spcPts val="300"/>
+              </a:spcAft>
+              <a:defRPr sz="1900"/>
+            </a:pPr>
+            <a:r>
+              <a:rPr sz="1500"/>
               <a:t>⏰ Süre: 3 Hafta</a:t>
             </a:r>
           </a:p>
           <a:p>
             <a:pPr>
-              <a:spcAft>
-                <a:spcPts val="1000"/>
-              </a:spcAft>
-              <a:defRPr sz="1900"/>
-            </a:pPr>
-            <a:r>
+              <a:lnSpc>
+                <a:spcPct val="90000"/>
+              </a:lnSpc>
+              <a:spcAft>
+                <a:spcPts val="300"/>
+              </a:spcAft>
+              <a:defRPr sz="1900"/>
+            </a:pPr>
+            <a:r>
+              <a:rPr sz="1500"/>
               <a:t>🎯 Amaç: Problem çözme becerisi kazanmak!</a:t>
             </a:r>
           </a:p>
@@ -4787,7 +4854,7 @@
         </p:nvSpPr>
         <p:spPr/>
         <p:txBody>
-          <a:bodyPr/>
+          <a:bodyPr wrap="square"/>
           <a:lstStyle/>
           <a:p>
             <a:pPr>
@@ -4841,212 +4908,297 @@
             <a:spAutoFit/>
           </a:bodyPr>
           <a:lstStyle/>
-          <a:p/>
-          <a:p>
-            <a:pPr>
-              <a:spcAft>
-                <a:spcPts val="1000"/>
-              </a:spcAft>
-              <a:defRPr sz="1900"/>
-            </a:pPr>
-            <a:r>
+          <a:p>
+            <a:pPr>
+              <a:lnSpc>
+                <a:spcPct val="90000"/>
+              </a:lnSpc>
+              <a:spcAft>
+                <a:spcPts val="300"/>
+              </a:spcAft>
+            </a:pPr>
+          </a:p>
+          <a:p>
+            <a:pPr>
+              <a:lnSpc>
+                <a:spcPct val="90000"/>
+              </a:lnSpc>
+              <a:spcAft>
+                <a:spcPts val="300"/>
+              </a:spcAft>
+              <a:defRPr sz="1900"/>
+            </a:pPr>
+            <a:r>
+              <a:rPr sz="1500"/>
               <a:t>Algoritma = Bir problemi çözme adımları</a:t>
             </a:r>
           </a:p>
           <a:p>
             <a:pPr>
-              <a:spcAft>
-                <a:spcPts val="1000"/>
-              </a:spcAft>
-              <a:defRPr sz="1900"/>
-            </a:pPr>
-          </a:p>
-          <a:p>
-            <a:pPr>
-              <a:spcAft>
-                <a:spcPts val="1000"/>
-              </a:spcAft>
-              <a:defRPr sz="1900"/>
-            </a:pPr>
-            <a:r>
+              <a:lnSpc>
+                <a:spcPct val="90000"/>
+              </a:lnSpc>
+              <a:spcAft>
+                <a:spcPts val="300"/>
+              </a:spcAft>
+              <a:defRPr sz="1900"/>
+            </a:pPr>
+          </a:p>
+          <a:p>
+            <a:pPr>
+              <a:lnSpc>
+                <a:spcPct val="90000"/>
+              </a:lnSpc>
+              <a:spcAft>
+                <a:spcPts val="300"/>
+              </a:spcAft>
+              <a:defRPr sz="1900"/>
+            </a:pPr>
+            <a:r>
+              <a:rPr sz="1500"/>
               <a:t>✅ Algoritma Özellikleri:</a:t>
             </a:r>
           </a:p>
           <a:p>
             <a:pPr lvl="1">
-              <a:spcAft>
-                <a:spcPts val="1000"/>
+              <a:lnSpc>
+                <a:spcPct val="90000"/>
+              </a:lnSpc>
+              <a:spcAft>
+                <a:spcPts val="300"/>
               </a:spcAft>
               <a:defRPr sz="1700"/>
             </a:pPr>
             <a:r>
+              <a:rPr sz="1500"/>
               <a:t>    • Adımları var</a:t>
             </a:r>
           </a:p>
           <a:p>
             <a:pPr lvl="1">
-              <a:spcAft>
-                <a:spcPts val="1000"/>
+              <a:lnSpc>
+                <a:spcPct val="90000"/>
+              </a:lnSpc>
+              <a:spcAft>
+                <a:spcPts val="300"/>
               </a:spcAft>
               <a:defRPr sz="1700"/>
             </a:pPr>
             <a:r>
+              <a:rPr sz="1500"/>
               <a:t>    • Sıralı</a:t>
             </a:r>
           </a:p>
           <a:p>
             <a:pPr lvl="1">
-              <a:spcAft>
-                <a:spcPts val="1000"/>
+              <a:lnSpc>
+                <a:spcPct val="90000"/>
+              </a:lnSpc>
+              <a:spcAft>
+                <a:spcPts val="300"/>
               </a:spcAft>
               <a:defRPr sz="1700"/>
             </a:pPr>
             <a:r>
+              <a:rPr sz="1500"/>
               <a:t>    • Sonlu (biter)</a:t>
             </a:r>
           </a:p>
           <a:p>
             <a:pPr lvl="1">
-              <a:spcAft>
-                <a:spcPts val="1000"/>
+              <a:lnSpc>
+                <a:spcPct val="90000"/>
+              </a:lnSpc>
+              <a:spcAft>
+                <a:spcPts val="300"/>
               </a:spcAft>
               <a:defRPr sz="1700"/>
             </a:pPr>
             <a:r>
+              <a:rPr sz="1500"/>
               <a:t>    • Her adım net</a:t>
             </a:r>
           </a:p>
           <a:p>
             <a:pPr>
-              <a:spcAft>
-                <a:spcPts val="1000"/>
-              </a:spcAft>
-              <a:defRPr sz="1900"/>
-            </a:pPr>
-          </a:p>
-          <a:p>
-            <a:pPr>
-              <a:spcAft>
-                <a:spcPts val="1000"/>
-              </a:spcAft>
-              <a:defRPr sz="1900"/>
-            </a:pPr>
-            <a:r>
+              <a:lnSpc>
+                <a:spcPct val="90000"/>
+              </a:lnSpc>
+              <a:spcAft>
+                <a:spcPts val="300"/>
+              </a:spcAft>
+              <a:defRPr sz="1900"/>
+            </a:pPr>
+          </a:p>
+          <a:p>
+            <a:pPr>
+              <a:lnSpc>
+                <a:spcPct val="90000"/>
+              </a:lnSpc>
+              <a:spcAft>
+                <a:spcPts val="300"/>
+              </a:spcAft>
+              <a:defRPr sz="1900"/>
+            </a:pPr>
+            <a:r>
+              <a:rPr sz="1500"/>
               <a:t>📌 Günlük Hayattan Örnek:</a:t>
             </a:r>
           </a:p>
           <a:p>
             <a:pPr>
-              <a:spcAft>
-                <a:spcPts val="1000"/>
-              </a:spcAft>
-              <a:defRPr sz="1900"/>
-            </a:pPr>
-          </a:p>
-          <a:p>
-            <a:pPr>
-              <a:spcAft>
-                <a:spcPts val="1000"/>
-              </a:spcAft>
-              <a:defRPr sz="1900"/>
-            </a:pPr>
-            <a:r>
+              <a:lnSpc>
+                <a:spcPct val="90000"/>
+              </a:lnSpc>
+              <a:spcAft>
+                <a:spcPts val="300"/>
+              </a:spcAft>
+              <a:defRPr sz="1900"/>
+            </a:pPr>
+          </a:p>
+          <a:p>
+            <a:pPr>
+              <a:lnSpc>
+                <a:spcPct val="90000"/>
+              </a:lnSpc>
+              <a:spcAft>
+                <a:spcPts val="300"/>
+              </a:spcAft>
+              <a:defRPr sz="1900"/>
+            </a:pPr>
+            <a:r>
+              <a:rPr sz="1500"/>
               <a:t>🍞 Çay Yapma Algoritması:</a:t>
             </a:r>
           </a:p>
           <a:p>
             <a:pPr>
-              <a:spcAft>
-                <a:spcPts val="1000"/>
-              </a:spcAft>
-              <a:defRPr sz="1900"/>
-            </a:pPr>
-            <a:r>
+              <a:lnSpc>
+                <a:spcPct val="90000"/>
+              </a:lnSpc>
+              <a:spcAft>
+                <a:spcPts val="300"/>
+              </a:spcAft>
+              <a:defRPr sz="1900"/>
+            </a:pPr>
+            <a:r>
+              <a:rPr sz="1500"/>
               <a:t>1. Çaydanlığı al</a:t>
             </a:r>
           </a:p>
           <a:p>
             <a:pPr>
-              <a:spcAft>
-                <a:spcPts val="1000"/>
-              </a:spcAft>
-              <a:defRPr sz="1900"/>
-            </a:pPr>
-            <a:r>
+              <a:lnSpc>
+                <a:spcPct val="90000"/>
+              </a:lnSpc>
+              <a:spcAft>
+                <a:spcPts val="300"/>
+              </a:spcAft>
+              <a:defRPr sz="1900"/>
+            </a:pPr>
+            <a:r>
+              <a:rPr sz="1500"/>
               <a:t>2. Su doldur</a:t>
             </a:r>
           </a:p>
           <a:p>
             <a:pPr>
-              <a:spcAft>
-                <a:spcPts val="1000"/>
-              </a:spcAft>
-              <a:defRPr sz="1900"/>
-            </a:pPr>
-            <a:r>
+              <a:lnSpc>
+                <a:spcPct val="90000"/>
+              </a:lnSpc>
+              <a:spcAft>
+                <a:spcPts val="300"/>
+              </a:spcAft>
+              <a:defRPr sz="1900"/>
+            </a:pPr>
+            <a:r>
+              <a:rPr sz="1500"/>
               <a:t>3. Ocağa koy</a:t>
             </a:r>
           </a:p>
           <a:p>
             <a:pPr>
-              <a:spcAft>
-                <a:spcPts val="1000"/>
-              </a:spcAft>
-              <a:defRPr sz="1900"/>
-            </a:pPr>
-            <a:r>
+              <a:lnSpc>
+                <a:spcPct val="90000"/>
+              </a:lnSpc>
+              <a:spcAft>
+                <a:spcPts val="300"/>
+              </a:spcAft>
+              <a:defRPr sz="1900"/>
+            </a:pPr>
+            <a:r>
+              <a:rPr sz="1500"/>
               <a:t>4. Yak</a:t>
             </a:r>
           </a:p>
           <a:p>
             <a:pPr>
-              <a:spcAft>
-                <a:spcPts val="1000"/>
-              </a:spcAft>
-              <a:defRPr sz="1900"/>
-            </a:pPr>
-            <a:r>
+              <a:lnSpc>
+                <a:spcPct val="90000"/>
+              </a:lnSpc>
+              <a:spcAft>
+                <a:spcPts val="300"/>
+              </a:spcAft>
+              <a:defRPr sz="1900"/>
+            </a:pPr>
+            <a:r>
+              <a:rPr sz="1500"/>
               <a:t>5. Kaynayana kadar bekle</a:t>
             </a:r>
           </a:p>
           <a:p>
             <a:pPr>
-              <a:spcAft>
-                <a:spcPts val="1000"/>
-              </a:spcAft>
-              <a:defRPr sz="1900"/>
-            </a:pPr>
-            <a:r>
+              <a:lnSpc>
+                <a:spcPct val="90000"/>
+              </a:lnSpc>
+              <a:spcAft>
+                <a:spcPts val="300"/>
+              </a:spcAft>
+              <a:defRPr sz="1900"/>
+            </a:pPr>
+            <a:r>
+              <a:rPr sz="1500"/>
               <a:t>6. Çayı demlendirme</a:t>
             </a:r>
           </a:p>
           <a:p>
             <a:pPr>
-              <a:spcAft>
-                <a:spcPts val="1000"/>
-              </a:spcAft>
-              <a:defRPr sz="1900"/>
-            </a:pPr>
-          </a:p>
-          <a:p>
-            <a:pPr>
-              <a:spcAft>
-                <a:spcPts val="1000"/>
-              </a:spcAft>
-              <a:defRPr sz="1900"/>
-            </a:pPr>
-            <a:r>
+              <a:lnSpc>
+                <a:spcPct val="90000"/>
+              </a:lnSpc>
+              <a:spcAft>
+                <a:spcPts val="300"/>
+              </a:spcAft>
+              <a:defRPr sz="1900"/>
+            </a:pPr>
+          </a:p>
+          <a:p>
+            <a:pPr>
+              <a:lnSpc>
+                <a:spcPct val="90000"/>
+              </a:lnSpc>
+              <a:spcAft>
+                <a:spcPts val="300"/>
+              </a:spcAft>
+              <a:defRPr sz="1900"/>
+            </a:pPr>
+            <a:r>
+              <a:rPr sz="1500"/>
               <a:t>💡 Her tarifin bir algoritması vardır!</a:t>
             </a:r>
           </a:p>
           <a:p>
             <a:pPr>
-              <a:spcAft>
-                <a:spcPts val="1000"/>
-              </a:spcAft>
-              <a:defRPr sz="1900"/>
-            </a:pPr>
-            <a:r>
+              <a:lnSpc>
+                <a:spcPct val="90000"/>
+              </a:lnSpc>
+              <a:spcAft>
+                <a:spcPts val="300"/>
+              </a:spcAft>
+              <a:defRPr sz="1900"/>
+            </a:pPr>
+            <a:r>
+              <a:rPr sz="1500"/>
               <a:t>Bilgisayar programları da algoritma ile çalışır</a:t>
             </a:r>
           </a:p>
@@ -5082,7 +5234,7 @@
         </p:nvSpPr>
         <p:spPr/>
         <p:txBody>
-          <a:bodyPr/>
+          <a:bodyPr wrap="square"/>
           <a:lstStyle/>
           <a:p>
             <a:pPr>
@@ -5136,11 +5288,23 @@
             <a:spAutoFit/>
           </a:bodyPr>
           <a:lstStyle/>
-          <a:p/>
-          <a:p>
-            <a:pPr>
-              <a:spcAft>
-                <a:spcPts val="1000"/>
+          <a:p>
+            <a:pPr>
+              <a:lnSpc>
+                <a:spcPct val="90000"/>
+              </a:lnSpc>
+              <a:spcAft>
+                <a:spcPts val="300"/>
+              </a:spcAft>
+            </a:pPr>
+          </a:p>
+          <a:p>
+            <a:pPr>
+              <a:lnSpc>
+                <a:spcPct val="90000"/>
+              </a:lnSpc>
+              <a:spcAft>
+                <a:spcPts val="300"/>
               </a:spcAft>
               <a:defRPr sz="1900"/>
             </a:pPr>
@@ -5150,16 +5314,22 @@
           </a:p>
           <a:p>
             <a:pPr>
-              <a:spcAft>
-                <a:spcPts val="1000"/>
-              </a:spcAft>
-              <a:defRPr sz="1900"/>
-            </a:pPr>
-          </a:p>
-          <a:p>
-            <a:pPr>
-              <a:spcAft>
-                <a:spcPts val="1000"/>
+              <a:lnSpc>
+                <a:spcPct val="90000"/>
+              </a:lnSpc>
+              <a:spcAft>
+                <a:spcPts val="300"/>
+              </a:spcAft>
+              <a:defRPr sz="1900"/>
+            </a:pPr>
+          </a:p>
+          <a:p>
+            <a:pPr>
+              <a:lnSpc>
+                <a:spcPct val="90000"/>
+              </a:lnSpc>
+              <a:spcAft>
+                <a:spcPts val="300"/>
               </a:spcAft>
               <a:defRPr sz="1900"/>
             </a:pPr>
@@ -5169,16 +5339,22 @@
           </a:p>
           <a:p>
             <a:pPr>
-              <a:spcAft>
-                <a:spcPts val="1000"/>
-              </a:spcAft>
-              <a:defRPr sz="1900"/>
-            </a:pPr>
-          </a:p>
-          <a:p>
-            <a:pPr>
-              <a:spcAft>
-                <a:spcPts val="1000"/>
+              <a:lnSpc>
+                <a:spcPct val="90000"/>
+              </a:lnSpc>
+              <a:spcAft>
+                <a:spcPts val="300"/>
+              </a:spcAft>
+              <a:defRPr sz="1900"/>
+            </a:pPr>
+          </a:p>
+          <a:p>
+            <a:pPr>
+              <a:lnSpc>
+                <a:spcPct val="90000"/>
+              </a:lnSpc>
+              <a:spcAft>
+                <a:spcPts val="300"/>
               </a:spcAft>
               <a:defRPr sz="1900"/>
             </a:pPr>
@@ -5188,8 +5364,11 @@
           </a:p>
           <a:p>
             <a:pPr>
-              <a:spcAft>
-                <a:spcPts val="1000"/>
+              <a:lnSpc>
+                <a:spcPct val="90000"/>
+              </a:lnSpc>
+              <a:spcAft>
+                <a:spcPts val="300"/>
               </a:spcAft>
               <a:defRPr sz="1900"/>
             </a:pPr>
@@ -5199,8 +5378,11 @@
           </a:p>
           <a:p>
             <a:pPr>
-              <a:spcAft>
-                <a:spcPts val="1000"/>
+              <a:lnSpc>
+                <a:spcPct val="90000"/>
+              </a:lnSpc>
+              <a:spcAft>
+                <a:spcPts val="300"/>
               </a:spcAft>
               <a:defRPr sz="1900"/>
             </a:pPr>
@@ -5210,8 +5392,11 @@
           </a:p>
           <a:p>
             <a:pPr>
-              <a:spcAft>
-                <a:spcPts val="1000"/>
+              <a:lnSpc>
+                <a:spcPct val="90000"/>
+              </a:lnSpc>
+              <a:spcAft>
+                <a:spcPts val="300"/>
               </a:spcAft>
               <a:defRPr sz="1900"/>
             </a:pPr>
@@ -5221,8 +5406,11 @@
           </a:p>
           <a:p>
             <a:pPr>
-              <a:spcAft>
-                <a:spcPts val="1000"/>
+              <a:lnSpc>
+                <a:spcPct val="90000"/>
+              </a:lnSpc>
+              <a:spcAft>
+                <a:spcPts val="300"/>
               </a:spcAft>
               <a:defRPr sz="1900"/>
             </a:pPr>
@@ -5232,16 +5420,22 @@
           </a:p>
           <a:p>
             <a:pPr>
-              <a:spcAft>
-                <a:spcPts val="1000"/>
-              </a:spcAft>
-              <a:defRPr sz="1900"/>
-            </a:pPr>
-          </a:p>
-          <a:p>
-            <a:pPr>
-              <a:spcAft>
-                <a:spcPts val="1000"/>
+              <a:lnSpc>
+                <a:spcPct val="90000"/>
+              </a:lnSpc>
+              <a:spcAft>
+                <a:spcPts val="300"/>
+              </a:spcAft>
+              <a:defRPr sz="1900"/>
+            </a:pPr>
+          </a:p>
+          <a:p>
+            <a:pPr>
+              <a:lnSpc>
+                <a:spcPct val="90000"/>
+              </a:lnSpc>
+              <a:spcAft>
+                <a:spcPts val="300"/>
               </a:spcAft>
               <a:defRPr sz="1900"/>
             </a:pPr>
@@ -5251,16 +5445,22 @@
           </a:p>
           <a:p>
             <a:pPr>
-              <a:spcAft>
-                <a:spcPts val="1000"/>
-              </a:spcAft>
-              <a:defRPr sz="1900"/>
-            </a:pPr>
-          </a:p>
-          <a:p>
-            <a:pPr>
-              <a:spcAft>
-                <a:spcPts val="1000"/>
+              <a:lnSpc>
+                <a:spcPct val="90000"/>
+              </a:lnSpc>
+              <a:spcAft>
+                <a:spcPts val="300"/>
+              </a:spcAft>
+              <a:defRPr sz="1900"/>
+            </a:pPr>
+          </a:p>
+          <a:p>
+            <a:pPr>
+              <a:lnSpc>
+                <a:spcPct val="90000"/>
+              </a:lnSpc>
+              <a:spcAft>
+                <a:spcPts val="300"/>
               </a:spcAft>
               <a:defRPr sz="1900"/>
             </a:pPr>
@@ -5270,8 +5470,11 @@
           </a:p>
           <a:p>
             <a:pPr lvl="1">
-              <a:spcAft>
-                <a:spcPts val="1000"/>
+              <a:lnSpc>
+                <a:spcPct val="90000"/>
+              </a:lnSpc>
+              <a:spcAft>
+                <a:spcPts val="300"/>
               </a:spcAft>
               <a:defRPr sz="1700"/>
             </a:pPr>
@@ -5281,8 +5484,11 @@
           </a:p>
           <a:p>
             <a:pPr>
-              <a:spcAft>
-                <a:spcPts val="1000"/>
+              <a:lnSpc>
+                <a:spcPct val="90000"/>
+              </a:lnSpc>
+              <a:spcAft>
+                <a:spcPts val="300"/>
               </a:spcAft>
               <a:defRPr sz="1900"/>
             </a:pPr>
@@ -5292,8 +5498,11 @@
           </a:p>
           <a:p>
             <a:pPr lvl="1">
-              <a:spcAft>
-                <a:spcPts val="1000"/>
+              <a:lnSpc>
+                <a:spcPct val="90000"/>
+              </a:lnSpc>
+              <a:spcAft>
+                <a:spcPts val="300"/>
               </a:spcAft>
               <a:defRPr sz="1700"/>
             </a:pPr>
@@ -5303,8 +5512,11 @@
           </a:p>
           <a:p>
             <a:pPr>
-              <a:spcAft>
-                <a:spcPts val="1000"/>
+              <a:lnSpc>
+                <a:spcPct val="90000"/>
+              </a:lnSpc>
+              <a:spcAft>
+                <a:spcPts val="300"/>
               </a:spcAft>
               <a:defRPr sz="1900"/>
             </a:pPr>
@@ -5314,8 +5526,11 @@
           </a:p>
           <a:p>
             <a:pPr>
-              <a:spcAft>
-                <a:spcPts val="1000"/>
+              <a:lnSpc>
+                <a:spcPct val="90000"/>
+              </a:lnSpc>
+              <a:spcAft>
+                <a:spcPts val="300"/>
               </a:spcAft>
               <a:defRPr sz="1900"/>
             </a:pPr>
@@ -5325,8 +5540,11 @@
           </a:p>
           <a:p>
             <a:pPr>
-              <a:spcAft>
-                <a:spcPts val="1000"/>
+              <a:lnSpc>
+                <a:spcPct val="90000"/>
+              </a:lnSpc>
+              <a:spcAft>
+                <a:spcPts val="300"/>
               </a:spcAft>
               <a:defRPr sz="1900"/>
             </a:pPr>
@@ -5336,8 +5554,11 @@
           </a:p>
           <a:p>
             <a:pPr lvl="1">
-              <a:spcAft>
-                <a:spcPts val="1000"/>
+              <a:lnSpc>
+                <a:spcPct val="90000"/>
+              </a:lnSpc>
+              <a:spcAft>
+                <a:spcPts val="300"/>
               </a:spcAft>
               <a:defRPr sz="1700"/>
             </a:pPr>
@@ -5347,8 +5568,11 @@
           </a:p>
           <a:p>
             <a:pPr>
-              <a:spcAft>
-                <a:spcPts val="1000"/>
+              <a:lnSpc>
+                <a:spcPct val="90000"/>
+              </a:lnSpc>
+              <a:spcAft>
+                <a:spcPts val="300"/>
               </a:spcAft>
               <a:defRPr sz="1900"/>
             </a:pPr>
@@ -5358,16 +5582,22 @@
           </a:p>
           <a:p>
             <a:pPr>
-              <a:spcAft>
-                <a:spcPts val="1000"/>
-              </a:spcAft>
-              <a:defRPr sz="1900"/>
-            </a:pPr>
-          </a:p>
-          <a:p>
-            <a:pPr>
-              <a:spcAft>
-                <a:spcPts val="1000"/>
+              <a:lnSpc>
+                <a:spcPct val="90000"/>
+              </a:lnSpc>
+              <a:spcAft>
+                <a:spcPts val="300"/>
+              </a:spcAft>
+              <a:defRPr sz="1900"/>
+            </a:pPr>
+          </a:p>
+          <a:p>
+            <a:pPr>
+              <a:lnSpc>
+                <a:spcPct val="90000"/>
+              </a:lnSpc>
+              <a:spcAft>
+                <a:spcPts val="300"/>
               </a:spcAft>
               <a:defRPr sz="1900"/>
             </a:pPr>
@@ -5407,7 +5637,7 @@
         </p:nvSpPr>
         <p:spPr/>
         <p:txBody>
-          <a:bodyPr/>
+          <a:bodyPr wrap="square"/>
           <a:lstStyle/>
           <a:p>
             <a:pPr>
@@ -5461,11 +5691,23 @@
             <a:spAutoFit/>
           </a:bodyPr>
           <a:lstStyle/>
-          <a:p/>
-          <a:p>
-            <a:pPr>
-              <a:spcAft>
-                <a:spcPts val="1000"/>
+          <a:p>
+            <a:pPr>
+              <a:lnSpc>
+                <a:spcPct val="90000"/>
+              </a:lnSpc>
+              <a:spcAft>
+                <a:spcPts val="300"/>
+              </a:spcAft>
+            </a:pPr>
+          </a:p>
+          <a:p>
+            <a:pPr>
+              <a:lnSpc>
+                <a:spcPct val="90000"/>
+              </a:lnSpc>
+              <a:spcAft>
+                <a:spcPts val="300"/>
               </a:spcAft>
               <a:defRPr sz="1900"/>
             </a:pPr>
@@ -5475,16 +5717,22 @@
           </a:p>
           <a:p>
             <a:pPr>
-              <a:spcAft>
-                <a:spcPts val="1000"/>
-              </a:spcAft>
-              <a:defRPr sz="1900"/>
-            </a:pPr>
-          </a:p>
-          <a:p>
-            <a:pPr>
-              <a:spcAft>
-                <a:spcPts val="1000"/>
+              <a:lnSpc>
+                <a:spcPct val="90000"/>
+              </a:lnSpc>
+              <a:spcAft>
+                <a:spcPts val="300"/>
+              </a:spcAft>
+              <a:defRPr sz="1900"/>
+            </a:pPr>
+          </a:p>
+          <a:p>
+            <a:pPr>
+              <a:lnSpc>
+                <a:spcPct val="90000"/>
+              </a:lnSpc>
+              <a:spcAft>
+                <a:spcPts val="300"/>
               </a:spcAft>
               <a:defRPr sz="1900"/>
             </a:pPr>
@@ -5494,8 +5742,11 @@
           </a:p>
           <a:p>
             <a:pPr lvl="1">
-              <a:spcAft>
-                <a:spcPts val="1000"/>
+              <a:lnSpc>
+                <a:spcPct val="90000"/>
+              </a:lnSpc>
+              <a:spcAft>
+                <a:spcPts val="300"/>
               </a:spcAft>
               <a:defRPr sz="1700"/>
             </a:pPr>
@@ -5505,16 +5756,22 @@
           </a:p>
           <a:p>
             <a:pPr>
-              <a:spcAft>
-                <a:spcPts val="1000"/>
-              </a:spcAft>
-              <a:defRPr sz="1900"/>
-            </a:pPr>
-          </a:p>
-          <a:p>
-            <a:pPr>
-              <a:spcAft>
-                <a:spcPts val="1000"/>
+              <a:lnSpc>
+                <a:spcPct val="90000"/>
+              </a:lnSpc>
+              <a:spcAft>
+                <a:spcPts val="300"/>
+              </a:spcAft>
+              <a:defRPr sz="1900"/>
+            </a:pPr>
+          </a:p>
+          <a:p>
+            <a:pPr>
+              <a:lnSpc>
+                <a:spcPct val="90000"/>
+              </a:lnSpc>
+              <a:spcAft>
+                <a:spcPts val="300"/>
               </a:spcAft>
               <a:defRPr sz="1900"/>
             </a:pPr>
@@ -5524,8 +5781,11 @@
           </a:p>
           <a:p>
             <a:pPr lvl="1">
-              <a:spcAft>
-                <a:spcPts val="1000"/>
+              <a:lnSpc>
+                <a:spcPct val="90000"/>
+              </a:lnSpc>
+              <a:spcAft>
+                <a:spcPts val="300"/>
               </a:spcAft>
               <a:defRPr sz="1700"/>
             </a:pPr>
@@ -5535,8 +5795,11 @@
           </a:p>
           <a:p>
             <a:pPr lvl="1">
-              <a:spcAft>
-                <a:spcPts val="1000"/>
+              <a:lnSpc>
+                <a:spcPct val="90000"/>
+              </a:lnSpc>
+              <a:spcAft>
+                <a:spcPts val="300"/>
               </a:spcAft>
               <a:defRPr sz="1700"/>
             </a:pPr>
@@ -5546,16 +5809,22 @@
           </a:p>
           <a:p>
             <a:pPr>
-              <a:spcAft>
-                <a:spcPts val="1000"/>
-              </a:spcAft>
-              <a:defRPr sz="1900"/>
-            </a:pPr>
-          </a:p>
-          <a:p>
-            <a:pPr>
-              <a:spcAft>
-                <a:spcPts val="1000"/>
+              <a:lnSpc>
+                <a:spcPct val="90000"/>
+              </a:lnSpc>
+              <a:spcAft>
+                <a:spcPts val="300"/>
+              </a:spcAft>
+              <a:defRPr sz="1900"/>
+            </a:pPr>
+          </a:p>
+          <a:p>
+            <a:pPr>
+              <a:lnSpc>
+                <a:spcPct val="90000"/>
+              </a:lnSpc>
+              <a:spcAft>
+                <a:spcPts val="300"/>
               </a:spcAft>
               <a:defRPr sz="1900"/>
             </a:pPr>
@@ -5565,16 +5834,22 @@
           </a:p>
           <a:p>
             <a:pPr>
-              <a:spcAft>
-                <a:spcPts val="1000"/>
-              </a:spcAft>
-              <a:defRPr sz="1900"/>
-            </a:pPr>
-          </a:p>
-          <a:p>
-            <a:pPr>
-              <a:spcAft>
-                <a:spcPts val="1000"/>
+              <a:lnSpc>
+                <a:spcPct val="90000"/>
+              </a:lnSpc>
+              <a:spcAft>
+                <a:spcPts val="300"/>
+              </a:spcAft>
+              <a:defRPr sz="1900"/>
+            </a:pPr>
+          </a:p>
+          <a:p>
+            <a:pPr>
+              <a:lnSpc>
+                <a:spcPct val="90000"/>
+              </a:lnSpc>
+              <a:spcAft>
+                <a:spcPts val="300"/>
               </a:spcAft>
               <a:defRPr sz="1900"/>
             </a:pPr>
@@ -5584,8 +5859,11 @@
           </a:p>
           <a:p>
             <a:pPr lvl="1">
-              <a:spcAft>
-                <a:spcPts val="1000"/>
+              <a:lnSpc>
+                <a:spcPct val="90000"/>
+              </a:lnSpc>
+              <a:spcAft>
+                <a:spcPts val="300"/>
               </a:spcAft>
               <a:defRPr sz="1700"/>
             </a:pPr>
@@ -5595,8 +5873,11 @@
           </a:p>
           <a:p>
             <a:pPr>
-              <a:spcAft>
-                <a:spcPts val="1000"/>
+              <a:lnSpc>
+                <a:spcPct val="90000"/>
+              </a:lnSpc>
+              <a:spcAft>
+                <a:spcPts val="300"/>
               </a:spcAft>
               <a:defRPr sz="1900"/>
             </a:pPr>
@@ -5606,8 +5887,11 @@
           </a:p>
           <a:p>
             <a:pPr lvl="1">
-              <a:spcAft>
-                <a:spcPts val="1000"/>
+              <a:lnSpc>
+                <a:spcPct val="90000"/>
+              </a:lnSpc>
+              <a:spcAft>
+                <a:spcPts val="300"/>
               </a:spcAft>
               <a:defRPr sz="1700"/>
             </a:pPr>
@@ -5617,16 +5901,22 @@
           </a:p>
           <a:p>
             <a:pPr>
-              <a:spcAft>
-                <a:spcPts val="1000"/>
-              </a:spcAft>
-              <a:defRPr sz="1900"/>
-            </a:pPr>
-          </a:p>
-          <a:p>
-            <a:pPr>
-              <a:spcAft>
-                <a:spcPts val="1000"/>
+              <a:lnSpc>
+                <a:spcPct val="90000"/>
+              </a:lnSpc>
+              <a:spcAft>
+                <a:spcPts val="300"/>
+              </a:spcAft>
+              <a:defRPr sz="1900"/>
+            </a:pPr>
+          </a:p>
+          <a:p>
+            <a:pPr>
+              <a:lnSpc>
+                <a:spcPct val="90000"/>
+              </a:lnSpc>
+              <a:spcAft>
+                <a:spcPts val="300"/>
               </a:spcAft>
               <a:defRPr sz="1900"/>
             </a:pPr>
@@ -5636,8 +5926,11 @@
           </a:p>
           <a:p>
             <a:pPr>
-              <a:spcAft>
-                <a:spcPts val="1000"/>
+              <a:lnSpc>
+                <a:spcPct val="90000"/>
+              </a:lnSpc>
+              <a:spcAft>
+                <a:spcPts val="300"/>
               </a:spcAft>
               <a:defRPr sz="1900"/>
             </a:pPr>
@@ -5647,8 +5940,11 @@
           </a:p>
           <a:p>
             <a:pPr lvl="1">
-              <a:spcAft>
-                <a:spcPts val="1000"/>
+              <a:lnSpc>
+                <a:spcPct val="90000"/>
+              </a:lnSpc>
+              <a:spcAft>
+                <a:spcPts val="300"/>
               </a:spcAft>
               <a:defRPr sz="1700"/>
             </a:pPr>
@@ -5658,8 +5954,11 @@
           </a:p>
           <a:p>
             <a:pPr>
-              <a:spcAft>
-                <a:spcPts val="1000"/>
+              <a:lnSpc>
+                <a:spcPct val="90000"/>
+              </a:lnSpc>
+              <a:spcAft>
+                <a:spcPts val="300"/>
               </a:spcAft>
               <a:defRPr sz="1900"/>
             </a:pPr>
@@ -5669,8 +5968,11 @@
           </a:p>
           <a:p>
             <a:pPr lvl="1">
-              <a:spcAft>
-                <a:spcPts val="1000"/>
+              <a:lnSpc>
+                <a:spcPct val="90000"/>
+              </a:lnSpc>
+              <a:spcAft>
+                <a:spcPts val="300"/>
               </a:spcAft>
               <a:defRPr sz="1700"/>
             </a:pPr>
@@ -5680,16 +5982,22 @@
           </a:p>
           <a:p>
             <a:pPr>
-              <a:spcAft>
-                <a:spcPts val="1000"/>
-              </a:spcAft>
-              <a:defRPr sz="1900"/>
-            </a:pPr>
-          </a:p>
-          <a:p>
-            <a:pPr>
-              <a:spcAft>
-                <a:spcPts val="1000"/>
+              <a:lnSpc>
+                <a:spcPct val="90000"/>
+              </a:lnSpc>
+              <a:spcAft>
+                <a:spcPts val="300"/>
+              </a:spcAft>
+              <a:defRPr sz="1900"/>
+            </a:pPr>
+          </a:p>
+          <a:p>
+            <a:pPr>
+              <a:lnSpc>
+                <a:spcPct val="90000"/>
+              </a:lnSpc>
+              <a:spcAft>
+                <a:spcPts val="300"/>
               </a:spcAft>
               <a:defRPr sz="1900"/>
             </a:pPr>
@@ -5729,7 +6037,7 @@
         </p:nvSpPr>
         <p:spPr/>
         <p:txBody>
-          <a:bodyPr/>
+          <a:bodyPr wrap="square"/>
           <a:lstStyle/>
           <a:p>
             <a:pPr>
@@ -5783,225 +6091,315 @@
             <a:spAutoFit/>
           </a:bodyPr>
           <a:lstStyle/>
-          <a:p/>
-          <a:p>
-            <a:pPr>
-              <a:spcAft>
-                <a:spcPts val="1000"/>
-              </a:spcAft>
-              <a:defRPr sz="1900"/>
-            </a:pPr>
-            <a:r>
+          <a:p>
+            <a:pPr>
+              <a:lnSpc>
+                <a:spcPct val="90000"/>
+              </a:lnSpc>
+              <a:spcAft>
+                <a:spcPts val="300"/>
+              </a:spcAft>
+            </a:pPr>
+          </a:p>
+          <a:p>
+            <a:pPr>
+              <a:lnSpc>
+                <a:spcPct val="90000"/>
+              </a:lnSpc>
+              <a:spcAft>
+                <a:spcPts val="300"/>
+              </a:spcAft>
+              <a:defRPr sz="1900"/>
+            </a:pPr>
+            <a:r>
+              <a:rPr sz="1500"/>
               <a:t>Tekrar yapıları</a:t>
             </a:r>
           </a:p>
           <a:p>
             <a:pPr>
-              <a:spcAft>
-                <a:spcPts val="1000"/>
-              </a:spcAft>
-              <a:defRPr sz="1900"/>
-            </a:pPr>
-          </a:p>
-          <a:p>
-            <a:pPr>
-              <a:spcAft>
-                <a:spcPts val="1000"/>
-              </a:spcAft>
-              <a:defRPr sz="1900"/>
-            </a:pPr>
-            <a:r>
+              <a:lnSpc>
+                <a:spcPct val="90000"/>
+              </a:lnSpc>
+              <a:spcAft>
+                <a:spcPts val="300"/>
+              </a:spcAft>
+              <a:defRPr sz="1900"/>
+            </a:pPr>
+          </a:p>
+          <a:p>
+            <a:pPr>
+              <a:lnSpc>
+                <a:spcPct val="90000"/>
+              </a:lnSpc>
+              <a:spcAft>
+                <a:spcPts val="300"/>
+              </a:spcAft>
+              <a:defRPr sz="1900"/>
+            </a:pPr>
+            <a:r>
+              <a:rPr sz="1500"/>
               <a:t>✅ Döngü Türleri:</a:t>
             </a:r>
           </a:p>
           <a:p>
             <a:pPr>
-              <a:spcAft>
-                <a:spcPts val="1000"/>
-              </a:spcAft>
-              <a:defRPr sz="1900"/>
-            </a:pPr>
-          </a:p>
-          <a:p>
-            <a:pPr>
-              <a:spcAft>
-                <a:spcPts val="1000"/>
-              </a:spcAft>
-              <a:defRPr sz="1900"/>
-            </a:pPr>
-            <a:r>
+              <a:lnSpc>
+                <a:spcPct val="90000"/>
+              </a:lnSpc>
+              <a:spcAft>
+                <a:spcPts val="300"/>
+              </a:spcAft>
+              <a:defRPr sz="1900"/>
+            </a:pPr>
+          </a:p>
+          <a:p>
+            <a:pPr>
+              <a:lnSpc>
+                <a:spcPct val="90000"/>
+              </a:lnSpc>
+              <a:spcAft>
+                <a:spcPts val="300"/>
+              </a:spcAft>
+              <a:defRPr sz="1900"/>
+            </a:pPr>
+            <a:r>
+              <a:rPr sz="1500"/>
               <a:t>🔢 For Döngüsü:</a:t>
             </a:r>
           </a:p>
           <a:p>
             <a:pPr lvl="1">
-              <a:spcAft>
-                <a:spcPts val="1000"/>
+              <a:lnSpc>
+                <a:spcPct val="90000"/>
+              </a:lnSpc>
+              <a:spcAft>
+                <a:spcPts val="300"/>
               </a:spcAft>
               <a:defRPr sz="1700"/>
             </a:pPr>
             <a:r>
+              <a:rPr sz="1500"/>
               <a:t>    • Belirli sayıda tekrar</a:t>
             </a:r>
           </a:p>
           <a:p>
             <a:pPr lvl="1">
-              <a:spcAft>
-                <a:spcPts val="1000"/>
+              <a:lnSpc>
+                <a:spcPct val="90000"/>
+              </a:lnSpc>
+              <a:spcAft>
+                <a:spcPts val="300"/>
               </a:spcAft>
               <a:defRPr sz="1700"/>
             </a:pPr>
             <a:r>
+              <a:rPr sz="1500"/>
               <a:t>    • Örnek: 10 kez yaz</a:t>
             </a:r>
           </a:p>
           <a:p>
             <a:pPr>
-              <a:spcAft>
-                <a:spcPts val="1000"/>
-              </a:spcAft>
-              <a:defRPr sz="1900"/>
-            </a:pPr>
-          </a:p>
-          <a:p>
-            <a:pPr>
-              <a:spcAft>
-                <a:spcPts val="1000"/>
-              </a:spcAft>
-              <a:defRPr sz="1900"/>
-            </a:pPr>
-            <a:r>
+              <a:lnSpc>
+                <a:spcPct val="90000"/>
+              </a:lnSpc>
+              <a:spcAft>
+                <a:spcPts val="300"/>
+              </a:spcAft>
+              <a:defRPr sz="1900"/>
+            </a:pPr>
+          </a:p>
+          <a:p>
+            <a:pPr>
+              <a:lnSpc>
+                <a:spcPct val="90000"/>
+              </a:lnSpc>
+              <a:spcAft>
+                <a:spcPts val="300"/>
+              </a:spcAft>
+              <a:defRPr sz="1900"/>
+            </a:pPr>
+            <a:r>
+              <a:rPr sz="1500"/>
               <a:t>❓ While Döngüsü:</a:t>
             </a:r>
           </a:p>
           <a:p>
             <a:pPr lvl="1">
-              <a:spcAft>
-                <a:spcPts val="1000"/>
+              <a:lnSpc>
+                <a:spcPct val="90000"/>
+              </a:lnSpc>
+              <a:spcAft>
+                <a:spcPts val="300"/>
               </a:spcAft>
               <a:defRPr sz="1700"/>
             </a:pPr>
             <a:r>
+              <a:rPr sz="1500"/>
               <a:t>    • Koşul sağlanana kadar</a:t>
             </a:r>
           </a:p>
           <a:p>
             <a:pPr lvl="1">
-              <a:spcAft>
-                <a:spcPts val="1000"/>
+              <a:lnSpc>
+                <a:spcPct val="90000"/>
+              </a:lnSpc>
+              <a:spcAft>
+                <a:spcPts val="300"/>
               </a:spcAft>
               <a:defRPr sz="1700"/>
             </a:pPr>
             <a:r>
+              <a:rPr sz="1500"/>
               <a:t>    • Örnek: Not 50'den büyük olana kadar sor</a:t>
             </a:r>
           </a:p>
           <a:p>
             <a:pPr>
-              <a:spcAft>
-                <a:spcPts val="1000"/>
-              </a:spcAft>
-              <a:defRPr sz="1900"/>
-            </a:pPr>
-          </a:p>
-          <a:p>
-            <a:pPr>
-              <a:spcAft>
-                <a:spcPts val="1000"/>
-              </a:spcAft>
-              <a:defRPr sz="1900"/>
-            </a:pPr>
-            <a:r>
+              <a:lnSpc>
+                <a:spcPct val="90000"/>
+              </a:lnSpc>
+              <a:spcAft>
+                <a:spcPts val="300"/>
+              </a:spcAft>
+              <a:defRPr sz="1900"/>
+            </a:pPr>
+          </a:p>
+          <a:p>
+            <a:pPr>
+              <a:lnSpc>
+                <a:spcPct val="90000"/>
+              </a:lnSpc>
+              <a:spcAft>
+                <a:spcPts val="300"/>
+              </a:spcAft>
+              <a:defRPr sz="1900"/>
+            </a:pPr>
+            <a:r>
+              <a:rPr sz="1500"/>
               <a:t>📌 Örnek: 1'den 10'a Kadar Say</a:t>
             </a:r>
           </a:p>
           <a:p>
             <a:pPr>
-              <a:spcAft>
-                <a:spcPts val="1000"/>
-              </a:spcAft>
-              <a:defRPr sz="1900"/>
-            </a:pPr>
-          </a:p>
-          <a:p>
-            <a:pPr>
-              <a:spcAft>
-                <a:spcPts val="1000"/>
-              </a:spcAft>
-              <a:defRPr sz="1900"/>
-            </a:pPr>
-            <a:r>
+              <a:lnSpc>
+                <a:spcPct val="90000"/>
+              </a:lnSpc>
+              <a:spcAft>
+                <a:spcPts val="300"/>
+              </a:spcAft>
+              <a:defRPr sz="1900"/>
+            </a:pPr>
+          </a:p>
+          <a:p>
+            <a:pPr>
+              <a:lnSpc>
+                <a:spcPct val="90000"/>
+              </a:lnSpc>
+              <a:spcAft>
+                <a:spcPts val="300"/>
+              </a:spcAft>
+              <a:defRPr sz="1900"/>
+            </a:pPr>
+            <a:r>
+              <a:rPr sz="1500"/>
               <a:t>Sayaç = 1</a:t>
             </a:r>
           </a:p>
           <a:p>
             <a:pPr>
-              <a:spcAft>
-                <a:spcPts val="1000"/>
-              </a:spcAft>
-              <a:defRPr sz="1900"/>
-            </a:pPr>
-            <a:r>
+              <a:lnSpc>
+                <a:spcPct val="90000"/>
+              </a:lnSpc>
+              <a:spcAft>
+                <a:spcPts val="300"/>
+              </a:spcAft>
+              <a:defRPr sz="1900"/>
+            </a:pPr>
+            <a:r>
+              <a:rPr sz="1500"/>
               <a:t>1'den 10'a kadar tekrarla:</a:t>
             </a:r>
           </a:p>
           <a:p>
             <a:pPr lvl="1">
-              <a:spcAft>
-                <a:spcPts val="1000"/>
+              <a:lnSpc>
+                <a:spcPct val="90000"/>
+              </a:lnSpc>
+              <a:spcAft>
+                <a:spcPts val="300"/>
               </a:spcAft>
               <a:defRPr sz="1700"/>
             </a:pPr>
             <a:r>
+              <a:rPr sz="1500"/>
               <a:t>    Sayacı yaz</a:t>
             </a:r>
           </a:p>
           <a:p>
             <a:pPr lvl="1">
-              <a:spcAft>
-                <a:spcPts val="1000"/>
+              <a:lnSpc>
+                <a:spcPct val="90000"/>
+              </a:lnSpc>
+              <a:spcAft>
+                <a:spcPts val="300"/>
               </a:spcAft>
               <a:defRPr sz="1700"/>
             </a:pPr>
             <a:r>
+              <a:rPr sz="1500"/>
               <a:t>    Sayacı 1 arttır</a:t>
             </a:r>
           </a:p>
           <a:p>
             <a:pPr>
-              <a:spcAft>
-                <a:spcPts val="1000"/>
-              </a:spcAft>
-              <a:defRPr sz="1900"/>
-            </a:pPr>
-          </a:p>
-          <a:p>
-            <a:pPr>
-              <a:spcAft>
-                <a:spcPts val="1000"/>
-              </a:spcAft>
-              <a:defRPr sz="1900"/>
-            </a:pPr>
-            <a:r>
+              <a:lnSpc>
+                <a:spcPct val="90000"/>
+              </a:lnSpc>
+              <a:spcAft>
+                <a:spcPts val="300"/>
+              </a:spcAft>
+              <a:defRPr sz="1900"/>
+            </a:pPr>
+          </a:p>
+          <a:p>
+            <a:pPr>
+              <a:lnSpc>
+                <a:spcPct val="90000"/>
+              </a:lnSpc>
+              <a:spcAft>
+                <a:spcPts val="300"/>
+              </a:spcAft>
+              <a:defRPr sz="1900"/>
+            </a:pPr>
+            <a:r>
+              <a:rPr sz="1500"/>
               <a:t>💡 Döngüler tekrarlı işler için kullanılır</a:t>
             </a:r>
           </a:p>
           <a:p>
             <a:pPr>
-              <a:spcAft>
-                <a:spcPts val="1000"/>
-              </a:spcAft>
-              <a:defRPr sz="1900"/>
-            </a:pPr>
-          </a:p>
-          <a:p>
-            <a:pPr>
-              <a:spcAft>
-                <a:spcPts val="1000"/>
-              </a:spcAft>
-              <a:defRPr sz="1900"/>
-            </a:pPr>
-            <a:r>
+              <a:lnSpc>
+                <a:spcPct val="90000"/>
+              </a:lnSpc>
+              <a:spcAft>
+                <a:spcPts val="300"/>
+              </a:spcAft>
+              <a:defRPr sz="1900"/>
+            </a:pPr>
+          </a:p>
+          <a:p>
+            <a:pPr>
+              <a:lnSpc>
+                <a:spcPct val="90000"/>
+              </a:lnSpc>
+              <a:spcAft>
+                <a:spcPts val="300"/>
+              </a:spcAft>
+              <a:defRPr sz="1900"/>
+            </a:pPr>
+            <a:r>
+              <a:rPr sz="1500"/>
               <a:t>⚠️ Sonsuz döngü = Hiç bitmeyen döngü (hata!)</a:t>
             </a:r>
           </a:p>
@@ -6037,7 +6435,7 @@
         </p:nvSpPr>
         <p:spPr/>
         <p:txBody>
-          <a:bodyPr/>
+          <a:bodyPr wrap="square"/>
           <a:lstStyle/>
           <a:p>
             <a:pPr>
@@ -6091,276 +6489,360 @@
             <a:spAutoFit/>
           </a:bodyPr>
           <a:lstStyle/>
-          <a:p/>
-          <a:p>
-            <a:pPr>
-              <a:spcAft>
-                <a:spcPts val="1000"/>
-              </a:spcAft>
-              <a:defRPr sz="1900"/>
-            </a:pPr>
-            <a:r>
-              <a:rPr sz="1600"/>
+          <a:p>
+            <a:pPr>
+              <a:lnSpc>
+                <a:spcPct val="90000"/>
+              </a:lnSpc>
+              <a:spcAft>
+                <a:spcPts val="300"/>
+              </a:spcAft>
+            </a:pPr>
+          </a:p>
+          <a:p>
+            <a:pPr>
+              <a:lnSpc>
+                <a:spcPct val="90000"/>
+              </a:lnSpc>
+              <a:spcAft>
+                <a:spcPts val="300"/>
+              </a:spcAft>
+              <a:defRPr sz="1900"/>
+            </a:pPr>
+            <a:r>
+              <a:rPr sz="1400"/>
               <a:t>Problemi nasıl çözeriz?</a:t>
             </a:r>
           </a:p>
           <a:p>
             <a:pPr>
-              <a:spcAft>
-                <a:spcPts val="1000"/>
-              </a:spcAft>
-              <a:defRPr sz="1900"/>
-            </a:pPr>
-          </a:p>
-          <a:p>
-            <a:pPr>
-              <a:spcAft>
-                <a:spcPts val="1000"/>
-              </a:spcAft>
-              <a:defRPr sz="1900"/>
-            </a:pPr>
-            <a:r>
-              <a:rPr sz="1600"/>
+              <a:lnSpc>
+                <a:spcPct val="90000"/>
+              </a:lnSpc>
+              <a:spcAft>
+                <a:spcPts val="300"/>
+              </a:spcAft>
+              <a:defRPr sz="1900"/>
+            </a:pPr>
+          </a:p>
+          <a:p>
+            <a:pPr>
+              <a:lnSpc>
+                <a:spcPct val="90000"/>
+              </a:lnSpc>
+              <a:spcAft>
+                <a:spcPts val="300"/>
+              </a:spcAft>
+              <a:defRPr sz="1900"/>
+            </a:pPr>
+            <a:r>
+              <a:rPr sz="1400"/>
               <a:t>✅ Problem Çözme Adımları:</a:t>
             </a:r>
           </a:p>
           <a:p>
             <a:pPr>
-              <a:spcAft>
-                <a:spcPts val="1000"/>
-              </a:spcAft>
-              <a:defRPr sz="1900"/>
-            </a:pPr>
-          </a:p>
-          <a:p>
-            <a:pPr>
-              <a:spcAft>
-                <a:spcPts val="1000"/>
-              </a:spcAft>
-              <a:defRPr sz="1900"/>
-            </a:pPr>
-            <a:r>
-              <a:rPr sz="1600"/>
+              <a:lnSpc>
+                <a:spcPct val="90000"/>
+              </a:lnSpc>
+              <a:spcAft>
+                <a:spcPts val="300"/>
+              </a:spcAft>
+              <a:defRPr sz="1900"/>
+            </a:pPr>
+          </a:p>
+          <a:p>
+            <a:pPr>
+              <a:lnSpc>
+                <a:spcPct val="90000"/>
+              </a:lnSpc>
+              <a:spcAft>
+                <a:spcPts val="300"/>
+              </a:spcAft>
+              <a:defRPr sz="1900"/>
+            </a:pPr>
+            <a:r>
+              <a:rPr sz="1400"/>
               <a:t>1️⃣ Problemi Anla:</a:t>
             </a:r>
           </a:p>
           <a:p>
             <a:pPr lvl="1">
-              <a:spcAft>
-                <a:spcPts val="1000"/>
+              <a:lnSpc>
+                <a:spcPct val="90000"/>
+              </a:lnSpc>
+              <a:spcAft>
+                <a:spcPts val="300"/>
               </a:spcAft>
               <a:defRPr sz="1700"/>
             </a:pPr>
             <a:r>
-              <a:rPr sz="1600"/>
+              <a:rPr sz="1400"/>
               <a:t>    • Ne isteniyor?</a:t>
             </a:r>
           </a:p>
           <a:p>
             <a:pPr lvl="1">
-              <a:spcAft>
-                <a:spcPts val="1000"/>
+              <a:lnSpc>
+                <a:spcPct val="90000"/>
+              </a:lnSpc>
+              <a:spcAft>
+                <a:spcPts val="300"/>
               </a:spcAft>
               <a:defRPr sz="1700"/>
             </a:pPr>
             <a:r>
-              <a:rPr sz="1600"/>
+              <a:rPr sz="1400"/>
               <a:t>    • Girdi nedir?</a:t>
             </a:r>
           </a:p>
           <a:p>
             <a:pPr lvl="1">
-              <a:spcAft>
-                <a:spcPts val="1000"/>
+              <a:lnSpc>
+                <a:spcPct val="90000"/>
+              </a:lnSpc>
+              <a:spcAft>
+                <a:spcPts val="300"/>
               </a:spcAft>
               <a:defRPr sz="1700"/>
             </a:pPr>
             <a:r>
-              <a:rPr sz="1600"/>
+              <a:rPr sz="1400"/>
               <a:t>    • Çıktı nedir?</a:t>
             </a:r>
           </a:p>
           <a:p>
             <a:pPr>
-              <a:spcAft>
-                <a:spcPts val="1000"/>
-              </a:spcAft>
-              <a:defRPr sz="1900"/>
-            </a:pPr>
-          </a:p>
-          <a:p>
-            <a:pPr>
-              <a:spcAft>
-                <a:spcPts val="1000"/>
-              </a:spcAft>
-              <a:defRPr sz="1900"/>
-            </a:pPr>
-            <a:r>
-              <a:rPr sz="1600"/>
+              <a:lnSpc>
+                <a:spcPct val="90000"/>
+              </a:lnSpc>
+              <a:spcAft>
+                <a:spcPts val="300"/>
+              </a:spcAft>
+              <a:defRPr sz="1900"/>
+            </a:pPr>
+          </a:p>
+          <a:p>
+            <a:pPr>
+              <a:lnSpc>
+                <a:spcPct val="90000"/>
+              </a:lnSpc>
+              <a:spcAft>
+                <a:spcPts val="300"/>
+              </a:spcAft>
+              <a:defRPr sz="1900"/>
+            </a:pPr>
+            <a:r>
+              <a:rPr sz="1400"/>
               <a:t>2️⃣ Plan Yap:</a:t>
             </a:r>
           </a:p>
           <a:p>
             <a:pPr lvl="1">
-              <a:spcAft>
-                <a:spcPts val="1000"/>
+              <a:lnSpc>
+                <a:spcPct val="90000"/>
+              </a:lnSpc>
+              <a:spcAft>
+                <a:spcPts val="300"/>
               </a:spcAft>
               <a:defRPr sz="1700"/>
             </a:pPr>
             <a:r>
-              <a:rPr sz="1600"/>
+              <a:rPr sz="1400"/>
               <a:t>    • Algoritma tasarla</a:t>
             </a:r>
           </a:p>
           <a:p>
             <a:pPr lvl="1">
-              <a:spcAft>
-                <a:spcPts val="1000"/>
+              <a:lnSpc>
+                <a:spcPct val="90000"/>
+              </a:lnSpc>
+              <a:spcAft>
+                <a:spcPts val="300"/>
               </a:spcAft>
               <a:defRPr sz="1700"/>
             </a:pPr>
             <a:r>
-              <a:rPr sz="1600"/>
+              <a:rPr sz="1400"/>
               <a:t>    • Akış diyagramı çiz</a:t>
             </a:r>
           </a:p>
           <a:p>
             <a:pPr>
-              <a:spcAft>
-                <a:spcPts val="1000"/>
-              </a:spcAft>
-              <a:defRPr sz="1900"/>
-            </a:pPr>
-          </a:p>
-          <a:p>
-            <a:pPr>
-              <a:spcAft>
-                <a:spcPts val="1000"/>
-              </a:spcAft>
-              <a:defRPr sz="1900"/>
-            </a:pPr>
-            <a:r>
-              <a:rPr sz="1600"/>
+              <a:lnSpc>
+                <a:spcPct val="90000"/>
+              </a:lnSpc>
+              <a:spcAft>
+                <a:spcPts val="300"/>
+              </a:spcAft>
+              <a:defRPr sz="1900"/>
+            </a:pPr>
+          </a:p>
+          <a:p>
+            <a:pPr>
+              <a:lnSpc>
+                <a:spcPct val="90000"/>
+              </a:lnSpc>
+              <a:spcAft>
+                <a:spcPts val="300"/>
+              </a:spcAft>
+              <a:defRPr sz="1900"/>
+            </a:pPr>
+            <a:r>
+              <a:rPr sz="1400"/>
               <a:t>3️⃣ Uygula:</a:t>
             </a:r>
           </a:p>
           <a:p>
             <a:pPr lvl="1">
-              <a:spcAft>
-                <a:spcPts val="1000"/>
+              <a:lnSpc>
+                <a:spcPct val="90000"/>
+              </a:lnSpc>
+              <a:spcAft>
+                <a:spcPts val="300"/>
               </a:spcAft>
               <a:defRPr sz="1700"/>
             </a:pPr>
             <a:r>
-              <a:rPr sz="1600"/>
+              <a:rPr sz="1400"/>
               <a:t>    • Kodu yaz / adımları takip et</a:t>
             </a:r>
           </a:p>
           <a:p>
             <a:pPr>
-              <a:spcAft>
-                <a:spcPts val="1000"/>
-              </a:spcAft>
-              <a:defRPr sz="1900"/>
-            </a:pPr>
-          </a:p>
-          <a:p>
-            <a:pPr>
-              <a:spcAft>
-                <a:spcPts val="1000"/>
-              </a:spcAft>
-              <a:defRPr sz="1900"/>
-            </a:pPr>
-            <a:r>
-              <a:rPr sz="1600"/>
+              <a:lnSpc>
+                <a:spcPct val="90000"/>
+              </a:lnSpc>
+              <a:spcAft>
+                <a:spcPts val="300"/>
+              </a:spcAft>
+              <a:defRPr sz="1900"/>
+            </a:pPr>
+          </a:p>
+          <a:p>
+            <a:pPr>
+              <a:lnSpc>
+                <a:spcPct val="90000"/>
+              </a:lnSpc>
+              <a:spcAft>
+                <a:spcPts val="300"/>
+              </a:spcAft>
+              <a:defRPr sz="1900"/>
+            </a:pPr>
+            <a:r>
+              <a:rPr sz="1400"/>
               <a:t>4️⃣ Test Et:</a:t>
             </a:r>
           </a:p>
           <a:p>
             <a:pPr lvl="1">
-              <a:spcAft>
-                <a:spcPts val="1000"/>
+              <a:lnSpc>
+                <a:spcPct val="90000"/>
+              </a:lnSpc>
+              <a:spcAft>
+                <a:spcPts val="300"/>
               </a:spcAft>
               <a:defRPr sz="1700"/>
             </a:pPr>
             <a:r>
-              <a:rPr sz="1600"/>
+              <a:rPr sz="1400"/>
               <a:t>    • Doğru çalışıyor mu?</a:t>
             </a:r>
           </a:p>
           <a:p>
             <a:pPr lvl="1">
-              <a:spcAft>
-                <a:spcPts val="1000"/>
+              <a:lnSpc>
+                <a:spcPct val="90000"/>
+              </a:lnSpc>
+              <a:spcAft>
+                <a:spcPts val="300"/>
               </a:spcAft>
               <a:defRPr sz="1700"/>
             </a:pPr>
             <a:r>
-              <a:rPr sz="1600"/>
+              <a:rPr sz="1400"/>
               <a:t>    • Farklı değerler dene</a:t>
             </a:r>
           </a:p>
           <a:p>
             <a:pPr>
-              <a:spcAft>
-                <a:spcPts val="1000"/>
-              </a:spcAft>
-              <a:defRPr sz="1900"/>
-            </a:pPr>
-          </a:p>
-          <a:p>
-            <a:pPr>
-              <a:spcAft>
-                <a:spcPts val="1000"/>
-              </a:spcAft>
-              <a:defRPr sz="1900"/>
-            </a:pPr>
-            <a:r>
-              <a:rPr sz="1600"/>
+              <a:lnSpc>
+                <a:spcPct val="90000"/>
+              </a:lnSpc>
+              <a:spcAft>
+                <a:spcPts val="300"/>
+              </a:spcAft>
+              <a:defRPr sz="1900"/>
+            </a:pPr>
+          </a:p>
+          <a:p>
+            <a:pPr>
+              <a:lnSpc>
+                <a:spcPct val="90000"/>
+              </a:lnSpc>
+              <a:spcAft>
+                <a:spcPts val="300"/>
+              </a:spcAft>
+              <a:defRPr sz="1900"/>
+            </a:pPr>
+            <a:r>
+              <a:rPr sz="1400"/>
               <a:t>5️⃣ İyileştir:</a:t>
             </a:r>
           </a:p>
           <a:p>
             <a:pPr lvl="1">
-              <a:spcAft>
-                <a:spcPts val="1000"/>
+              <a:lnSpc>
+                <a:spcPct val="90000"/>
+              </a:lnSpc>
+              <a:spcAft>
+                <a:spcPts val="300"/>
               </a:spcAft>
               <a:defRPr sz="1700"/>
             </a:pPr>
             <a:r>
-              <a:rPr sz="1600"/>
+              <a:rPr sz="1400"/>
               <a:t>    • Daha hızlı yapılabilir mi?</a:t>
             </a:r>
           </a:p>
           <a:p>
             <a:pPr lvl="1">
-              <a:spcAft>
-                <a:spcPts val="1000"/>
+              <a:lnSpc>
+                <a:spcPct val="90000"/>
+              </a:lnSpc>
+              <a:spcAft>
+                <a:spcPts val="300"/>
               </a:spcAft>
               <a:defRPr sz="1700"/>
             </a:pPr>
             <a:r>
-              <a:rPr sz="1600"/>
+              <a:rPr sz="1400"/>
               <a:t>    • Daha basit olabilir mi?</a:t>
             </a:r>
           </a:p>
           <a:p>
             <a:pPr>
-              <a:spcAft>
-                <a:spcPts val="1000"/>
-              </a:spcAft>
-              <a:defRPr sz="1900"/>
-            </a:pPr>
-          </a:p>
-          <a:p>
-            <a:pPr>
-              <a:spcAft>
-                <a:spcPts val="1000"/>
-              </a:spcAft>
-              <a:defRPr sz="1900"/>
-            </a:pPr>
-            <a:r>
-              <a:rPr sz="1600"/>
+              <a:lnSpc>
+                <a:spcPct val="90000"/>
+              </a:lnSpc>
+              <a:spcAft>
+                <a:spcPts val="300"/>
+              </a:spcAft>
+              <a:defRPr sz="1900"/>
+            </a:pPr>
+          </a:p>
+          <a:p>
+            <a:pPr>
+              <a:lnSpc>
+                <a:spcPct val="90000"/>
+              </a:lnSpc>
+              <a:spcAft>
+                <a:spcPts val="300"/>
+              </a:spcAft>
+              <a:defRPr sz="1900"/>
+            </a:pPr>
+            <a:r>
+              <a:rPr sz="1400"/>
               <a:t>💡 Bu adımlar her problem için geçerli!</a:t>
             </a:r>
           </a:p>
@@ -6396,7 +6878,7 @@
         </p:nvSpPr>
         <p:spPr/>
         <p:txBody>
-          <a:bodyPr/>
+          <a:bodyPr wrap="square"/>
           <a:lstStyle/>
           <a:p>
             <a:pPr>
@@ -6450,149 +6932,211 @@
             <a:spAutoFit/>
           </a:bodyPr>
           <a:lstStyle/>
-          <a:p/>
-          <a:p>
-            <a:pPr>
-              <a:spcAft>
-                <a:spcPts val="1000"/>
-              </a:spcAft>
-              <a:defRPr sz="1900"/>
-            </a:pPr>
-            <a:r>
+          <a:p>
+            <a:pPr>
+              <a:lnSpc>
+                <a:spcPct val="90000"/>
+              </a:lnSpc>
+              <a:spcAft>
+                <a:spcPts val="300"/>
+              </a:spcAft>
+            </a:pPr>
+          </a:p>
+          <a:p>
+            <a:pPr>
+              <a:lnSpc>
+                <a:spcPct val="90000"/>
+              </a:lnSpc>
+              <a:spcAft>
+                <a:spcPts val="300"/>
+              </a:spcAft>
+              <a:defRPr sz="1900"/>
+            </a:pPr>
+            <a:r>
+              <a:rPr sz="1500"/>
               <a:t>Bu ünitede neler öğrendik?</a:t>
             </a:r>
           </a:p>
           <a:p>
             <a:pPr>
-              <a:spcAft>
-                <a:spcPts val="1000"/>
-              </a:spcAft>
-              <a:defRPr sz="1900"/>
-            </a:pPr>
-          </a:p>
-          <a:p>
-            <a:pPr>
-              <a:spcAft>
-                <a:spcPts val="1000"/>
-              </a:spcAft>
-              <a:defRPr sz="1900"/>
-            </a:pPr>
-            <a:r>
+              <a:lnSpc>
+                <a:spcPct val="90000"/>
+              </a:lnSpc>
+              <a:spcAft>
+                <a:spcPts val="300"/>
+              </a:spcAft>
+              <a:defRPr sz="1900"/>
+            </a:pPr>
+          </a:p>
+          <a:p>
+            <a:pPr>
+              <a:lnSpc>
+                <a:spcPct val="90000"/>
+              </a:lnSpc>
+              <a:spcAft>
+                <a:spcPts val="300"/>
+              </a:spcAft>
+              <a:defRPr sz="1900"/>
+            </a:pPr>
+            <a:r>
+              <a:rPr sz="1500"/>
               <a:t>✅ Algoritma kavramı ve önemi</a:t>
             </a:r>
           </a:p>
           <a:p>
             <a:pPr>
-              <a:spcAft>
-                <a:spcPts val="1000"/>
-              </a:spcAft>
-              <a:defRPr sz="1900"/>
-            </a:pPr>
-            <a:r>
+              <a:lnSpc>
+                <a:spcPct val="90000"/>
+              </a:lnSpc>
+              <a:spcAft>
+                <a:spcPts val="300"/>
+              </a:spcAft>
+              <a:defRPr sz="1900"/>
+            </a:pPr>
+            <a:r>
+              <a:rPr sz="1500"/>
               <a:t>✅ Günlük hayattan algoritma örnekleri</a:t>
             </a:r>
           </a:p>
           <a:p>
             <a:pPr>
-              <a:spcAft>
-                <a:spcPts val="1000"/>
-              </a:spcAft>
-              <a:defRPr sz="1900"/>
-            </a:pPr>
-            <a:r>
+              <a:lnSpc>
+                <a:spcPct val="90000"/>
+              </a:lnSpc>
+              <a:spcAft>
+                <a:spcPts val="300"/>
+              </a:spcAft>
+              <a:defRPr sz="1900"/>
+            </a:pPr>
+            <a:r>
+              <a:rPr sz="1500"/>
               <a:t>✅ Akış diyagramları ve sembolleri</a:t>
             </a:r>
           </a:p>
           <a:p>
             <a:pPr>
-              <a:spcAft>
-                <a:spcPts val="1000"/>
-              </a:spcAft>
-              <a:defRPr sz="1900"/>
-            </a:pPr>
-            <a:r>
+              <a:lnSpc>
+                <a:spcPct val="90000"/>
+              </a:lnSpc>
+              <a:spcAft>
+                <a:spcPts val="300"/>
+              </a:spcAft>
+              <a:defRPr sz="1900"/>
+            </a:pPr>
+            <a:r>
+              <a:rPr sz="1500"/>
               <a:t>✅ Sıralı, seçimli, döngülü yapılar</a:t>
             </a:r>
           </a:p>
           <a:p>
             <a:pPr>
-              <a:spcAft>
-                <a:spcPts val="1000"/>
-              </a:spcAft>
-              <a:defRPr sz="1900"/>
-            </a:pPr>
-            <a:r>
+              <a:lnSpc>
+                <a:spcPct val="90000"/>
+              </a:lnSpc>
+              <a:spcAft>
+                <a:spcPts val="300"/>
+              </a:spcAft>
+              <a:defRPr sz="1900"/>
+            </a:pPr>
+            <a:r>
+              <a:rPr sz="1500"/>
               <a:t>✅ Problem çözme basamakları</a:t>
             </a:r>
           </a:p>
           <a:p>
             <a:pPr>
-              <a:spcAft>
-                <a:spcPts val="1000"/>
-              </a:spcAft>
-              <a:defRPr sz="1900"/>
-            </a:pPr>
-            <a:r>
+              <a:lnSpc>
+                <a:spcPct val="90000"/>
+              </a:lnSpc>
+              <a:spcAft>
+                <a:spcPts val="300"/>
+              </a:spcAft>
+              <a:defRPr sz="1900"/>
+            </a:pPr>
+            <a:r>
+              <a:rPr sz="1500"/>
               <a:t>✅ Algoritma tasarımı</a:t>
             </a:r>
           </a:p>
           <a:p>
             <a:pPr>
-              <a:spcAft>
-                <a:spcPts val="1000"/>
-              </a:spcAft>
-              <a:defRPr sz="1900"/>
-            </a:pPr>
-          </a:p>
-          <a:p>
-            <a:pPr>
-              <a:spcAft>
-                <a:spcPts val="1000"/>
-              </a:spcAft>
-              <a:defRPr sz="1900"/>
-            </a:pPr>
-            <a:r>
+              <a:lnSpc>
+                <a:spcPct val="90000"/>
+              </a:lnSpc>
+              <a:spcAft>
+                <a:spcPts val="300"/>
+              </a:spcAft>
+              <a:defRPr sz="1900"/>
+            </a:pPr>
+          </a:p>
+          <a:p>
+            <a:pPr>
+              <a:lnSpc>
+                <a:spcPct val="90000"/>
+              </a:lnSpc>
+              <a:spcAft>
+                <a:spcPts val="300"/>
+              </a:spcAft>
+              <a:defRPr sz="1900"/>
+            </a:pPr>
+            <a:r>
+              <a:rPr sz="1500"/>
               <a:t>💡 Anahtar Mesaj:</a:t>
             </a:r>
           </a:p>
           <a:p>
             <a:pPr>
-              <a:spcAft>
-                <a:spcPts val="1000"/>
-              </a:spcAft>
-              <a:defRPr sz="1900"/>
-            </a:pPr>
-            <a:r>
+              <a:lnSpc>
+                <a:spcPct val="90000"/>
+              </a:lnSpc>
+              <a:spcAft>
+                <a:spcPts val="300"/>
+              </a:spcAft>
+              <a:defRPr sz="1900"/>
+            </a:pPr>
+            <a:r>
+              <a:rPr sz="1500"/>
               <a:t>Her problem adım adım çözülebilir!</a:t>
             </a:r>
           </a:p>
           <a:p>
             <a:pPr>
-              <a:spcAft>
-                <a:spcPts val="1000"/>
-              </a:spcAft>
-              <a:defRPr sz="1900"/>
-            </a:pPr>
-            <a:r>
+              <a:lnSpc>
+                <a:spcPct val="90000"/>
+              </a:lnSpc>
+              <a:spcAft>
+                <a:spcPts val="300"/>
+              </a:spcAft>
+              <a:defRPr sz="1900"/>
+            </a:pPr>
+            <a:r>
+              <a:rPr sz="1500"/>
               <a:t>Algoritma düşüncesi hayatın her alanında işe yarar.</a:t>
             </a:r>
           </a:p>
           <a:p>
             <a:pPr>
-              <a:spcAft>
-                <a:spcPts val="1000"/>
-              </a:spcAft>
-              <a:defRPr sz="1900"/>
-            </a:pPr>
-          </a:p>
-          <a:p>
-            <a:pPr>
-              <a:spcAft>
-                <a:spcPts val="1000"/>
-              </a:spcAft>
-              <a:defRPr sz="1900"/>
-            </a:pPr>
-            <a:r>
+              <a:lnSpc>
+                <a:spcPct val="90000"/>
+              </a:lnSpc>
+              <a:spcAft>
+                <a:spcPts val="300"/>
+              </a:spcAft>
+              <a:defRPr sz="1900"/>
+            </a:pPr>
+          </a:p>
+          <a:p>
+            <a:pPr>
+              <a:lnSpc>
+                <a:spcPct val="90000"/>
+              </a:lnSpc>
+              <a:spcAft>
+                <a:spcPts val="300"/>
+              </a:spcAft>
+              <a:defRPr sz="1900"/>
+            </a:pPr>
+            <a:r>
+              <a:rPr sz="1500"/>
               <a:t>🎯 Artık algoritmik düşünebilirsin!</a:t>
             </a:r>
           </a:p>

--- a/sunumlar/6-sinif-unite3-algoritmalar-DETAYLI.pptx
+++ b/sunumlar/6-sinif-unite3-algoritmalar-DETAYLI.pptx
@@ -4458,12 +4458,21 @@
           <a:noFill/>
         </p:spPr>
         <p:txBody>
-          <a:bodyPr wrap="square">
+          <a:bodyPr wrap="square" tIns="25400" bIns="25400" lIns="63500" rIns="63500">
             <a:spAutoFit/>
           </a:bodyPr>
           <a:lstStyle/>
           <a:p>
             <a:pPr algn="ctr">
+              <a:lnSpc>
+                <a:spcPct val="85000"/>
+              </a:lnSpc>
+              <a:spcBef>
+                <a:spcPts val="200"/>
+              </a:spcBef>
+              <a:spcAft>
+                <a:spcPts val="200"/>
+              </a:spcAft>
               <a:defRPr sz="5400" b="1">
                 <a:solidFill>
                   <a:srgbClr val="FFFFFF"/>
@@ -4471,6 +4480,7 @@
               </a:defRPr>
             </a:pPr>
             <a:r>
+              <a:rPr/>
               <a:t>6. SINIF - ÜNİTE 3</a:t>
             </a:r>
           </a:p>
@@ -4493,12 +4503,21 @@
           <a:noFill/>
         </p:spPr>
         <p:txBody>
-          <a:bodyPr wrap="square">
+          <a:bodyPr wrap="square" tIns="25400" bIns="25400" lIns="63500" rIns="63500">
             <a:spAutoFit/>
           </a:bodyPr>
           <a:lstStyle/>
           <a:p>
             <a:pPr algn="ctr">
+              <a:lnSpc>
+                <a:spcPct val="85000"/>
+              </a:lnSpc>
+              <a:spcBef>
+                <a:spcPts val="200"/>
+              </a:spcBef>
+              <a:spcAft>
+                <a:spcPts val="200"/>
+              </a:spcAft>
               <a:defRPr sz="2800">
                 <a:solidFill>
                   <a:srgbClr val="FFFFFF"/>
@@ -4506,6 +4525,7 @@
               </a:defRPr>
             </a:pPr>
             <a:r>
+              <a:rPr/>
               <a:t>Algoritmalar ve Problem Çözme</a:t>
             </a:r>
           </a:p>
@@ -4541,10 +4561,19 @@
         </p:nvSpPr>
         <p:spPr/>
         <p:txBody>
-          <a:bodyPr wrap="square"/>
+          <a:bodyPr wrap="square" tIns="25400" bIns="25400" lIns="63500" rIns="63500"/>
           <a:lstStyle/>
           <a:p>
             <a:pPr>
+              <a:lnSpc>
+                <a:spcPct val="85000"/>
+              </a:lnSpc>
+              <a:spcBef>
+                <a:spcPts val="200"/>
+              </a:spcBef>
+              <a:spcAft>
+                <a:spcPts val="200"/>
+              </a:spcAft>
               <a:defRPr sz="3800" b="1">
                 <a:solidFill>
                   <a:srgbClr val="764BA2"/>
@@ -4552,6 +4581,7 @@
               </a:defRPr>
             </a:pPr>
             <a:r>
+              <a:rPr/>
               <a:t>📚 Ünitenin Konuları</a:t>
             </a:r>
           </a:p>
@@ -4591,7 +4621,7 @@
           <a:noFill/>
         </p:spPr>
         <p:txBody>
-          <a:bodyPr wrap="square">
+          <a:bodyPr wrap="square" tIns="25400" bIns="25400" lIns="63500" rIns="63500">
             <a:spAutoFit/>
           </a:bodyPr>
           <a:lstStyle/>
@@ -4608,10 +4638,13 @@
           <a:p>
             <a:pPr>
               <a:lnSpc>
-                <a:spcPct val="90000"/>
-              </a:lnSpc>
-              <a:spcAft>
-                <a:spcPts val="300"/>
+                <a:spcPct val="85000"/>
+              </a:lnSpc>
+              <a:spcBef>
+                <a:spcPts val="200"/>
+              </a:spcBef>
+              <a:spcAft>
+                <a:spcPts val="200"/>
               </a:spcAft>
               <a:defRPr sz="1900"/>
             </a:pPr>
@@ -4634,10 +4667,13 @@
           <a:p>
             <a:pPr>
               <a:lnSpc>
-                <a:spcPct val="90000"/>
-              </a:lnSpc>
-              <a:spcAft>
-                <a:spcPts val="300"/>
+                <a:spcPct val="85000"/>
+              </a:lnSpc>
+              <a:spcBef>
+                <a:spcPts val="200"/>
+              </a:spcBef>
+              <a:spcAft>
+                <a:spcPts val="200"/>
               </a:spcAft>
               <a:defRPr sz="1900"/>
             </a:pPr>
@@ -4649,10 +4685,13 @@
           <a:p>
             <a:pPr>
               <a:lnSpc>
-                <a:spcPct val="90000"/>
-              </a:lnSpc>
-              <a:spcAft>
-                <a:spcPts val="300"/>
+                <a:spcPct val="85000"/>
+              </a:lnSpc>
+              <a:spcBef>
+                <a:spcPts val="200"/>
+              </a:spcBef>
+              <a:spcAft>
+                <a:spcPts val="200"/>
               </a:spcAft>
               <a:defRPr sz="1900"/>
             </a:pPr>
@@ -4664,10 +4703,13 @@
           <a:p>
             <a:pPr>
               <a:lnSpc>
-                <a:spcPct val="90000"/>
-              </a:lnSpc>
-              <a:spcAft>
-                <a:spcPts val="300"/>
+                <a:spcPct val="85000"/>
+              </a:lnSpc>
+              <a:spcBef>
+                <a:spcPts val="200"/>
+              </a:spcBef>
+              <a:spcAft>
+                <a:spcPts val="200"/>
               </a:spcAft>
               <a:defRPr sz="1900"/>
             </a:pPr>
@@ -4679,10 +4721,13 @@
           <a:p>
             <a:pPr>
               <a:lnSpc>
-                <a:spcPct val="90000"/>
-              </a:lnSpc>
-              <a:spcAft>
-                <a:spcPts val="300"/>
+                <a:spcPct val="85000"/>
+              </a:lnSpc>
+              <a:spcBef>
+                <a:spcPts val="200"/>
+              </a:spcBef>
+              <a:spcAft>
+                <a:spcPts val="200"/>
               </a:spcAft>
               <a:defRPr sz="1900"/>
             </a:pPr>
@@ -4694,10 +4739,13 @@
           <a:p>
             <a:pPr>
               <a:lnSpc>
-                <a:spcPct val="90000"/>
-              </a:lnSpc>
-              <a:spcAft>
-                <a:spcPts val="300"/>
+                <a:spcPct val="85000"/>
+              </a:lnSpc>
+              <a:spcBef>
+                <a:spcPts val="200"/>
+              </a:spcBef>
+              <a:spcAft>
+                <a:spcPts val="200"/>
               </a:spcAft>
               <a:defRPr sz="1900"/>
             </a:pPr>
@@ -4709,10 +4757,13 @@
           <a:p>
             <a:pPr>
               <a:lnSpc>
-                <a:spcPct val="90000"/>
-              </a:lnSpc>
-              <a:spcAft>
-                <a:spcPts val="300"/>
+                <a:spcPct val="85000"/>
+              </a:lnSpc>
+              <a:spcBef>
+                <a:spcPts val="200"/>
+              </a:spcBef>
+              <a:spcAft>
+                <a:spcPts val="200"/>
               </a:spcAft>
               <a:defRPr sz="1900"/>
             </a:pPr>
@@ -4724,10 +4775,13 @@
           <a:p>
             <a:pPr>
               <a:lnSpc>
-                <a:spcPct val="90000"/>
-              </a:lnSpc>
-              <a:spcAft>
-                <a:spcPts val="300"/>
+                <a:spcPct val="85000"/>
+              </a:lnSpc>
+              <a:spcBef>
+                <a:spcPts val="200"/>
+              </a:spcBef>
+              <a:spcAft>
+                <a:spcPts val="200"/>
               </a:spcAft>
               <a:defRPr sz="1900"/>
             </a:pPr>
@@ -4739,10 +4793,13 @@
           <a:p>
             <a:pPr>
               <a:lnSpc>
-                <a:spcPct val="90000"/>
-              </a:lnSpc>
-              <a:spcAft>
-                <a:spcPts val="300"/>
+                <a:spcPct val="85000"/>
+              </a:lnSpc>
+              <a:spcBef>
+                <a:spcPts val="200"/>
+              </a:spcBef>
+              <a:spcAft>
+                <a:spcPts val="200"/>
               </a:spcAft>
               <a:defRPr sz="1900"/>
             </a:pPr>
@@ -4754,10 +4811,13 @@
           <a:p>
             <a:pPr>
               <a:lnSpc>
-                <a:spcPct val="90000"/>
-              </a:lnSpc>
-              <a:spcAft>
-                <a:spcPts val="300"/>
+                <a:spcPct val="85000"/>
+              </a:lnSpc>
+              <a:spcBef>
+                <a:spcPts val="200"/>
+              </a:spcBef>
+              <a:spcAft>
+                <a:spcPts val="200"/>
               </a:spcAft>
               <a:defRPr sz="1900"/>
             </a:pPr>
@@ -4769,10 +4829,13 @@
           <a:p>
             <a:pPr>
               <a:lnSpc>
-                <a:spcPct val="90000"/>
-              </a:lnSpc>
-              <a:spcAft>
-                <a:spcPts val="300"/>
+                <a:spcPct val="85000"/>
+              </a:lnSpc>
+              <a:spcBef>
+                <a:spcPts val="200"/>
+              </a:spcBef>
+              <a:spcAft>
+                <a:spcPts val="200"/>
               </a:spcAft>
               <a:defRPr sz="1900"/>
             </a:pPr>
@@ -4795,10 +4858,13 @@
           <a:p>
             <a:pPr>
               <a:lnSpc>
-                <a:spcPct val="90000"/>
-              </a:lnSpc>
-              <a:spcAft>
-                <a:spcPts val="300"/>
+                <a:spcPct val="85000"/>
+              </a:lnSpc>
+              <a:spcBef>
+                <a:spcPts val="200"/>
+              </a:spcBef>
+              <a:spcAft>
+                <a:spcPts val="200"/>
               </a:spcAft>
               <a:defRPr sz="1900"/>
             </a:pPr>
@@ -4810,10 +4876,13 @@
           <a:p>
             <a:pPr>
               <a:lnSpc>
-                <a:spcPct val="90000"/>
-              </a:lnSpc>
-              <a:spcAft>
-                <a:spcPts val="300"/>
+                <a:spcPct val="85000"/>
+              </a:lnSpc>
+              <a:spcBef>
+                <a:spcPts val="200"/>
+              </a:spcBef>
+              <a:spcAft>
+                <a:spcPts val="200"/>
               </a:spcAft>
               <a:defRPr sz="1900"/>
             </a:pPr>
@@ -4854,10 +4923,19 @@
         </p:nvSpPr>
         <p:spPr/>
         <p:txBody>
-          <a:bodyPr wrap="square"/>
+          <a:bodyPr wrap="square" tIns="25400" bIns="25400" lIns="63500" rIns="63500"/>
           <a:lstStyle/>
           <a:p>
             <a:pPr>
+              <a:lnSpc>
+                <a:spcPct val="85000"/>
+              </a:lnSpc>
+              <a:spcBef>
+                <a:spcPts val="200"/>
+              </a:spcBef>
+              <a:spcAft>
+                <a:spcPts val="200"/>
+              </a:spcAft>
               <a:defRPr sz="3800" b="1">
                 <a:solidFill>
                   <a:srgbClr val="764BA2"/>
@@ -4865,6 +4943,7 @@
               </a:defRPr>
             </a:pPr>
             <a:r>
+              <a:rPr/>
               <a:t>🧩 Algoritma Nedir?</a:t>
             </a:r>
           </a:p>
@@ -4904,7 +4983,7 @@
           <a:noFill/>
         </p:spPr>
         <p:txBody>
-          <a:bodyPr wrap="square">
+          <a:bodyPr wrap="square" tIns="25400" bIns="25400" lIns="63500" rIns="63500">
             <a:spAutoFit/>
           </a:bodyPr>
           <a:lstStyle/>
@@ -4921,10 +5000,13 @@
           <a:p>
             <a:pPr>
               <a:lnSpc>
-                <a:spcPct val="90000"/>
-              </a:lnSpc>
-              <a:spcAft>
-                <a:spcPts val="300"/>
+                <a:spcPct val="85000"/>
+              </a:lnSpc>
+              <a:spcBef>
+                <a:spcPts val="200"/>
+              </a:spcBef>
+              <a:spcAft>
+                <a:spcPts val="200"/>
               </a:spcAft>
               <a:defRPr sz="1900"/>
             </a:pPr>
@@ -4947,10 +5029,13 @@
           <a:p>
             <a:pPr>
               <a:lnSpc>
-                <a:spcPct val="90000"/>
-              </a:lnSpc>
-              <a:spcAft>
-                <a:spcPts val="300"/>
+                <a:spcPct val="85000"/>
+              </a:lnSpc>
+              <a:spcBef>
+                <a:spcPts val="200"/>
+              </a:spcBef>
+              <a:spcAft>
+                <a:spcPts val="200"/>
               </a:spcAft>
               <a:defRPr sz="1900"/>
             </a:pPr>
@@ -4962,10 +5047,13 @@
           <a:p>
             <a:pPr lvl="1">
               <a:lnSpc>
-                <a:spcPct val="90000"/>
-              </a:lnSpc>
-              <a:spcAft>
-                <a:spcPts val="300"/>
+                <a:spcPct val="85000"/>
+              </a:lnSpc>
+              <a:spcBef>
+                <a:spcPts val="200"/>
+              </a:spcBef>
+              <a:spcAft>
+                <a:spcPts val="200"/>
               </a:spcAft>
               <a:defRPr sz="1700"/>
             </a:pPr>
@@ -4977,10 +5065,13 @@
           <a:p>
             <a:pPr lvl="1">
               <a:lnSpc>
-                <a:spcPct val="90000"/>
-              </a:lnSpc>
-              <a:spcAft>
-                <a:spcPts val="300"/>
+                <a:spcPct val="85000"/>
+              </a:lnSpc>
+              <a:spcBef>
+                <a:spcPts val="200"/>
+              </a:spcBef>
+              <a:spcAft>
+                <a:spcPts val="200"/>
               </a:spcAft>
               <a:defRPr sz="1700"/>
             </a:pPr>
@@ -4992,10 +5083,13 @@
           <a:p>
             <a:pPr lvl="1">
               <a:lnSpc>
-                <a:spcPct val="90000"/>
-              </a:lnSpc>
-              <a:spcAft>
-                <a:spcPts val="300"/>
+                <a:spcPct val="85000"/>
+              </a:lnSpc>
+              <a:spcBef>
+                <a:spcPts val="200"/>
+              </a:spcBef>
+              <a:spcAft>
+                <a:spcPts val="200"/>
               </a:spcAft>
               <a:defRPr sz="1700"/>
             </a:pPr>
@@ -5007,10 +5101,13 @@
           <a:p>
             <a:pPr lvl="1">
               <a:lnSpc>
-                <a:spcPct val="90000"/>
-              </a:lnSpc>
-              <a:spcAft>
-                <a:spcPts val="300"/>
+                <a:spcPct val="85000"/>
+              </a:lnSpc>
+              <a:spcBef>
+                <a:spcPts val="200"/>
+              </a:spcBef>
+              <a:spcAft>
+                <a:spcPts val="200"/>
               </a:spcAft>
               <a:defRPr sz="1700"/>
             </a:pPr>
@@ -5033,10 +5130,13 @@
           <a:p>
             <a:pPr>
               <a:lnSpc>
-                <a:spcPct val="90000"/>
-              </a:lnSpc>
-              <a:spcAft>
-                <a:spcPts val="300"/>
+                <a:spcPct val="85000"/>
+              </a:lnSpc>
+              <a:spcBef>
+                <a:spcPts val="200"/>
+              </a:spcBef>
+              <a:spcAft>
+                <a:spcPts val="200"/>
               </a:spcAft>
               <a:defRPr sz="1900"/>
             </a:pPr>
@@ -5059,10 +5159,13 @@
           <a:p>
             <a:pPr>
               <a:lnSpc>
-                <a:spcPct val="90000"/>
-              </a:lnSpc>
-              <a:spcAft>
-                <a:spcPts val="300"/>
+                <a:spcPct val="85000"/>
+              </a:lnSpc>
+              <a:spcBef>
+                <a:spcPts val="200"/>
+              </a:spcBef>
+              <a:spcAft>
+                <a:spcPts val="200"/>
               </a:spcAft>
               <a:defRPr sz="1900"/>
             </a:pPr>
@@ -5074,10 +5177,13 @@
           <a:p>
             <a:pPr>
               <a:lnSpc>
-                <a:spcPct val="90000"/>
-              </a:lnSpc>
-              <a:spcAft>
-                <a:spcPts val="300"/>
+                <a:spcPct val="85000"/>
+              </a:lnSpc>
+              <a:spcBef>
+                <a:spcPts val="200"/>
+              </a:spcBef>
+              <a:spcAft>
+                <a:spcPts val="200"/>
               </a:spcAft>
               <a:defRPr sz="1900"/>
             </a:pPr>
@@ -5089,10 +5195,13 @@
           <a:p>
             <a:pPr>
               <a:lnSpc>
-                <a:spcPct val="90000"/>
-              </a:lnSpc>
-              <a:spcAft>
-                <a:spcPts val="300"/>
+                <a:spcPct val="85000"/>
+              </a:lnSpc>
+              <a:spcBef>
+                <a:spcPts val="200"/>
+              </a:spcBef>
+              <a:spcAft>
+                <a:spcPts val="200"/>
               </a:spcAft>
               <a:defRPr sz="1900"/>
             </a:pPr>
@@ -5104,10 +5213,13 @@
           <a:p>
             <a:pPr>
               <a:lnSpc>
-                <a:spcPct val="90000"/>
-              </a:lnSpc>
-              <a:spcAft>
-                <a:spcPts val="300"/>
+                <a:spcPct val="85000"/>
+              </a:lnSpc>
+              <a:spcBef>
+                <a:spcPts val="200"/>
+              </a:spcBef>
+              <a:spcAft>
+                <a:spcPts val="200"/>
               </a:spcAft>
               <a:defRPr sz="1900"/>
             </a:pPr>
@@ -5119,10 +5231,13 @@
           <a:p>
             <a:pPr>
               <a:lnSpc>
-                <a:spcPct val="90000"/>
-              </a:lnSpc>
-              <a:spcAft>
-                <a:spcPts val="300"/>
+                <a:spcPct val="85000"/>
+              </a:lnSpc>
+              <a:spcBef>
+                <a:spcPts val="200"/>
+              </a:spcBef>
+              <a:spcAft>
+                <a:spcPts val="200"/>
               </a:spcAft>
               <a:defRPr sz="1900"/>
             </a:pPr>
@@ -5134,10 +5249,13 @@
           <a:p>
             <a:pPr>
               <a:lnSpc>
-                <a:spcPct val="90000"/>
-              </a:lnSpc>
-              <a:spcAft>
-                <a:spcPts val="300"/>
+                <a:spcPct val="85000"/>
+              </a:lnSpc>
+              <a:spcBef>
+                <a:spcPts val="200"/>
+              </a:spcBef>
+              <a:spcAft>
+                <a:spcPts val="200"/>
               </a:spcAft>
               <a:defRPr sz="1900"/>
             </a:pPr>
@@ -5149,10 +5267,13 @@
           <a:p>
             <a:pPr>
               <a:lnSpc>
-                <a:spcPct val="90000"/>
-              </a:lnSpc>
-              <a:spcAft>
-                <a:spcPts val="300"/>
+                <a:spcPct val="85000"/>
+              </a:lnSpc>
+              <a:spcBef>
+                <a:spcPts val="200"/>
+              </a:spcBef>
+              <a:spcAft>
+                <a:spcPts val="200"/>
               </a:spcAft>
               <a:defRPr sz="1900"/>
             </a:pPr>
@@ -5175,10 +5296,13 @@
           <a:p>
             <a:pPr>
               <a:lnSpc>
-                <a:spcPct val="90000"/>
-              </a:lnSpc>
-              <a:spcAft>
-                <a:spcPts val="300"/>
+                <a:spcPct val="85000"/>
+              </a:lnSpc>
+              <a:spcBef>
+                <a:spcPts val="200"/>
+              </a:spcBef>
+              <a:spcAft>
+                <a:spcPts val="200"/>
               </a:spcAft>
               <a:defRPr sz="1900"/>
             </a:pPr>
@@ -5190,10 +5314,13 @@
           <a:p>
             <a:pPr>
               <a:lnSpc>
-                <a:spcPct val="90000"/>
-              </a:lnSpc>
-              <a:spcAft>
-                <a:spcPts val="300"/>
+                <a:spcPct val="85000"/>
+              </a:lnSpc>
+              <a:spcBef>
+                <a:spcPts val="200"/>
+              </a:spcBef>
+              <a:spcAft>
+                <a:spcPts val="200"/>
               </a:spcAft>
               <a:defRPr sz="1900"/>
             </a:pPr>
@@ -5234,10 +5361,19 @@
         </p:nvSpPr>
         <p:spPr/>
         <p:txBody>
-          <a:bodyPr wrap="square"/>
+          <a:bodyPr wrap="square" tIns="25400" bIns="25400" lIns="63500" rIns="63500"/>
           <a:lstStyle/>
           <a:p>
             <a:pPr>
+              <a:lnSpc>
+                <a:spcPct val="85000"/>
+              </a:lnSpc>
+              <a:spcBef>
+                <a:spcPts val="200"/>
+              </a:spcBef>
+              <a:spcAft>
+                <a:spcPts val="200"/>
+              </a:spcAft>
               <a:defRPr sz="3800" b="1">
                 <a:solidFill>
                   <a:srgbClr val="764BA2"/>
@@ -5245,6 +5381,7 @@
               </a:defRPr>
             </a:pPr>
             <a:r>
+              <a:rPr/>
               <a:t>📊 Akış Diyagramı</a:t>
             </a:r>
           </a:p>
@@ -5284,7 +5421,7 @@
           <a:noFill/>
         </p:spPr>
         <p:txBody>
-          <a:bodyPr wrap="square">
+          <a:bodyPr wrap="square" tIns="25400" bIns="25400" lIns="63500" rIns="63500">
             <a:spAutoFit/>
           </a:bodyPr>
           <a:lstStyle/>
@@ -5301,6 +5438,24 @@
           <a:p>
             <a:pPr>
               <a:lnSpc>
+                <a:spcPct val="85000"/>
+              </a:lnSpc>
+              <a:spcBef>
+                <a:spcPts val="200"/>
+              </a:spcBef>
+              <a:spcAft>
+                <a:spcPts val="200"/>
+              </a:spcAft>
+              <a:defRPr sz="1900"/>
+            </a:pPr>
+            <a:r>
+              <a:rPr sz="1600"/>
+              <a:t>Akış diyagramı = Algoritmanın görsel hali</a:t>
+            </a:r>
+          </a:p>
+          <a:p>
+            <a:pPr>
+              <a:lnSpc>
                 <a:spcPct val="90000"/>
               </a:lnSpc>
               <a:spcAft>
@@ -5308,8 +5463,23 @@
               </a:spcAft>
               <a:defRPr sz="1900"/>
             </a:pPr>
-            <a:r>
-              <a:t>Akış diyagramı = Algoritmanın görsel hali</a:t>
+          </a:p>
+          <a:p>
+            <a:pPr>
+              <a:lnSpc>
+                <a:spcPct val="85000"/>
+              </a:lnSpc>
+              <a:spcBef>
+                <a:spcPts val="200"/>
+              </a:spcBef>
+              <a:spcAft>
+                <a:spcPts val="200"/>
+              </a:spcAft>
+              <a:defRPr sz="1900"/>
+            </a:pPr>
+            <a:r>
+              <a:rPr sz="1600"/>
+              <a:t>✅ Temel Semboller:</a:t>
             </a:r>
           </a:p>
           <a:p>
@@ -5326,6 +5496,96 @@
           <a:p>
             <a:pPr>
               <a:lnSpc>
+                <a:spcPct val="85000"/>
+              </a:lnSpc>
+              <a:spcBef>
+                <a:spcPts val="200"/>
+              </a:spcBef>
+              <a:spcAft>
+                <a:spcPts val="200"/>
+              </a:spcAft>
+              <a:defRPr sz="1900"/>
+            </a:pPr>
+            <a:r>
+              <a:rPr sz="1600"/>
+              <a:t>⭕ Oval: Başla/Bitir</a:t>
+            </a:r>
+          </a:p>
+          <a:p>
+            <a:pPr>
+              <a:lnSpc>
+                <a:spcPct val="85000"/>
+              </a:lnSpc>
+              <a:spcBef>
+                <a:spcPts val="200"/>
+              </a:spcBef>
+              <a:spcAft>
+                <a:spcPts val="200"/>
+              </a:spcAft>
+              <a:defRPr sz="1900"/>
+            </a:pPr>
+            <a:r>
+              <a:rPr sz="1600"/>
+              <a:t>▭ Dikdörtgen: İşlem</a:t>
+            </a:r>
+          </a:p>
+          <a:p>
+            <a:pPr>
+              <a:lnSpc>
+                <a:spcPct val="85000"/>
+              </a:lnSpc>
+              <a:spcBef>
+                <a:spcPts val="200"/>
+              </a:spcBef>
+              <a:spcAft>
+                <a:spcPts val="200"/>
+              </a:spcAft>
+              <a:defRPr sz="1900"/>
+            </a:pPr>
+            <a:r>
+              <a:rPr sz="1600"/>
+              <a:t>◇ Baklava: Karar (If)</a:t>
+            </a:r>
+          </a:p>
+          <a:p>
+            <a:pPr>
+              <a:lnSpc>
+                <a:spcPct val="85000"/>
+              </a:lnSpc>
+              <a:spcBef>
+                <a:spcPts val="200"/>
+              </a:spcBef>
+              <a:spcAft>
+                <a:spcPts val="200"/>
+              </a:spcAft>
+              <a:defRPr sz="1900"/>
+            </a:pPr>
+            <a:r>
+              <a:rPr sz="1600"/>
+              <a:t>⬜ Paralelkenar: Girdi/Çıktı</a:t>
+            </a:r>
+          </a:p>
+          <a:p>
+            <a:pPr>
+              <a:lnSpc>
+                <a:spcPct val="85000"/>
+              </a:lnSpc>
+              <a:spcBef>
+                <a:spcPts val="200"/>
+              </a:spcBef>
+              <a:spcAft>
+                <a:spcPts val="200"/>
+              </a:spcAft>
+              <a:defRPr sz="1900"/>
+            </a:pPr>
+            <a:r>
+              <a:rPr sz="1600"/>
+              <a:t>→ Ok: Akış yönü</a:t>
+            </a:r>
+          </a:p>
+          <a:p>
+            <a:pPr>
+              <a:lnSpc>
                 <a:spcPct val="90000"/>
               </a:lnSpc>
               <a:spcAft>
@@ -5333,8 +5593,23 @@
               </a:spcAft>
               <a:defRPr sz="1900"/>
             </a:pPr>
-            <a:r>
-              <a:t>✅ Temel Semboller:</a:t>
+          </a:p>
+          <a:p>
+            <a:pPr>
+              <a:lnSpc>
+                <a:spcPct val="85000"/>
+              </a:lnSpc>
+              <a:spcBef>
+                <a:spcPts val="200"/>
+              </a:spcBef>
+              <a:spcAft>
+                <a:spcPts val="200"/>
+              </a:spcAft>
+              <a:defRPr sz="1900"/>
+            </a:pPr>
+            <a:r>
+              <a:rPr sz="1600"/>
+              <a:t>📌 Örnek:</a:t>
             </a:r>
           </a:p>
           <a:p>
@@ -5351,6 +5626,168 @@
           <a:p>
             <a:pPr>
               <a:lnSpc>
+                <a:spcPct val="85000"/>
+              </a:lnSpc>
+              <a:spcBef>
+                <a:spcPts val="200"/>
+              </a:spcBef>
+              <a:spcAft>
+                <a:spcPts val="200"/>
+              </a:spcAft>
+              <a:defRPr sz="1900"/>
+            </a:pPr>
+            <a:r>
+              <a:rPr sz="1600"/>
+              <a:t>[Başla]</a:t>
+            </a:r>
+          </a:p>
+          <a:p>
+            <a:pPr lvl="1">
+              <a:lnSpc>
+                <a:spcPct val="85000"/>
+              </a:lnSpc>
+              <a:spcBef>
+                <a:spcPts val="200"/>
+              </a:spcBef>
+              <a:spcAft>
+                <a:spcPts val="200"/>
+              </a:spcAft>
+              <a:defRPr sz="1700"/>
+            </a:pPr>
+            <a:r>
+              <a:rPr sz="1600"/>
+              <a:t>    ↓</a:t>
+            </a:r>
+          </a:p>
+          <a:p>
+            <a:pPr>
+              <a:lnSpc>
+                <a:spcPct val="85000"/>
+              </a:lnSpc>
+              <a:spcBef>
+                <a:spcPts val="200"/>
+              </a:spcBef>
+              <a:spcAft>
+                <a:spcPts val="200"/>
+              </a:spcAft>
+              <a:defRPr sz="1900"/>
+            </a:pPr>
+            <a:r>
+              <a:rPr sz="1600"/>
+              <a:t>[Sayı Gir]</a:t>
+            </a:r>
+          </a:p>
+          <a:p>
+            <a:pPr lvl="1">
+              <a:lnSpc>
+                <a:spcPct val="85000"/>
+              </a:lnSpc>
+              <a:spcBef>
+                <a:spcPts val="200"/>
+              </a:spcBef>
+              <a:spcAft>
+                <a:spcPts val="200"/>
+              </a:spcAft>
+              <a:defRPr sz="1700"/>
+            </a:pPr>
+            <a:r>
+              <a:rPr sz="1600"/>
+              <a:t>    ↓</a:t>
+            </a:r>
+          </a:p>
+          <a:p>
+            <a:pPr>
+              <a:lnSpc>
+                <a:spcPct val="85000"/>
+              </a:lnSpc>
+              <a:spcBef>
+                <a:spcPts val="200"/>
+              </a:spcBef>
+              <a:spcAft>
+                <a:spcPts val="200"/>
+              </a:spcAft>
+              <a:defRPr sz="1900"/>
+            </a:pPr>
+            <a:r>
+              <a:rPr sz="1600"/>
+              <a:t>[Sayı&gt;0?]</a:t>
+            </a:r>
+          </a:p>
+          <a:p>
+            <a:pPr>
+              <a:lnSpc>
+                <a:spcPct val="85000"/>
+              </a:lnSpc>
+              <a:spcBef>
+                <a:spcPts val="200"/>
+              </a:spcBef>
+              <a:spcAft>
+                <a:spcPts val="200"/>
+              </a:spcAft>
+              <a:defRPr sz="1900"/>
+            </a:pPr>
+            <a:r>
+              <a:rPr sz="1600"/>
+              <a:t>  ↙    ↘</a:t>
+            </a:r>
+          </a:p>
+          <a:p>
+            <a:pPr>
+              <a:lnSpc>
+                <a:spcPct val="85000"/>
+              </a:lnSpc>
+              <a:spcBef>
+                <a:spcPts val="200"/>
+              </a:spcBef>
+              <a:spcAft>
+                <a:spcPts val="200"/>
+              </a:spcAft>
+              <a:defRPr sz="1900"/>
+            </a:pPr>
+            <a:r>
+              <a:rPr sz="1600"/>
+              <a:t>[Pozitif][Negatif]</a:t>
+            </a:r>
+          </a:p>
+          <a:p>
+            <a:pPr lvl="1">
+              <a:lnSpc>
+                <a:spcPct val="85000"/>
+              </a:lnSpc>
+              <a:spcBef>
+                <a:spcPts val="200"/>
+              </a:spcBef>
+              <a:spcAft>
+                <a:spcPts val="200"/>
+              </a:spcAft>
+              <a:defRPr sz="1700"/>
+            </a:pPr>
+            <a:r>
+              <a:rPr sz="1600"/>
+              <a:t>    ↓</a:t>
+            </a:r>
+          </a:p>
+          <a:p>
+            <a:pPr>
+              <a:lnSpc>
+                <a:spcPct val="85000"/>
+              </a:lnSpc>
+              <a:spcBef>
+                <a:spcPts val="200"/>
+              </a:spcBef>
+              <a:spcAft>
+                <a:spcPts val="200"/>
+              </a:spcAft>
+              <a:defRPr sz="1900"/>
+            </a:pPr>
+            <a:r>
+              <a:rPr sz="1600"/>
+              <a:t>[Bitir]</a:t>
+            </a:r>
+          </a:p>
+          <a:p>
+            <a:pPr>
+              <a:lnSpc>
                 <a:spcPct val="90000"/>
               </a:lnSpc>
               <a:spcAft>
@@ -5358,250 +5795,22 @@
               </a:spcAft>
               <a:defRPr sz="1900"/>
             </a:pPr>
-            <a:r>
-              <a:t>⭕ Oval: Başla/Bitir</a:t>
-            </a:r>
-          </a:p>
-          <a:p>
-            <a:pPr>
-              <a:lnSpc>
-                <a:spcPct val="90000"/>
-              </a:lnSpc>
-              <a:spcAft>
-                <a:spcPts val="300"/>
-              </a:spcAft>
-              <a:defRPr sz="1900"/>
-            </a:pPr>
-            <a:r>
-              <a:t>▭ Dikdörtgen: İşlem</a:t>
-            </a:r>
-          </a:p>
-          <a:p>
-            <a:pPr>
-              <a:lnSpc>
-                <a:spcPct val="90000"/>
-              </a:lnSpc>
-              <a:spcAft>
-                <a:spcPts val="300"/>
-              </a:spcAft>
-              <a:defRPr sz="1900"/>
-            </a:pPr>
-            <a:r>
-              <a:t>◇ Baklava: Karar (If)</a:t>
-            </a:r>
-          </a:p>
-          <a:p>
-            <a:pPr>
-              <a:lnSpc>
-                <a:spcPct val="90000"/>
-              </a:lnSpc>
-              <a:spcAft>
-                <a:spcPts val="300"/>
-              </a:spcAft>
-              <a:defRPr sz="1900"/>
-            </a:pPr>
-            <a:r>
-              <a:t>⬜ Paralelkenar: Girdi/Çıktı</a:t>
-            </a:r>
-          </a:p>
-          <a:p>
-            <a:pPr>
-              <a:lnSpc>
-                <a:spcPct val="90000"/>
-              </a:lnSpc>
-              <a:spcAft>
-                <a:spcPts val="300"/>
-              </a:spcAft>
-              <a:defRPr sz="1900"/>
-            </a:pPr>
-            <a:r>
-              <a:t>→ Ok: Akış yönü</a:t>
-            </a:r>
-          </a:p>
-          <a:p>
-            <a:pPr>
-              <a:lnSpc>
-                <a:spcPct val="90000"/>
-              </a:lnSpc>
-              <a:spcAft>
-                <a:spcPts val="300"/>
-              </a:spcAft>
-              <a:defRPr sz="1900"/>
-            </a:pPr>
-          </a:p>
-          <a:p>
-            <a:pPr>
-              <a:lnSpc>
-                <a:spcPct val="90000"/>
-              </a:lnSpc>
-              <a:spcAft>
-                <a:spcPts val="300"/>
-              </a:spcAft>
-              <a:defRPr sz="1900"/>
-            </a:pPr>
-            <a:r>
-              <a:t>📌 Örnek:</a:t>
-            </a:r>
-          </a:p>
-          <a:p>
-            <a:pPr>
-              <a:lnSpc>
-                <a:spcPct val="90000"/>
-              </a:lnSpc>
-              <a:spcAft>
-                <a:spcPts val="300"/>
-              </a:spcAft>
-              <a:defRPr sz="1900"/>
-            </a:pPr>
-          </a:p>
-          <a:p>
-            <a:pPr>
-              <a:lnSpc>
-                <a:spcPct val="90000"/>
-              </a:lnSpc>
-              <a:spcAft>
-                <a:spcPts val="300"/>
-              </a:spcAft>
-              <a:defRPr sz="1900"/>
-            </a:pPr>
-            <a:r>
-              <a:t>[Başla]</a:t>
-            </a:r>
-          </a:p>
-          <a:p>
-            <a:pPr lvl="1">
-              <a:lnSpc>
-                <a:spcPct val="90000"/>
-              </a:lnSpc>
-              <a:spcAft>
-                <a:spcPts val="300"/>
-              </a:spcAft>
-              <a:defRPr sz="1700"/>
-            </a:pPr>
-            <a:r>
-              <a:t>    ↓</a:t>
-            </a:r>
-          </a:p>
-          <a:p>
-            <a:pPr>
-              <a:lnSpc>
-                <a:spcPct val="90000"/>
-              </a:lnSpc>
-              <a:spcAft>
-                <a:spcPts val="300"/>
-              </a:spcAft>
-              <a:defRPr sz="1900"/>
-            </a:pPr>
-            <a:r>
-              <a:t>[Sayı Gir]</a:t>
-            </a:r>
-          </a:p>
-          <a:p>
-            <a:pPr lvl="1">
-              <a:lnSpc>
-                <a:spcPct val="90000"/>
-              </a:lnSpc>
-              <a:spcAft>
-                <a:spcPts val="300"/>
-              </a:spcAft>
-              <a:defRPr sz="1700"/>
-            </a:pPr>
-            <a:r>
-              <a:t>    ↓</a:t>
-            </a:r>
-          </a:p>
-          <a:p>
-            <a:pPr>
-              <a:lnSpc>
-                <a:spcPct val="90000"/>
-              </a:lnSpc>
-              <a:spcAft>
-                <a:spcPts val="300"/>
-              </a:spcAft>
-              <a:defRPr sz="1900"/>
-            </a:pPr>
-            <a:r>
-              <a:t>[Sayı&gt;0?]</a:t>
-            </a:r>
-          </a:p>
-          <a:p>
-            <a:pPr>
-              <a:lnSpc>
-                <a:spcPct val="90000"/>
-              </a:lnSpc>
-              <a:spcAft>
-                <a:spcPts val="300"/>
-              </a:spcAft>
-              <a:defRPr sz="1900"/>
-            </a:pPr>
-            <a:r>
-              <a:t>  ↙    ↘</a:t>
-            </a:r>
-          </a:p>
-          <a:p>
-            <a:pPr>
-              <a:lnSpc>
-                <a:spcPct val="90000"/>
-              </a:lnSpc>
-              <a:spcAft>
-                <a:spcPts val="300"/>
-              </a:spcAft>
-              <a:defRPr sz="1900"/>
-            </a:pPr>
-            <a:r>
-              <a:t>[Pozitif][Negatif]</a:t>
-            </a:r>
-          </a:p>
-          <a:p>
-            <a:pPr lvl="1">
-              <a:lnSpc>
-                <a:spcPct val="90000"/>
-              </a:lnSpc>
-              <a:spcAft>
-                <a:spcPts val="300"/>
-              </a:spcAft>
-              <a:defRPr sz="1700"/>
-            </a:pPr>
-            <a:r>
-              <a:t>    ↓</a:t>
-            </a:r>
-          </a:p>
-          <a:p>
-            <a:pPr>
-              <a:lnSpc>
-                <a:spcPct val="90000"/>
-              </a:lnSpc>
-              <a:spcAft>
-                <a:spcPts val="300"/>
-              </a:spcAft>
-              <a:defRPr sz="1900"/>
-            </a:pPr>
-            <a:r>
-              <a:t>[Bitir]</a:t>
-            </a:r>
-          </a:p>
-          <a:p>
-            <a:pPr>
-              <a:lnSpc>
-                <a:spcPct val="90000"/>
-              </a:lnSpc>
-              <a:spcAft>
-                <a:spcPts val="300"/>
-              </a:spcAft>
-              <a:defRPr sz="1900"/>
-            </a:pPr>
-          </a:p>
-          <a:p>
-            <a:pPr>
-              <a:lnSpc>
-                <a:spcPct val="90000"/>
-              </a:lnSpc>
-              <a:spcAft>
-                <a:spcPts val="300"/>
-              </a:spcAft>
-              <a:defRPr sz="1900"/>
-            </a:pPr>
-            <a:r>
+          </a:p>
+          <a:p>
+            <a:pPr>
+              <a:lnSpc>
+                <a:spcPct val="85000"/>
+              </a:lnSpc>
+              <a:spcBef>
+                <a:spcPts val="200"/>
+              </a:spcBef>
+              <a:spcAft>
+                <a:spcPts val="200"/>
+              </a:spcAft>
+              <a:defRPr sz="1900"/>
+            </a:pPr>
+            <a:r>
+              <a:rPr sz="1600"/>
               <a:t>💡 Akış diyagramı kod yazmadan önce kullanılır</a:t>
             </a:r>
           </a:p>
@@ -5637,10 +5846,19 @@
         </p:nvSpPr>
         <p:spPr/>
         <p:txBody>
-          <a:bodyPr wrap="square"/>
+          <a:bodyPr wrap="square" tIns="25400" bIns="25400" lIns="63500" rIns="63500"/>
           <a:lstStyle/>
           <a:p>
             <a:pPr>
+              <a:lnSpc>
+                <a:spcPct val="85000"/>
+              </a:lnSpc>
+              <a:spcBef>
+                <a:spcPts val="200"/>
+              </a:spcBef>
+              <a:spcAft>
+                <a:spcPts val="200"/>
+              </a:spcAft>
               <a:defRPr sz="3800" b="1">
                 <a:solidFill>
                   <a:srgbClr val="764BA2"/>
@@ -5648,6 +5866,7 @@
               </a:defRPr>
             </a:pPr>
             <a:r>
+              <a:rPr/>
               <a:t>🔀 Seçimli Yapılar</a:t>
             </a:r>
           </a:p>
@@ -5687,7 +5906,7 @@
           <a:noFill/>
         </p:spPr>
         <p:txBody>
-          <a:bodyPr wrap="square">
+          <a:bodyPr wrap="square" tIns="25400" bIns="25400" lIns="63500" rIns="63500">
             <a:spAutoFit/>
           </a:bodyPr>
           <a:lstStyle/>
@@ -5704,6 +5923,24 @@
           <a:p>
             <a:pPr>
               <a:lnSpc>
+                <a:spcPct val="85000"/>
+              </a:lnSpc>
+              <a:spcBef>
+                <a:spcPts val="200"/>
+              </a:spcBef>
+              <a:spcAft>
+                <a:spcPts val="200"/>
+              </a:spcAft>
+              <a:defRPr sz="1900"/>
+            </a:pPr>
+            <a:r>
+              <a:rPr sz="1600"/>
+              <a:t>Karar verme yapıları</a:t>
+            </a:r>
+          </a:p>
+          <a:p>
+            <a:pPr>
+              <a:lnSpc>
                 <a:spcPct val="90000"/>
               </a:lnSpc>
               <a:spcAft>
@@ -5711,8 +5948,41 @@
               </a:spcAft>
               <a:defRPr sz="1900"/>
             </a:pPr>
-            <a:r>
-              <a:t>Karar verme yapıları</a:t>
+          </a:p>
+          <a:p>
+            <a:pPr>
+              <a:lnSpc>
+                <a:spcPct val="85000"/>
+              </a:lnSpc>
+              <a:spcBef>
+                <a:spcPts val="200"/>
+              </a:spcBef>
+              <a:spcAft>
+                <a:spcPts val="200"/>
+              </a:spcAft>
+              <a:defRPr sz="1900"/>
+            </a:pPr>
+            <a:r>
+              <a:rPr sz="1600"/>
+              <a:t>✅ If (Eğer):</a:t>
+            </a:r>
+          </a:p>
+          <a:p>
+            <a:pPr lvl="1">
+              <a:lnSpc>
+                <a:spcPct val="85000"/>
+              </a:lnSpc>
+              <a:spcBef>
+                <a:spcPts val="200"/>
+              </a:spcBef>
+              <a:spcAft>
+                <a:spcPts val="200"/>
+              </a:spcAft>
+              <a:defRPr sz="1700"/>
+            </a:pPr>
+            <a:r>
+              <a:rPr sz="1600"/>
+              <a:t>    • Koşul doğruysa yap</a:t>
             </a:r>
           </a:p>
           <a:p>
@@ -5729,6 +5999,60 @@
           <a:p>
             <a:pPr>
               <a:lnSpc>
+                <a:spcPct val="85000"/>
+              </a:lnSpc>
+              <a:spcBef>
+                <a:spcPts val="200"/>
+              </a:spcBef>
+              <a:spcAft>
+                <a:spcPts val="200"/>
+              </a:spcAft>
+              <a:defRPr sz="1900"/>
+            </a:pPr>
+            <a:r>
+              <a:rPr sz="1600"/>
+              <a:t>✅ If-Else (Değilse):</a:t>
+            </a:r>
+          </a:p>
+          <a:p>
+            <a:pPr lvl="1">
+              <a:lnSpc>
+                <a:spcPct val="85000"/>
+              </a:lnSpc>
+              <a:spcBef>
+                <a:spcPts val="200"/>
+              </a:spcBef>
+              <a:spcAft>
+                <a:spcPts val="200"/>
+              </a:spcAft>
+              <a:defRPr sz="1700"/>
+            </a:pPr>
+            <a:r>
+              <a:rPr sz="1600"/>
+              <a:t>    • Doğruysa A yap</a:t>
+            </a:r>
+          </a:p>
+          <a:p>
+            <a:pPr lvl="1">
+              <a:lnSpc>
+                <a:spcPct val="85000"/>
+              </a:lnSpc>
+              <a:spcBef>
+                <a:spcPts val="200"/>
+              </a:spcBef>
+              <a:spcAft>
+                <a:spcPts val="200"/>
+              </a:spcAft>
+              <a:defRPr sz="1700"/>
+            </a:pPr>
+            <a:r>
+              <a:rPr sz="1600"/>
+              <a:t>    • Yanlışsa B yap</a:t>
+            </a:r>
+          </a:p>
+          <a:p>
+            <a:pPr>
+              <a:lnSpc>
                 <a:spcPct val="90000"/>
               </a:lnSpc>
               <a:spcAft>
@@ -5736,22 +6060,207 @@
               </a:spcAft>
               <a:defRPr sz="1900"/>
             </a:pPr>
-            <a:r>
-              <a:t>✅ If (Eğer):</a:t>
+          </a:p>
+          <a:p>
+            <a:pPr>
+              <a:lnSpc>
+                <a:spcPct val="85000"/>
+              </a:lnSpc>
+              <a:spcBef>
+                <a:spcPts val="200"/>
+              </a:spcBef>
+              <a:spcAft>
+                <a:spcPts val="200"/>
+              </a:spcAft>
+              <a:defRPr sz="1900"/>
+            </a:pPr>
+            <a:r>
+              <a:rPr sz="1600"/>
+              <a:t>📌 Örnek: Sınav Geçme</a:t>
+            </a:r>
+          </a:p>
+          <a:p>
+            <a:pPr>
+              <a:lnSpc>
+                <a:spcPct val="90000"/>
+              </a:lnSpc>
+              <a:spcAft>
+                <a:spcPts val="300"/>
+              </a:spcAft>
+              <a:defRPr sz="1900"/>
+            </a:pPr>
+          </a:p>
+          <a:p>
+            <a:pPr>
+              <a:lnSpc>
+                <a:spcPct val="85000"/>
+              </a:lnSpc>
+              <a:spcBef>
+                <a:spcPts val="200"/>
+              </a:spcBef>
+              <a:spcAft>
+                <a:spcPts val="200"/>
+              </a:spcAft>
+              <a:defRPr sz="1900"/>
+            </a:pPr>
+            <a:r>
+              <a:rPr sz="1600"/>
+              <a:t>Eğer not &gt;= 50 ise:</a:t>
             </a:r>
           </a:p>
           <a:p>
             <a:pPr lvl="1">
               <a:lnSpc>
+                <a:spcPct val="85000"/>
+              </a:lnSpc>
+              <a:spcBef>
+                <a:spcPts val="200"/>
+              </a:spcBef>
+              <a:spcAft>
+                <a:spcPts val="200"/>
+              </a:spcAft>
+              <a:defRPr sz="1700"/>
+            </a:pPr>
+            <a:r>
+              <a:rPr sz="1600"/>
+              <a:t>    Geçti yaz</a:t>
+            </a:r>
+          </a:p>
+          <a:p>
+            <a:pPr>
+              <a:lnSpc>
+                <a:spcPct val="85000"/>
+              </a:lnSpc>
+              <a:spcBef>
+                <a:spcPts val="200"/>
+              </a:spcBef>
+              <a:spcAft>
+                <a:spcPts val="200"/>
+              </a:spcAft>
+              <a:defRPr sz="1900"/>
+            </a:pPr>
+            <a:r>
+              <a:rPr sz="1600"/>
+              <a:t>Değilse:</a:t>
+            </a:r>
+          </a:p>
+          <a:p>
+            <a:pPr lvl="1">
+              <a:lnSpc>
+                <a:spcPct val="85000"/>
+              </a:lnSpc>
+              <a:spcBef>
+                <a:spcPts val="200"/>
+              </a:spcBef>
+              <a:spcAft>
+                <a:spcPts val="200"/>
+              </a:spcAft>
+              <a:defRPr sz="1700"/>
+            </a:pPr>
+            <a:r>
+              <a:rPr sz="1600"/>
+              <a:t>    Kaldı yaz</a:t>
+            </a:r>
+          </a:p>
+          <a:p>
+            <a:pPr>
+              <a:lnSpc>
                 <a:spcPct val="90000"/>
               </a:lnSpc>
               <a:spcAft>
                 <a:spcPts val="300"/>
               </a:spcAft>
+              <a:defRPr sz="1900"/>
+            </a:pPr>
+          </a:p>
+          <a:p>
+            <a:pPr>
+              <a:lnSpc>
+                <a:spcPct val="85000"/>
+              </a:lnSpc>
+              <a:spcBef>
+                <a:spcPts val="200"/>
+              </a:spcBef>
+              <a:spcAft>
+                <a:spcPts val="200"/>
+              </a:spcAft>
+              <a:defRPr sz="1900"/>
+            </a:pPr>
+            <a:r>
+              <a:rPr sz="1600"/>
+              <a:t>💡 Günlük Hayat:</a:t>
+            </a:r>
+          </a:p>
+          <a:p>
+            <a:pPr>
+              <a:lnSpc>
+                <a:spcPct val="85000"/>
+              </a:lnSpc>
+              <a:spcBef>
+                <a:spcPts val="200"/>
+              </a:spcBef>
+              <a:spcAft>
+                <a:spcPts val="200"/>
+              </a:spcAft>
+              <a:defRPr sz="1900"/>
+            </a:pPr>
+            <a:r>
+              <a:rPr sz="1600"/>
+              <a:t>Eğer yağmur yağıyorsa:</a:t>
+            </a:r>
+          </a:p>
+          <a:p>
+            <a:pPr lvl="1">
+              <a:lnSpc>
+                <a:spcPct val="85000"/>
+              </a:lnSpc>
+              <a:spcBef>
+                <a:spcPts val="200"/>
+              </a:spcBef>
+              <a:spcAft>
+                <a:spcPts val="200"/>
+              </a:spcAft>
               <a:defRPr sz="1700"/>
             </a:pPr>
             <a:r>
-              <a:t>    • Koşul doğruysa yap</a:t>
+              <a:rPr sz="1600"/>
+              <a:t>    Şemsiye al</a:t>
+            </a:r>
+          </a:p>
+          <a:p>
+            <a:pPr>
+              <a:lnSpc>
+                <a:spcPct val="85000"/>
+              </a:lnSpc>
+              <a:spcBef>
+                <a:spcPts val="200"/>
+              </a:spcBef>
+              <a:spcAft>
+                <a:spcPts val="200"/>
+              </a:spcAft>
+              <a:defRPr sz="1900"/>
+            </a:pPr>
+            <a:r>
+              <a:rPr sz="1600"/>
+              <a:t>Değilse:</a:t>
+            </a:r>
+          </a:p>
+          <a:p>
+            <a:pPr lvl="1">
+              <a:lnSpc>
+                <a:spcPct val="85000"/>
+              </a:lnSpc>
+              <a:spcBef>
+                <a:spcPts val="200"/>
+              </a:spcBef>
+              <a:spcAft>
+                <a:spcPts val="200"/>
+              </a:spcAft>
+              <a:defRPr sz="1700"/>
+            </a:pPr>
+            <a:r>
+              <a:rPr sz="1600"/>
+              <a:t>    Şemsiye alma</a:t>
             </a:r>
           </a:p>
           <a:p>
@@ -5768,240 +6277,18 @@
           <a:p>
             <a:pPr>
               <a:lnSpc>
-                <a:spcPct val="90000"/>
-              </a:lnSpc>
-              <a:spcAft>
-                <a:spcPts val="300"/>
-              </a:spcAft>
-              <a:defRPr sz="1900"/>
-            </a:pPr>
-            <a:r>
-              <a:t>✅ If-Else (Değilse):</a:t>
-            </a:r>
-          </a:p>
-          <a:p>
-            <a:pPr lvl="1">
-              <a:lnSpc>
-                <a:spcPct val="90000"/>
-              </a:lnSpc>
-              <a:spcAft>
-                <a:spcPts val="300"/>
-              </a:spcAft>
-              <a:defRPr sz="1700"/>
-            </a:pPr>
-            <a:r>
-              <a:t>    • Doğruysa A yap</a:t>
-            </a:r>
-          </a:p>
-          <a:p>
-            <a:pPr lvl="1">
-              <a:lnSpc>
-                <a:spcPct val="90000"/>
-              </a:lnSpc>
-              <a:spcAft>
-                <a:spcPts val="300"/>
-              </a:spcAft>
-              <a:defRPr sz="1700"/>
-            </a:pPr>
-            <a:r>
-              <a:t>    • Yanlışsa B yap</a:t>
-            </a:r>
-          </a:p>
-          <a:p>
-            <a:pPr>
-              <a:lnSpc>
-                <a:spcPct val="90000"/>
-              </a:lnSpc>
-              <a:spcAft>
-                <a:spcPts val="300"/>
-              </a:spcAft>
-              <a:defRPr sz="1900"/>
-            </a:pPr>
-          </a:p>
-          <a:p>
-            <a:pPr>
-              <a:lnSpc>
-                <a:spcPct val="90000"/>
-              </a:lnSpc>
-              <a:spcAft>
-                <a:spcPts val="300"/>
-              </a:spcAft>
-              <a:defRPr sz="1900"/>
-            </a:pPr>
-            <a:r>
-              <a:t>📌 Örnek: Sınav Geçme</a:t>
-            </a:r>
-          </a:p>
-          <a:p>
-            <a:pPr>
-              <a:lnSpc>
-                <a:spcPct val="90000"/>
-              </a:lnSpc>
-              <a:spcAft>
-                <a:spcPts val="300"/>
-              </a:spcAft>
-              <a:defRPr sz="1900"/>
-            </a:pPr>
-          </a:p>
-          <a:p>
-            <a:pPr>
-              <a:lnSpc>
-                <a:spcPct val="90000"/>
-              </a:lnSpc>
-              <a:spcAft>
-                <a:spcPts val="300"/>
-              </a:spcAft>
-              <a:defRPr sz="1900"/>
-            </a:pPr>
-            <a:r>
-              <a:t>Eğer not &gt;= 50 ise:</a:t>
-            </a:r>
-          </a:p>
-          <a:p>
-            <a:pPr lvl="1">
-              <a:lnSpc>
-                <a:spcPct val="90000"/>
-              </a:lnSpc>
-              <a:spcAft>
-                <a:spcPts val="300"/>
-              </a:spcAft>
-              <a:defRPr sz="1700"/>
-            </a:pPr>
-            <a:r>
-              <a:t>    Geçti yaz</a:t>
-            </a:r>
-          </a:p>
-          <a:p>
-            <a:pPr>
-              <a:lnSpc>
-                <a:spcPct val="90000"/>
-              </a:lnSpc>
-              <a:spcAft>
-                <a:spcPts val="300"/>
-              </a:spcAft>
-              <a:defRPr sz="1900"/>
-            </a:pPr>
-            <a:r>
-              <a:t>Değilse:</a:t>
-            </a:r>
-          </a:p>
-          <a:p>
-            <a:pPr lvl="1">
-              <a:lnSpc>
-                <a:spcPct val="90000"/>
-              </a:lnSpc>
-              <a:spcAft>
-                <a:spcPts val="300"/>
-              </a:spcAft>
-              <a:defRPr sz="1700"/>
-            </a:pPr>
-            <a:r>
-              <a:t>    Kaldı yaz</a:t>
-            </a:r>
-          </a:p>
-          <a:p>
-            <a:pPr>
-              <a:lnSpc>
-                <a:spcPct val="90000"/>
-              </a:lnSpc>
-              <a:spcAft>
-                <a:spcPts val="300"/>
-              </a:spcAft>
-              <a:defRPr sz="1900"/>
-            </a:pPr>
-          </a:p>
-          <a:p>
-            <a:pPr>
-              <a:lnSpc>
-                <a:spcPct val="90000"/>
-              </a:lnSpc>
-              <a:spcAft>
-                <a:spcPts val="300"/>
-              </a:spcAft>
-              <a:defRPr sz="1900"/>
-            </a:pPr>
-            <a:r>
-              <a:t>💡 Günlük Hayat:</a:t>
-            </a:r>
-          </a:p>
-          <a:p>
-            <a:pPr>
-              <a:lnSpc>
-                <a:spcPct val="90000"/>
-              </a:lnSpc>
-              <a:spcAft>
-                <a:spcPts val="300"/>
-              </a:spcAft>
-              <a:defRPr sz="1900"/>
-            </a:pPr>
-            <a:r>
-              <a:t>Eğer yağmur yağıyorsa:</a:t>
-            </a:r>
-          </a:p>
-          <a:p>
-            <a:pPr lvl="1">
-              <a:lnSpc>
-                <a:spcPct val="90000"/>
-              </a:lnSpc>
-              <a:spcAft>
-                <a:spcPts val="300"/>
-              </a:spcAft>
-              <a:defRPr sz="1700"/>
-            </a:pPr>
-            <a:r>
-              <a:t>    Şemsiye al</a:t>
-            </a:r>
-          </a:p>
-          <a:p>
-            <a:pPr>
-              <a:lnSpc>
-                <a:spcPct val="90000"/>
-              </a:lnSpc>
-              <a:spcAft>
-                <a:spcPts val="300"/>
-              </a:spcAft>
-              <a:defRPr sz="1900"/>
-            </a:pPr>
-            <a:r>
-              <a:t>Değilse:</a:t>
-            </a:r>
-          </a:p>
-          <a:p>
-            <a:pPr lvl="1">
-              <a:lnSpc>
-                <a:spcPct val="90000"/>
-              </a:lnSpc>
-              <a:spcAft>
-                <a:spcPts val="300"/>
-              </a:spcAft>
-              <a:defRPr sz="1700"/>
-            </a:pPr>
-            <a:r>
-              <a:t>    Şemsiye alma</a:t>
-            </a:r>
-          </a:p>
-          <a:p>
-            <a:pPr>
-              <a:lnSpc>
-                <a:spcPct val="90000"/>
-              </a:lnSpc>
-              <a:spcAft>
-                <a:spcPts val="300"/>
-              </a:spcAft>
-              <a:defRPr sz="1900"/>
-            </a:pPr>
-          </a:p>
-          <a:p>
-            <a:pPr>
-              <a:lnSpc>
-                <a:spcPct val="90000"/>
-              </a:lnSpc>
-              <a:spcAft>
-                <a:spcPts val="300"/>
-              </a:spcAft>
-              <a:defRPr sz="1900"/>
-            </a:pPr>
-            <a:r>
+                <a:spcPct val="85000"/>
+              </a:lnSpc>
+              <a:spcBef>
+                <a:spcPts val="200"/>
+              </a:spcBef>
+              <a:spcAft>
+                <a:spcPts val="200"/>
+              </a:spcAft>
+              <a:defRPr sz="1900"/>
+            </a:pPr>
+            <a:r>
+              <a:rPr sz="1600"/>
               <a:t>🎯 Her karar bir seçimli yapıdır!</a:t>
             </a:r>
           </a:p>
@@ -6037,10 +6324,19 @@
         </p:nvSpPr>
         <p:spPr/>
         <p:txBody>
-          <a:bodyPr wrap="square"/>
+          <a:bodyPr wrap="square" tIns="25400" bIns="25400" lIns="63500" rIns="63500"/>
           <a:lstStyle/>
           <a:p>
             <a:pPr>
+              <a:lnSpc>
+                <a:spcPct val="85000"/>
+              </a:lnSpc>
+              <a:spcBef>
+                <a:spcPts val="200"/>
+              </a:spcBef>
+              <a:spcAft>
+                <a:spcPts val="200"/>
+              </a:spcAft>
               <a:defRPr sz="3800" b="1">
                 <a:solidFill>
                   <a:srgbClr val="764BA2"/>
@@ -6048,6 +6344,7 @@
               </a:defRPr>
             </a:pPr>
             <a:r>
+              <a:rPr/>
               <a:t>🔁 Döngüler</a:t>
             </a:r>
           </a:p>
@@ -6087,7 +6384,7 @@
           <a:noFill/>
         </p:spPr>
         <p:txBody>
-          <a:bodyPr wrap="square">
+          <a:bodyPr wrap="square" tIns="25400" bIns="25400" lIns="63500" rIns="63500">
             <a:spAutoFit/>
           </a:bodyPr>
           <a:lstStyle/>
@@ -6104,10 +6401,13 @@
           <a:p>
             <a:pPr>
               <a:lnSpc>
-                <a:spcPct val="90000"/>
-              </a:lnSpc>
-              <a:spcAft>
-                <a:spcPts val="300"/>
+                <a:spcPct val="85000"/>
+              </a:lnSpc>
+              <a:spcBef>
+                <a:spcPts val="200"/>
+              </a:spcBef>
+              <a:spcAft>
+                <a:spcPts val="200"/>
               </a:spcAft>
               <a:defRPr sz="1900"/>
             </a:pPr>
@@ -6130,10 +6430,13 @@
           <a:p>
             <a:pPr>
               <a:lnSpc>
-                <a:spcPct val="90000"/>
-              </a:lnSpc>
-              <a:spcAft>
-                <a:spcPts val="300"/>
+                <a:spcPct val="85000"/>
+              </a:lnSpc>
+              <a:spcBef>
+                <a:spcPts val="200"/>
+              </a:spcBef>
+              <a:spcAft>
+                <a:spcPts val="200"/>
               </a:spcAft>
               <a:defRPr sz="1900"/>
             </a:pPr>
@@ -6156,10 +6459,13 @@
           <a:p>
             <a:pPr>
               <a:lnSpc>
-                <a:spcPct val="90000"/>
-              </a:lnSpc>
-              <a:spcAft>
-                <a:spcPts val="300"/>
+                <a:spcPct val="85000"/>
+              </a:lnSpc>
+              <a:spcBef>
+                <a:spcPts val="200"/>
+              </a:spcBef>
+              <a:spcAft>
+                <a:spcPts val="200"/>
               </a:spcAft>
               <a:defRPr sz="1900"/>
             </a:pPr>
@@ -6171,10 +6477,13 @@
           <a:p>
             <a:pPr lvl="1">
               <a:lnSpc>
-                <a:spcPct val="90000"/>
-              </a:lnSpc>
-              <a:spcAft>
-                <a:spcPts val="300"/>
+                <a:spcPct val="85000"/>
+              </a:lnSpc>
+              <a:spcBef>
+                <a:spcPts val="200"/>
+              </a:spcBef>
+              <a:spcAft>
+                <a:spcPts val="200"/>
               </a:spcAft>
               <a:defRPr sz="1700"/>
             </a:pPr>
@@ -6186,10 +6495,13 @@
           <a:p>
             <a:pPr lvl="1">
               <a:lnSpc>
-                <a:spcPct val="90000"/>
-              </a:lnSpc>
-              <a:spcAft>
-                <a:spcPts val="300"/>
+                <a:spcPct val="85000"/>
+              </a:lnSpc>
+              <a:spcBef>
+                <a:spcPts val="200"/>
+              </a:spcBef>
+              <a:spcAft>
+                <a:spcPts val="200"/>
               </a:spcAft>
               <a:defRPr sz="1700"/>
             </a:pPr>
@@ -6212,10 +6524,13 @@
           <a:p>
             <a:pPr>
               <a:lnSpc>
-                <a:spcPct val="90000"/>
-              </a:lnSpc>
-              <a:spcAft>
-                <a:spcPts val="300"/>
+                <a:spcPct val="85000"/>
+              </a:lnSpc>
+              <a:spcBef>
+                <a:spcPts val="200"/>
+              </a:spcBef>
+              <a:spcAft>
+                <a:spcPts val="200"/>
               </a:spcAft>
               <a:defRPr sz="1900"/>
             </a:pPr>
@@ -6227,10 +6542,13 @@
           <a:p>
             <a:pPr lvl="1">
               <a:lnSpc>
-                <a:spcPct val="90000"/>
-              </a:lnSpc>
-              <a:spcAft>
-                <a:spcPts val="300"/>
+                <a:spcPct val="85000"/>
+              </a:lnSpc>
+              <a:spcBef>
+                <a:spcPts val="200"/>
+              </a:spcBef>
+              <a:spcAft>
+                <a:spcPts val="200"/>
               </a:spcAft>
               <a:defRPr sz="1700"/>
             </a:pPr>
@@ -6242,10 +6560,13 @@
           <a:p>
             <a:pPr lvl="1">
               <a:lnSpc>
-                <a:spcPct val="90000"/>
-              </a:lnSpc>
-              <a:spcAft>
-                <a:spcPts val="300"/>
+                <a:spcPct val="85000"/>
+              </a:lnSpc>
+              <a:spcBef>
+                <a:spcPts val="200"/>
+              </a:spcBef>
+              <a:spcAft>
+                <a:spcPts val="200"/>
               </a:spcAft>
               <a:defRPr sz="1700"/>
             </a:pPr>
@@ -6268,10 +6589,13 @@
           <a:p>
             <a:pPr>
               <a:lnSpc>
-                <a:spcPct val="90000"/>
-              </a:lnSpc>
-              <a:spcAft>
-                <a:spcPts val="300"/>
+                <a:spcPct val="85000"/>
+              </a:lnSpc>
+              <a:spcBef>
+                <a:spcPts val="200"/>
+              </a:spcBef>
+              <a:spcAft>
+                <a:spcPts val="200"/>
               </a:spcAft>
               <a:defRPr sz="1900"/>
             </a:pPr>
@@ -6294,10 +6618,13 @@
           <a:p>
             <a:pPr>
               <a:lnSpc>
-                <a:spcPct val="90000"/>
-              </a:lnSpc>
-              <a:spcAft>
-                <a:spcPts val="300"/>
+                <a:spcPct val="85000"/>
+              </a:lnSpc>
+              <a:spcBef>
+                <a:spcPts val="200"/>
+              </a:spcBef>
+              <a:spcAft>
+                <a:spcPts val="200"/>
               </a:spcAft>
               <a:defRPr sz="1900"/>
             </a:pPr>
@@ -6309,10 +6636,13 @@
           <a:p>
             <a:pPr>
               <a:lnSpc>
-                <a:spcPct val="90000"/>
-              </a:lnSpc>
-              <a:spcAft>
-                <a:spcPts val="300"/>
+                <a:spcPct val="85000"/>
+              </a:lnSpc>
+              <a:spcBef>
+                <a:spcPts val="200"/>
+              </a:spcBef>
+              <a:spcAft>
+                <a:spcPts val="200"/>
               </a:spcAft>
               <a:defRPr sz="1900"/>
             </a:pPr>
@@ -6324,10 +6654,13 @@
           <a:p>
             <a:pPr lvl="1">
               <a:lnSpc>
-                <a:spcPct val="90000"/>
-              </a:lnSpc>
-              <a:spcAft>
-                <a:spcPts val="300"/>
+                <a:spcPct val="85000"/>
+              </a:lnSpc>
+              <a:spcBef>
+                <a:spcPts val="200"/>
+              </a:spcBef>
+              <a:spcAft>
+                <a:spcPts val="200"/>
               </a:spcAft>
               <a:defRPr sz="1700"/>
             </a:pPr>
@@ -6339,10 +6672,13 @@
           <a:p>
             <a:pPr lvl="1">
               <a:lnSpc>
-                <a:spcPct val="90000"/>
-              </a:lnSpc>
-              <a:spcAft>
-                <a:spcPts val="300"/>
+                <a:spcPct val="85000"/>
+              </a:lnSpc>
+              <a:spcBef>
+                <a:spcPts val="200"/>
+              </a:spcBef>
+              <a:spcAft>
+                <a:spcPts val="200"/>
               </a:spcAft>
               <a:defRPr sz="1700"/>
             </a:pPr>
@@ -6365,10 +6701,13 @@
           <a:p>
             <a:pPr>
               <a:lnSpc>
-                <a:spcPct val="90000"/>
-              </a:lnSpc>
-              <a:spcAft>
-                <a:spcPts val="300"/>
+                <a:spcPct val="85000"/>
+              </a:lnSpc>
+              <a:spcBef>
+                <a:spcPts val="200"/>
+              </a:spcBef>
+              <a:spcAft>
+                <a:spcPts val="200"/>
               </a:spcAft>
               <a:defRPr sz="1900"/>
             </a:pPr>
@@ -6391,10 +6730,13 @@
           <a:p>
             <a:pPr>
               <a:lnSpc>
-                <a:spcPct val="90000"/>
-              </a:lnSpc>
-              <a:spcAft>
-                <a:spcPts val="300"/>
+                <a:spcPct val="85000"/>
+              </a:lnSpc>
+              <a:spcBef>
+                <a:spcPts val="200"/>
+              </a:spcBef>
+              <a:spcAft>
+                <a:spcPts val="200"/>
               </a:spcAft>
               <a:defRPr sz="1900"/>
             </a:pPr>
@@ -6435,10 +6777,19 @@
         </p:nvSpPr>
         <p:spPr/>
         <p:txBody>
-          <a:bodyPr wrap="square"/>
+          <a:bodyPr wrap="square" tIns="25400" bIns="25400" lIns="63500" rIns="63500"/>
           <a:lstStyle/>
           <a:p>
             <a:pPr>
+              <a:lnSpc>
+                <a:spcPct val="85000"/>
+              </a:lnSpc>
+              <a:spcBef>
+                <a:spcPts val="200"/>
+              </a:spcBef>
+              <a:spcAft>
+                <a:spcPts val="200"/>
+              </a:spcAft>
               <a:defRPr sz="3800" b="1">
                 <a:solidFill>
                   <a:srgbClr val="764BA2"/>
@@ -6446,6 +6797,7 @@
               </a:defRPr>
             </a:pPr>
             <a:r>
+              <a:rPr/>
               <a:t>🎯 Problem Çözme</a:t>
             </a:r>
           </a:p>
@@ -6485,7 +6837,7 @@
           <a:noFill/>
         </p:spPr>
         <p:txBody>
-          <a:bodyPr wrap="square">
+          <a:bodyPr wrap="square" tIns="25400" bIns="25400" lIns="63500" rIns="63500">
             <a:spAutoFit/>
           </a:bodyPr>
           <a:lstStyle/>
@@ -6502,10 +6854,13 @@
           <a:p>
             <a:pPr>
               <a:lnSpc>
-                <a:spcPct val="90000"/>
-              </a:lnSpc>
-              <a:spcAft>
-                <a:spcPts val="300"/>
+                <a:spcPct val="85000"/>
+              </a:lnSpc>
+              <a:spcBef>
+                <a:spcPts val="200"/>
+              </a:spcBef>
+              <a:spcAft>
+                <a:spcPts val="200"/>
               </a:spcAft>
               <a:defRPr sz="1900"/>
             </a:pPr>
@@ -6528,10 +6883,13 @@
           <a:p>
             <a:pPr>
               <a:lnSpc>
-                <a:spcPct val="90000"/>
-              </a:lnSpc>
-              <a:spcAft>
-                <a:spcPts val="300"/>
+                <a:spcPct val="85000"/>
+              </a:lnSpc>
+              <a:spcBef>
+                <a:spcPts val="200"/>
+              </a:spcBef>
+              <a:spcAft>
+                <a:spcPts val="200"/>
               </a:spcAft>
               <a:defRPr sz="1900"/>
             </a:pPr>
@@ -6554,10 +6912,13 @@
           <a:p>
             <a:pPr>
               <a:lnSpc>
-                <a:spcPct val="90000"/>
-              </a:lnSpc>
-              <a:spcAft>
-                <a:spcPts val="300"/>
+                <a:spcPct val="85000"/>
+              </a:lnSpc>
+              <a:spcBef>
+                <a:spcPts val="200"/>
+              </a:spcBef>
+              <a:spcAft>
+                <a:spcPts val="200"/>
               </a:spcAft>
               <a:defRPr sz="1900"/>
             </a:pPr>
@@ -6569,10 +6930,13 @@
           <a:p>
             <a:pPr lvl="1">
               <a:lnSpc>
-                <a:spcPct val="90000"/>
-              </a:lnSpc>
-              <a:spcAft>
-                <a:spcPts val="300"/>
+                <a:spcPct val="85000"/>
+              </a:lnSpc>
+              <a:spcBef>
+                <a:spcPts val="200"/>
+              </a:spcBef>
+              <a:spcAft>
+                <a:spcPts val="200"/>
               </a:spcAft>
               <a:defRPr sz="1700"/>
             </a:pPr>
@@ -6584,10 +6948,13 @@
           <a:p>
             <a:pPr lvl="1">
               <a:lnSpc>
-                <a:spcPct val="90000"/>
-              </a:lnSpc>
-              <a:spcAft>
-                <a:spcPts val="300"/>
+                <a:spcPct val="85000"/>
+              </a:lnSpc>
+              <a:spcBef>
+                <a:spcPts val="200"/>
+              </a:spcBef>
+              <a:spcAft>
+                <a:spcPts val="200"/>
               </a:spcAft>
               <a:defRPr sz="1700"/>
             </a:pPr>
@@ -6599,10 +6966,13 @@
           <a:p>
             <a:pPr lvl="1">
               <a:lnSpc>
-                <a:spcPct val="90000"/>
-              </a:lnSpc>
-              <a:spcAft>
-                <a:spcPts val="300"/>
+                <a:spcPct val="85000"/>
+              </a:lnSpc>
+              <a:spcBef>
+                <a:spcPts val="200"/>
+              </a:spcBef>
+              <a:spcAft>
+                <a:spcPts val="200"/>
               </a:spcAft>
               <a:defRPr sz="1700"/>
             </a:pPr>
@@ -6625,10 +6995,13 @@
           <a:p>
             <a:pPr>
               <a:lnSpc>
-                <a:spcPct val="90000"/>
-              </a:lnSpc>
-              <a:spcAft>
-                <a:spcPts val="300"/>
+                <a:spcPct val="85000"/>
+              </a:lnSpc>
+              <a:spcBef>
+                <a:spcPts val="200"/>
+              </a:spcBef>
+              <a:spcAft>
+                <a:spcPts val="200"/>
               </a:spcAft>
               <a:defRPr sz="1900"/>
             </a:pPr>
@@ -6640,10 +7013,13 @@
           <a:p>
             <a:pPr lvl="1">
               <a:lnSpc>
-                <a:spcPct val="90000"/>
-              </a:lnSpc>
-              <a:spcAft>
-                <a:spcPts val="300"/>
+                <a:spcPct val="85000"/>
+              </a:lnSpc>
+              <a:spcBef>
+                <a:spcPts val="200"/>
+              </a:spcBef>
+              <a:spcAft>
+                <a:spcPts val="200"/>
               </a:spcAft>
               <a:defRPr sz="1700"/>
             </a:pPr>
@@ -6655,10 +7031,13 @@
           <a:p>
             <a:pPr lvl="1">
               <a:lnSpc>
-                <a:spcPct val="90000"/>
-              </a:lnSpc>
-              <a:spcAft>
-                <a:spcPts val="300"/>
+                <a:spcPct val="85000"/>
+              </a:lnSpc>
+              <a:spcBef>
+                <a:spcPts val="200"/>
+              </a:spcBef>
+              <a:spcAft>
+                <a:spcPts val="200"/>
               </a:spcAft>
               <a:defRPr sz="1700"/>
             </a:pPr>
@@ -6681,10 +7060,13 @@
           <a:p>
             <a:pPr>
               <a:lnSpc>
-                <a:spcPct val="90000"/>
-              </a:lnSpc>
-              <a:spcAft>
-                <a:spcPts val="300"/>
+                <a:spcPct val="85000"/>
+              </a:lnSpc>
+              <a:spcBef>
+                <a:spcPts val="200"/>
+              </a:spcBef>
+              <a:spcAft>
+                <a:spcPts val="200"/>
               </a:spcAft>
               <a:defRPr sz="1900"/>
             </a:pPr>
@@ -6696,10 +7078,13 @@
           <a:p>
             <a:pPr lvl="1">
               <a:lnSpc>
-                <a:spcPct val="90000"/>
-              </a:lnSpc>
-              <a:spcAft>
-                <a:spcPts val="300"/>
+                <a:spcPct val="85000"/>
+              </a:lnSpc>
+              <a:spcBef>
+                <a:spcPts val="200"/>
+              </a:spcBef>
+              <a:spcAft>
+                <a:spcPts val="200"/>
               </a:spcAft>
               <a:defRPr sz="1700"/>
             </a:pPr>
@@ -6722,10 +7107,13 @@
           <a:p>
             <a:pPr>
               <a:lnSpc>
-                <a:spcPct val="90000"/>
-              </a:lnSpc>
-              <a:spcAft>
-                <a:spcPts val="300"/>
+                <a:spcPct val="85000"/>
+              </a:lnSpc>
+              <a:spcBef>
+                <a:spcPts val="200"/>
+              </a:spcBef>
+              <a:spcAft>
+                <a:spcPts val="200"/>
               </a:spcAft>
               <a:defRPr sz="1900"/>
             </a:pPr>
@@ -6737,10 +7125,13 @@
           <a:p>
             <a:pPr lvl="1">
               <a:lnSpc>
-                <a:spcPct val="90000"/>
-              </a:lnSpc>
-              <a:spcAft>
-                <a:spcPts val="300"/>
+                <a:spcPct val="85000"/>
+              </a:lnSpc>
+              <a:spcBef>
+                <a:spcPts val="200"/>
+              </a:spcBef>
+              <a:spcAft>
+                <a:spcPts val="200"/>
               </a:spcAft>
               <a:defRPr sz="1700"/>
             </a:pPr>
@@ -6752,10 +7143,13 @@
           <a:p>
             <a:pPr lvl="1">
               <a:lnSpc>
-                <a:spcPct val="90000"/>
-              </a:lnSpc>
-              <a:spcAft>
-                <a:spcPts val="300"/>
+                <a:spcPct val="85000"/>
+              </a:lnSpc>
+              <a:spcBef>
+                <a:spcPts val="200"/>
+              </a:spcBef>
+              <a:spcAft>
+                <a:spcPts val="200"/>
               </a:spcAft>
               <a:defRPr sz="1700"/>
             </a:pPr>
@@ -6778,10 +7172,13 @@
           <a:p>
             <a:pPr>
               <a:lnSpc>
-                <a:spcPct val="90000"/>
-              </a:lnSpc>
-              <a:spcAft>
-                <a:spcPts val="300"/>
+                <a:spcPct val="85000"/>
+              </a:lnSpc>
+              <a:spcBef>
+                <a:spcPts val="200"/>
+              </a:spcBef>
+              <a:spcAft>
+                <a:spcPts val="200"/>
               </a:spcAft>
               <a:defRPr sz="1900"/>
             </a:pPr>
@@ -6793,10 +7190,13 @@
           <a:p>
             <a:pPr lvl="1">
               <a:lnSpc>
-                <a:spcPct val="90000"/>
-              </a:lnSpc>
-              <a:spcAft>
-                <a:spcPts val="300"/>
+                <a:spcPct val="85000"/>
+              </a:lnSpc>
+              <a:spcBef>
+                <a:spcPts val="200"/>
+              </a:spcBef>
+              <a:spcAft>
+                <a:spcPts val="200"/>
               </a:spcAft>
               <a:defRPr sz="1700"/>
             </a:pPr>
@@ -6808,10 +7208,13 @@
           <a:p>
             <a:pPr lvl="1">
               <a:lnSpc>
-                <a:spcPct val="90000"/>
-              </a:lnSpc>
-              <a:spcAft>
-                <a:spcPts val="300"/>
+                <a:spcPct val="85000"/>
+              </a:lnSpc>
+              <a:spcBef>
+                <a:spcPts val="200"/>
+              </a:spcBef>
+              <a:spcAft>
+                <a:spcPts val="200"/>
               </a:spcAft>
               <a:defRPr sz="1700"/>
             </a:pPr>
@@ -6834,10 +7237,13 @@
           <a:p>
             <a:pPr>
               <a:lnSpc>
-                <a:spcPct val="90000"/>
-              </a:lnSpc>
-              <a:spcAft>
-                <a:spcPts val="300"/>
+                <a:spcPct val="85000"/>
+              </a:lnSpc>
+              <a:spcBef>
+                <a:spcPts val="200"/>
+              </a:spcBef>
+              <a:spcAft>
+                <a:spcPts val="200"/>
               </a:spcAft>
               <a:defRPr sz="1900"/>
             </a:pPr>
@@ -6878,10 +7284,19 @@
         </p:nvSpPr>
         <p:spPr/>
         <p:txBody>
-          <a:bodyPr wrap="square"/>
+          <a:bodyPr wrap="square" tIns="25400" bIns="25400" lIns="63500" rIns="63500"/>
           <a:lstStyle/>
           <a:p>
             <a:pPr>
+              <a:lnSpc>
+                <a:spcPct val="85000"/>
+              </a:lnSpc>
+              <a:spcBef>
+                <a:spcPts val="200"/>
+              </a:spcBef>
+              <a:spcAft>
+                <a:spcPts val="200"/>
+              </a:spcAft>
               <a:defRPr sz="3800" b="1">
                 <a:solidFill>
                   <a:srgbClr val="764BA2"/>
@@ -6889,6 +7304,7 @@
               </a:defRPr>
             </a:pPr>
             <a:r>
+              <a:rPr/>
               <a:t>📝 Ünite Özeti</a:t>
             </a:r>
           </a:p>
@@ -6928,7 +7344,7 @@
           <a:noFill/>
         </p:spPr>
         <p:txBody>
-          <a:bodyPr wrap="square">
+          <a:bodyPr wrap="square" tIns="25400" bIns="25400" lIns="63500" rIns="63500">
             <a:spAutoFit/>
           </a:bodyPr>
           <a:lstStyle/>
@@ -6945,10 +7361,13 @@
           <a:p>
             <a:pPr>
               <a:lnSpc>
-                <a:spcPct val="90000"/>
-              </a:lnSpc>
-              <a:spcAft>
-                <a:spcPts val="300"/>
+                <a:spcPct val="85000"/>
+              </a:lnSpc>
+              <a:spcBef>
+                <a:spcPts val="200"/>
+              </a:spcBef>
+              <a:spcAft>
+                <a:spcPts val="200"/>
               </a:spcAft>
               <a:defRPr sz="1900"/>
             </a:pPr>
@@ -6971,10 +7390,13 @@
           <a:p>
             <a:pPr>
               <a:lnSpc>
-                <a:spcPct val="90000"/>
-              </a:lnSpc>
-              <a:spcAft>
-                <a:spcPts val="300"/>
+                <a:spcPct val="85000"/>
+              </a:lnSpc>
+              <a:spcBef>
+                <a:spcPts val="200"/>
+              </a:spcBef>
+              <a:spcAft>
+                <a:spcPts val="200"/>
               </a:spcAft>
               <a:defRPr sz="1900"/>
             </a:pPr>
@@ -6986,10 +7408,13 @@
           <a:p>
             <a:pPr>
               <a:lnSpc>
-                <a:spcPct val="90000"/>
-              </a:lnSpc>
-              <a:spcAft>
-                <a:spcPts val="300"/>
+                <a:spcPct val="85000"/>
+              </a:lnSpc>
+              <a:spcBef>
+                <a:spcPts val="200"/>
+              </a:spcBef>
+              <a:spcAft>
+                <a:spcPts val="200"/>
               </a:spcAft>
               <a:defRPr sz="1900"/>
             </a:pPr>
@@ -7001,10 +7426,13 @@
           <a:p>
             <a:pPr>
               <a:lnSpc>
-                <a:spcPct val="90000"/>
-              </a:lnSpc>
-              <a:spcAft>
-                <a:spcPts val="300"/>
+                <a:spcPct val="85000"/>
+              </a:lnSpc>
+              <a:spcBef>
+                <a:spcPts val="200"/>
+              </a:spcBef>
+              <a:spcAft>
+                <a:spcPts val="200"/>
               </a:spcAft>
               <a:defRPr sz="1900"/>
             </a:pPr>
@@ -7016,10 +7444,13 @@
           <a:p>
             <a:pPr>
               <a:lnSpc>
-                <a:spcPct val="90000"/>
-              </a:lnSpc>
-              <a:spcAft>
-                <a:spcPts val="300"/>
+                <a:spcPct val="85000"/>
+              </a:lnSpc>
+              <a:spcBef>
+                <a:spcPts val="200"/>
+              </a:spcBef>
+              <a:spcAft>
+                <a:spcPts val="200"/>
               </a:spcAft>
               <a:defRPr sz="1900"/>
             </a:pPr>
@@ -7031,10 +7462,13 @@
           <a:p>
             <a:pPr>
               <a:lnSpc>
-                <a:spcPct val="90000"/>
-              </a:lnSpc>
-              <a:spcAft>
-                <a:spcPts val="300"/>
+                <a:spcPct val="85000"/>
+              </a:lnSpc>
+              <a:spcBef>
+                <a:spcPts val="200"/>
+              </a:spcBef>
+              <a:spcAft>
+                <a:spcPts val="200"/>
               </a:spcAft>
               <a:defRPr sz="1900"/>
             </a:pPr>
@@ -7046,10 +7480,13 @@
           <a:p>
             <a:pPr>
               <a:lnSpc>
-                <a:spcPct val="90000"/>
-              </a:lnSpc>
-              <a:spcAft>
-                <a:spcPts val="300"/>
+                <a:spcPct val="85000"/>
+              </a:lnSpc>
+              <a:spcBef>
+                <a:spcPts val="200"/>
+              </a:spcBef>
+              <a:spcAft>
+                <a:spcPts val="200"/>
               </a:spcAft>
               <a:defRPr sz="1900"/>
             </a:pPr>
@@ -7072,10 +7509,13 @@
           <a:p>
             <a:pPr>
               <a:lnSpc>
-                <a:spcPct val="90000"/>
-              </a:lnSpc>
-              <a:spcAft>
-                <a:spcPts val="300"/>
+                <a:spcPct val="85000"/>
+              </a:lnSpc>
+              <a:spcBef>
+                <a:spcPts val="200"/>
+              </a:spcBef>
+              <a:spcAft>
+                <a:spcPts val="200"/>
               </a:spcAft>
               <a:defRPr sz="1900"/>
             </a:pPr>
@@ -7087,10 +7527,13 @@
           <a:p>
             <a:pPr>
               <a:lnSpc>
-                <a:spcPct val="90000"/>
-              </a:lnSpc>
-              <a:spcAft>
-                <a:spcPts val="300"/>
+                <a:spcPct val="85000"/>
+              </a:lnSpc>
+              <a:spcBef>
+                <a:spcPts val="200"/>
+              </a:spcBef>
+              <a:spcAft>
+                <a:spcPts val="200"/>
               </a:spcAft>
               <a:defRPr sz="1900"/>
             </a:pPr>
@@ -7102,10 +7545,13 @@
           <a:p>
             <a:pPr>
               <a:lnSpc>
-                <a:spcPct val="90000"/>
-              </a:lnSpc>
-              <a:spcAft>
-                <a:spcPts val="300"/>
+                <a:spcPct val="85000"/>
+              </a:lnSpc>
+              <a:spcBef>
+                <a:spcPts val="200"/>
+              </a:spcBef>
+              <a:spcAft>
+                <a:spcPts val="200"/>
               </a:spcAft>
               <a:defRPr sz="1900"/>
             </a:pPr>
@@ -7128,10 +7574,13 @@
           <a:p>
             <a:pPr>
               <a:lnSpc>
-                <a:spcPct val="90000"/>
-              </a:lnSpc>
-              <a:spcAft>
-                <a:spcPts val="300"/>
+                <a:spcPct val="85000"/>
+              </a:lnSpc>
+              <a:spcBef>
+                <a:spcPts val="200"/>
+              </a:spcBef>
+              <a:spcAft>
+                <a:spcPts val="200"/>
               </a:spcAft>
               <a:defRPr sz="1900"/>
             </a:pPr>
